--- a/presentation_arscontrol_template.pptx
+++ b/presentation_arscontrol_template.pptx
@@ -1,22 +1,22 @@
 
 <file path=ppt/presentation.xml><?xml version="1.0" encoding="utf-8"?>
-<p:presentation xmlns:a="http://schemas.openxmlformats.org/drawingml/2006/main" xmlns:r="http://schemas.openxmlformats.org/officeDocument/2006/relationships" xmlns:mc="http://schemas.openxmlformats.org/markup-compatibility/2006" xmlns:mv="urn:schemas-microsoft-com:mac:vml" xmlns:p="http://schemas.openxmlformats.org/presentationml/2006/main" xmlns:c="http://schemas.openxmlformats.org/drawingml/2006/chart" xmlns:dgm="http://schemas.openxmlformats.org/drawingml/2006/diagram" xmlns:o="urn:schemas-microsoft-com:office:office" xmlns:v="urn:schemas-microsoft-com:vml" xmlns:pvml="urn:schemas-microsoft-com:office:powerpoint" xmlns:com="http://schemas.openxmlformats.org/drawingml/2006/compatibility" xmlns:p14="http://schemas.microsoft.com/office/powerpoint/2010/main" xmlns:p15="http://schemas.microsoft.com/office/powerpoint/2012/main" xmlns:ahyp="http://schemas.microsoft.com/office/drawing/2018/hyperlinkcolor" autoCompressPictures="0" strictFirstAndLastChars="0" saveSubsetFonts="1" showSpecialPlsOnTitleSld="0">
+<p:presentation xmlns:a="http://schemas.openxmlformats.org/drawingml/2006/main" xmlns:r="http://schemas.openxmlformats.org/officeDocument/2006/relationships" xmlns:p="http://schemas.openxmlformats.org/presentationml/2006/main" showSpecialPlsOnTitleSld="0" strictFirstAndLastChars="0" saveSubsetFonts="1" autoCompressPictures="0">
   <p:sldMasterIdLst>
-    <p:sldMasterId id="2147483653" r:id="rId3"/>
+    <p:sldMasterId id="2147483653" r:id="rId1"/>
   </p:sldMasterIdLst>
   <p:notesMasterIdLst>
-    <p:notesMasterId r:id="rId4"/>
+    <p:notesMasterId r:id="rId6"/>
   </p:notesMasterIdLst>
   <p:sldIdLst>
-    <p:sldId id="256" r:id="rId5"/>
-    <p:sldId id="257" r:id="rId6"/>
-    <p:sldId id="258" r:id="rId7"/>
-    <p:sldId id="259" r:id="rId8"/>
+    <p:sldId id="256" r:id="rId2"/>
+    <p:sldId id="257" r:id="rId3"/>
+    <p:sldId id="258" r:id="rId4"/>
+    <p:sldId id="259" r:id="rId5"/>
   </p:sldIdLst>
-  <p:sldSz cy="5143500" cx="9144000"/>
+  <p:sldSz cx="9144000" cy="5143500" type="screen16x9"/>
   <p:notesSz cx="6858000" cy="9144000"/>
   <p:defaultTextStyle>
-    <a:defPPr lvl="0" marR="0" rtl="0" algn="l">
+    <a:defPPr marR="0" lvl="0" algn="l" rtl="0">
       <a:lnSpc>
         <a:spcPct val="100000"/>
       </a:lnSpc>
@@ -27,7 +27,7 @@
         <a:spcPts val="0"/>
       </a:spcAft>
     </a:defPPr>
-    <a:lvl1pPr lvl="0" marR="0" rtl="0" algn="l">
+    <a:lvl1pPr marR="0" lvl="0" algn="l" rtl="0">
       <a:lnSpc>
         <a:spcPct val="100000"/>
       </a:lnSpc>
@@ -41,7 +41,7 @@
         <a:srgbClr val="000000"/>
       </a:buClr>
       <a:buFont typeface="Arial"/>
-      <a:defRPr b="0" i="0" sz="1400" u="none" cap="none" strike="noStrike">
+      <a:defRPr sz="1400" b="0" i="0" u="none" strike="noStrike" cap="none">
         <a:solidFill>
           <a:srgbClr val="000000"/>
         </a:solidFill>
@@ -51,7 +51,7 @@
         <a:sym typeface="Arial"/>
       </a:defRPr>
     </a:lvl1pPr>
-    <a:lvl2pPr lvl="1" marR="0" rtl="0" algn="l">
+    <a:lvl2pPr marR="0" lvl="1" algn="l" rtl="0">
       <a:lnSpc>
         <a:spcPct val="100000"/>
       </a:lnSpc>
@@ -65,7 +65,7 @@
         <a:srgbClr val="000000"/>
       </a:buClr>
       <a:buFont typeface="Arial"/>
-      <a:defRPr b="0" i="0" sz="1400" u="none" cap="none" strike="noStrike">
+      <a:defRPr sz="1400" b="0" i="0" u="none" strike="noStrike" cap="none">
         <a:solidFill>
           <a:srgbClr val="000000"/>
         </a:solidFill>
@@ -75,7 +75,7 @@
         <a:sym typeface="Arial"/>
       </a:defRPr>
     </a:lvl2pPr>
-    <a:lvl3pPr lvl="2" marR="0" rtl="0" algn="l">
+    <a:lvl3pPr marR="0" lvl="2" algn="l" rtl="0">
       <a:lnSpc>
         <a:spcPct val="100000"/>
       </a:lnSpc>
@@ -89,7 +89,7 @@
         <a:srgbClr val="000000"/>
       </a:buClr>
       <a:buFont typeface="Arial"/>
-      <a:defRPr b="0" i="0" sz="1400" u="none" cap="none" strike="noStrike">
+      <a:defRPr sz="1400" b="0" i="0" u="none" strike="noStrike" cap="none">
         <a:solidFill>
           <a:srgbClr val="000000"/>
         </a:solidFill>
@@ -99,7 +99,7 @@
         <a:sym typeface="Arial"/>
       </a:defRPr>
     </a:lvl3pPr>
-    <a:lvl4pPr lvl="3" marR="0" rtl="0" algn="l">
+    <a:lvl4pPr marR="0" lvl="3" algn="l" rtl="0">
       <a:lnSpc>
         <a:spcPct val="100000"/>
       </a:lnSpc>
@@ -113,7 +113,7 @@
         <a:srgbClr val="000000"/>
       </a:buClr>
       <a:buFont typeface="Arial"/>
-      <a:defRPr b="0" i="0" sz="1400" u="none" cap="none" strike="noStrike">
+      <a:defRPr sz="1400" b="0" i="0" u="none" strike="noStrike" cap="none">
         <a:solidFill>
           <a:srgbClr val="000000"/>
         </a:solidFill>
@@ -123,7 +123,7 @@
         <a:sym typeface="Arial"/>
       </a:defRPr>
     </a:lvl4pPr>
-    <a:lvl5pPr lvl="4" marR="0" rtl="0" algn="l">
+    <a:lvl5pPr marR="0" lvl="4" algn="l" rtl="0">
       <a:lnSpc>
         <a:spcPct val="100000"/>
       </a:lnSpc>
@@ -137,7 +137,7 @@
         <a:srgbClr val="000000"/>
       </a:buClr>
       <a:buFont typeface="Arial"/>
-      <a:defRPr b="0" i="0" sz="1400" u="none" cap="none" strike="noStrike">
+      <a:defRPr sz="1400" b="0" i="0" u="none" strike="noStrike" cap="none">
         <a:solidFill>
           <a:srgbClr val="000000"/>
         </a:solidFill>
@@ -147,7 +147,7 @@
         <a:sym typeface="Arial"/>
       </a:defRPr>
     </a:lvl5pPr>
-    <a:lvl6pPr lvl="5" marR="0" rtl="0" algn="l">
+    <a:lvl6pPr marR="0" lvl="5" algn="l" rtl="0">
       <a:lnSpc>
         <a:spcPct val="100000"/>
       </a:lnSpc>
@@ -161,7 +161,7 @@
         <a:srgbClr val="000000"/>
       </a:buClr>
       <a:buFont typeface="Arial"/>
-      <a:defRPr b="0" i="0" sz="1400" u="none" cap="none" strike="noStrike">
+      <a:defRPr sz="1400" b="0" i="0" u="none" strike="noStrike" cap="none">
         <a:solidFill>
           <a:srgbClr val="000000"/>
         </a:solidFill>
@@ -171,7 +171,7 @@
         <a:sym typeface="Arial"/>
       </a:defRPr>
     </a:lvl6pPr>
-    <a:lvl7pPr lvl="6" marR="0" rtl="0" algn="l">
+    <a:lvl7pPr marR="0" lvl="6" algn="l" rtl="0">
       <a:lnSpc>
         <a:spcPct val="100000"/>
       </a:lnSpc>
@@ -185,7 +185,7 @@
         <a:srgbClr val="000000"/>
       </a:buClr>
       <a:buFont typeface="Arial"/>
-      <a:defRPr b="0" i="0" sz="1400" u="none" cap="none" strike="noStrike">
+      <a:defRPr sz="1400" b="0" i="0" u="none" strike="noStrike" cap="none">
         <a:solidFill>
           <a:srgbClr val="000000"/>
         </a:solidFill>
@@ -195,7 +195,7 @@
         <a:sym typeface="Arial"/>
       </a:defRPr>
     </a:lvl7pPr>
-    <a:lvl8pPr lvl="7" marR="0" rtl="0" algn="l">
+    <a:lvl8pPr marR="0" lvl="7" algn="l" rtl="0">
       <a:lnSpc>
         <a:spcPct val="100000"/>
       </a:lnSpc>
@@ -209,7 +209,7 @@
         <a:srgbClr val="000000"/>
       </a:buClr>
       <a:buFont typeface="Arial"/>
-      <a:defRPr b="0" i="0" sz="1400" u="none" cap="none" strike="noStrike">
+      <a:defRPr sz="1400" b="0" i="0" u="none" strike="noStrike" cap="none">
         <a:solidFill>
           <a:srgbClr val="000000"/>
         </a:solidFill>
@@ -219,7 +219,7 @@
         <a:sym typeface="Arial"/>
       </a:defRPr>
     </a:lvl8pPr>
-    <a:lvl9pPr lvl="8" marR="0" rtl="0" algn="l">
+    <a:lvl9pPr marR="0" lvl="8" algn="l" rtl="0">
       <a:lnSpc>
         <a:spcPct val="100000"/>
       </a:lnSpc>
@@ -233,7 +233,7 @@
         <a:srgbClr val="000000"/>
       </a:buClr>
       <a:buFont typeface="Arial"/>
-      <a:defRPr b="0" i="0" sz="1400" u="none" cap="none" strike="noStrike">
+      <a:defRPr sz="1400" b="0" i="0" u="none" strike="noStrike" cap="none">
         <a:solidFill>
           <a:srgbClr val="000000"/>
         </a:solidFill>
@@ -248,18 +248,19 @@
 </file>
 
 <file path=ppt/notesMasters/notesMaster1.xml><?xml version="1.0" encoding="utf-8"?>
-<p:notesMaster xmlns:a="http://schemas.openxmlformats.org/drawingml/2006/main" xmlns:r="http://schemas.openxmlformats.org/officeDocument/2006/relationships" xmlns:mc="http://schemas.openxmlformats.org/markup-compatibility/2006" xmlns:mv="urn:schemas-microsoft-com:mac:vml" xmlns:p="http://schemas.openxmlformats.org/presentationml/2006/main" xmlns:c="http://schemas.openxmlformats.org/drawingml/2006/chart" xmlns:dgm="http://schemas.openxmlformats.org/drawingml/2006/diagram" xmlns:o="urn:schemas-microsoft-com:office:office" xmlns:v="urn:schemas-microsoft-com:vml" xmlns:pvml="urn:schemas-microsoft-com:office:powerpoint" xmlns:com="http://schemas.openxmlformats.org/drawingml/2006/compatibility" xmlns:p14="http://schemas.microsoft.com/office/powerpoint/2010/main" xmlns:p15="http://schemas.microsoft.com/office/powerpoint/2012/main" xmlns:ahyp="http://schemas.microsoft.com/office/drawing/2018/hyperlinkcolor">
+<p:notesMaster xmlns:a="http://schemas.openxmlformats.org/drawingml/2006/main" xmlns:r="http://schemas.openxmlformats.org/officeDocument/2006/relationships" xmlns:p="http://schemas.openxmlformats.org/presentationml/2006/main">
   <p:cSld>
     <p:bg>
       <p:bgPr>
         <a:solidFill>
           <a:schemeClr val="lt1"/>
         </a:solidFill>
+        <a:effectLst/>
       </p:bgPr>
     </p:bg>
     <p:spTree>
       <p:nvGrpSpPr>
-        <p:cNvPr id="2" name="Shape 2"/>
+        <p:cNvPr id="1" name="Shape 2"/>
         <p:cNvGrpSpPr/>
         <p:nvPr/>
       </p:nvGrpSpPr>
@@ -274,9 +275,11 @@
       <p:sp>
         <p:nvSpPr>
           <p:cNvPr id="3" name="Google Shape;3;n"/>
-          <p:cNvSpPr/>
+          <p:cNvSpPr>
+            <a:spLocks noGrp="1" noRot="1" noChangeAspect="1"/>
+          </p:cNvSpPr>
           <p:nvPr>
-            <p:ph idx="2" type="sldImg"/>
+            <p:ph type="sldImg" idx="2"/>
           </p:nvPr>
         </p:nvSpPr>
         <p:spPr>
@@ -285,9 +288,13 @@
             <a:ext cx="6096075" cy="3429000"/>
           </a:xfrm>
           <a:custGeom>
-            <a:rect b="b" l="l" r="r" t="t"/>
+            <a:avLst/>
+            <a:gdLst/>
+            <a:ahLst/>
+            <a:cxnLst/>
+            <a:rect l="l" t="t" r="r" b="b"/>
             <a:pathLst>
-              <a:path extrusionOk="0" h="120000" w="120000">
+              <a:path w="120000" h="120000" extrusionOk="0">
                 <a:moveTo>
                   <a:pt x="0" y="0"/>
                 </a:moveTo>
@@ -305,23 +312,25 @@
             </a:pathLst>
           </a:custGeom>
           <a:noFill/>
-          <a:ln cap="flat" cmpd="sng" w="9525">
+          <a:ln w="9525" cap="flat" cmpd="sng">
             <a:solidFill>
               <a:srgbClr val="000000"/>
             </a:solidFill>
             <a:prstDash val="solid"/>
             <a:round/>
-            <a:headEnd len="sm" w="sm" type="none"/>
-            <a:tailEnd len="sm" w="sm" type="none"/>
+            <a:headEnd type="none" w="sm" len="sm"/>
+            <a:tailEnd type="none" w="sm" len="sm"/>
           </a:ln>
         </p:spPr>
       </p:sp>
       <p:sp>
         <p:nvSpPr>
           <p:cNvPr id="4" name="Google Shape;4;n"/>
-          <p:cNvSpPr txBox="1"/>
+          <p:cNvSpPr txBox="1">
+            <a:spLocks noGrp="1"/>
+          </p:cNvSpPr>
           <p:nvPr>
-            <p:ph idx="1" type="body"/>
+            <p:ph type="body" idx="1"/>
           </p:nvPr>
         </p:nvSpPr>
         <p:spPr>
@@ -338,11 +347,11 @@
           </a:ln>
         </p:spPr>
         <p:txBody>
-          <a:bodyPr anchorCtr="0" anchor="t" bIns="91425" lIns="91425" spcFirstLastPara="1" rIns="91425" wrap="square" tIns="91425">
+          <a:bodyPr spcFirstLastPara="1" wrap="square" lIns="91425" tIns="91425" rIns="91425" bIns="91425" anchor="t" anchorCtr="0">
             <a:noAutofit/>
           </a:bodyPr>
           <a:lstStyle>
-            <a:lvl1pPr indent="-298450" lvl="0" marL="457200" marR="0" rtl="0" algn="l">
+            <a:lvl1pPr marL="457200" marR="0" lvl="0" indent="-298450" algn="l" rtl="0">
               <a:lnSpc>
                 <a:spcPct val="100000"/>
               </a:lnSpc>
@@ -358,7 +367,7 @@
               <a:buSzPts val="1100"/>
               <a:buFont typeface="Arial"/>
               <a:buChar char="●"/>
-              <a:defRPr b="0" i="0" sz="1100" u="none" cap="none" strike="noStrike">
+              <a:defRPr sz="1100" b="0" i="0" u="none" strike="noStrike" cap="none">
                 <a:solidFill>
                   <a:srgbClr val="000000"/>
                 </a:solidFill>
@@ -368,7 +377,7 @@
                 <a:sym typeface="Arial"/>
               </a:defRPr>
             </a:lvl1pPr>
-            <a:lvl2pPr indent="-298450" lvl="1" marL="914400" marR="0" rtl="0" algn="l">
+            <a:lvl2pPr marL="914400" marR="0" lvl="1" indent="-298450" algn="l" rtl="0">
               <a:lnSpc>
                 <a:spcPct val="100000"/>
               </a:lnSpc>
@@ -384,7 +393,7 @@
               <a:buSzPts val="1100"/>
               <a:buFont typeface="Arial"/>
               <a:buChar char="○"/>
-              <a:defRPr b="0" i="0" sz="1100" u="none" cap="none" strike="noStrike">
+              <a:defRPr sz="1100" b="0" i="0" u="none" strike="noStrike" cap="none">
                 <a:solidFill>
                   <a:srgbClr val="000000"/>
                 </a:solidFill>
@@ -394,7 +403,7 @@
                 <a:sym typeface="Arial"/>
               </a:defRPr>
             </a:lvl2pPr>
-            <a:lvl3pPr indent="-298450" lvl="2" marL="1371600" marR="0" rtl="0" algn="l">
+            <a:lvl3pPr marL="1371600" marR="0" lvl="2" indent="-298450" algn="l" rtl="0">
               <a:lnSpc>
                 <a:spcPct val="100000"/>
               </a:lnSpc>
@@ -410,7 +419,7 @@
               <a:buSzPts val="1100"/>
               <a:buFont typeface="Arial"/>
               <a:buChar char="■"/>
-              <a:defRPr b="0" i="0" sz="1100" u="none" cap="none" strike="noStrike">
+              <a:defRPr sz="1100" b="0" i="0" u="none" strike="noStrike" cap="none">
                 <a:solidFill>
                   <a:srgbClr val="000000"/>
                 </a:solidFill>
@@ -420,7 +429,7 @@
                 <a:sym typeface="Arial"/>
               </a:defRPr>
             </a:lvl3pPr>
-            <a:lvl4pPr indent="-298450" lvl="3" marL="1828800" marR="0" rtl="0" algn="l">
+            <a:lvl4pPr marL="1828800" marR="0" lvl="3" indent="-298450" algn="l" rtl="0">
               <a:lnSpc>
                 <a:spcPct val="100000"/>
               </a:lnSpc>
@@ -436,7 +445,7 @@
               <a:buSzPts val="1100"/>
               <a:buFont typeface="Arial"/>
               <a:buChar char="●"/>
-              <a:defRPr b="0" i="0" sz="1100" u="none" cap="none" strike="noStrike">
+              <a:defRPr sz="1100" b="0" i="0" u="none" strike="noStrike" cap="none">
                 <a:solidFill>
                   <a:srgbClr val="000000"/>
                 </a:solidFill>
@@ -446,7 +455,7 @@
                 <a:sym typeface="Arial"/>
               </a:defRPr>
             </a:lvl4pPr>
-            <a:lvl5pPr indent="-298450" lvl="4" marL="2286000" marR="0" rtl="0" algn="l">
+            <a:lvl5pPr marL="2286000" marR="0" lvl="4" indent="-298450" algn="l" rtl="0">
               <a:lnSpc>
                 <a:spcPct val="100000"/>
               </a:lnSpc>
@@ -462,7 +471,7 @@
               <a:buSzPts val="1100"/>
               <a:buFont typeface="Arial"/>
               <a:buChar char="○"/>
-              <a:defRPr b="0" i="0" sz="1100" u="none" cap="none" strike="noStrike">
+              <a:defRPr sz="1100" b="0" i="0" u="none" strike="noStrike" cap="none">
                 <a:solidFill>
                   <a:srgbClr val="000000"/>
                 </a:solidFill>
@@ -472,7 +481,7 @@
                 <a:sym typeface="Arial"/>
               </a:defRPr>
             </a:lvl5pPr>
-            <a:lvl6pPr indent="-298450" lvl="5" marL="2743200" marR="0" rtl="0" algn="l">
+            <a:lvl6pPr marL="2743200" marR="0" lvl="5" indent="-298450" algn="l" rtl="0">
               <a:lnSpc>
                 <a:spcPct val="100000"/>
               </a:lnSpc>
@@ -488,7 +497,7 @@
               <a:buSzPts val="1100"/>
               <a:buFont typeface="Arial"/>
               <a:buChar char="■"/>
-              <a:defRPr b="0" i="0" sz="1100" u="none" cap="none" strike="noStrike">
+              <a:defRPr sz="1100" b="0" i="0" u="none" strike="noStrike" cap="none">
                 <a:solidFill>
                   <a:srgbClr val="000000"/>
                 </a:solidFill>
@@ -498,7 +507,7 @@
                 <a:sym typeface="Arial"/>
               </a:defRPr>
             </a:lvl6pPr>
-            <a:lvl7pPr indent="-298450" lvl="6" marL="3200400" marR="0" rtl="0" algn="l">
+            <a:lvl7pPr marL="3200400" marR="0" lvl="6" indent="-298450" algn="l" rtl="0">
               <a:lnSpc>
                 <a:spcPct val="100000"/>
               </a:lnSpc>
@@ -514,7 +523,7 @@
               <a:buSzPts val="1100"/>
               <a:buFont typeface="Arial"/>
               <a:buChar char="●"/>
-              <a:defRPr b="0" i="0" sz="1100" u="none" cap="none" strike="noStrike">
+              <a:defRPr sz="1100" b="0" i="0" u="none" strike="noStrike" cap="none">
                 <a:solidFill>
                   <a:srgbClr val="000000"/>
                 </a:solidFill>
@@ -524,7 +533,7 @@
                 <a:sym typeface="Arial"/>
               </a:defRPr>
             </a:lvl7pPr>
-            <a:lvl8pPr indent="-298450" lvl="7" marL="3657600" marR="0" rtl="0" algn="l">
+            <a:lvl8pPr marL="3657600" marR="0" lvl="7" indent="-298450" algn="l" rtl="0">
               <a:lnSpc>
                 <a:spcPct val="100000"/>
               </a:lnSpc>
@@ -540,7 +549,7 @@
               <a:buSzPts val="1100"/>
               <a:buFont typeface="Arial"/>
               <a:buChar char="○"/>
-              <a:defRPr b="0" i="0" sz="1100" u="none" cap="none" strike="noStrike">
+              <a:defRPr sz="1100" b="0" i="0" u="none" strike="noStrike" cap="none">
                 <a:solidFill>
                   <a:srgbClr val="000000"/>
                 </a:solidFill>
@@ -550,7 +559,7 @@
                 <a:sym typeface="Arial"/>
               </a:defRPr>
             </a:lvl8pPr>
-            <a:lvl9pPr indent="-298450" lvl="8" marL="4114800" marR="0" rtl="0" algn="l">
+            <a:lvl9pPr marL="4114800" marR="0" lvl="8" indent="-298450" algn="l" rtl="0">
               <a:lnSpc>
                 <a:spcPct val="100000"/>
               </a:lnSpc>
@@ -566,7 +575,7 @@
               <a:buSzPts val="1100"/>
               <a:buFont typeface="Arial"/>
               <a:buChar char="■"/>
-              <a:defRPr b="0" i="0" sz="1100" u="none" cap="none" strike="noStrike">
+              <a:defRPr sz="1100" b="0" i="0" u="none" strike="noStrike" cap="none">
                 <a:solidFill>
                   <a:srgbClr val="000000"/>
                 </a:solidFill>
@@ -577,14 +586,16 @@
               </a:defRPr>
             </a:lvl9pPr>
           </a:lstStyle>
-          <a:p/>
+          <a:p>
+            <a:endParaRPr/>
+          </a:p>
         </p:txBody>
       </p:sp>
     </p:spTree>
   </p:cSld>
-  <p:clrMap accent1="accent1" accent2="accent2" accent3="accent3" accent4="accent4" accent5="accent5" accent6="accent6" bg1="lt1" bg2="dk2" tx1="dk1" tx2="lt2" folHlink="folHlink" hlink="hlink"/>
+  <p:clrMap bg1="lt1" tx1="dk1" bg2="dk2" tx2="lt2" accent1="accent1" accent2="accent2" accent3="accent3" accent4="accent4" accent5="accent5" accent6="accent6" hlink="hlink" folHlink="folHlink"/>
   <p:notesStyle>
-    <a:defPPr lvl="0" marR="0" rtl="0" algn="l">
+    <a:defPPr marR="0" lvl="0" algn="l" rtl="0">
       <a:lnSpc>
         <a:spcPct val="100000"/>
       </a:lnSpc>
@@ -595,7 +606,7 @@
         <a:spcPts val="0"/>
       </a:spcAft>
     </a:defPPr>
-    <a:lvl1pPr lvl="0" marR="0" rtl="0" algn="l">
+    <a:lvl1pPr marR="0" lvl="0" algn="l" rtl="0">
       <a:lnSpc>
         <a:spcPct val="100000"/>
       </a:lnSpc>
@@ -609,7 +620,7 @@
         <a:srgbClr val="000000"/>
       </a:buClr>
       <a:buFont typeface="Arial"/>
-      <a:defRPr b="0" i="0" sz="1400" u="none" cap="none" strike="noStrike">
+      <a:defRPr sz="1400" b="0" i="0" u="none" strike="noStrike" cap="none">
         <a:solidFill>
           <a:srgbClr val="000000"/>
         </a:solidFill>
@@ -619,7 +630,7 @@
         <a:sym typeface="Arial"/>
       </a:defRPr>
     </a:lvl1pPr>
-    <a:lvl2pPr lvl="1" marR="0" rtl="0" algn="l">
+    <a:lvl2pPr marR="0" lvl="1" algn="l" rtl="0">
       <a:lnSpc>
         <a:spcPct val="100000"/>
       </a:lnSpc>
@@ -633,7 +644,7 @@
         <a:srgbClr val="000000"/>
       </a:buClr>
       <a:buFont typeface="Arial"/>
-      <a:defRPr b="0" i="0" sz="1400" u="none" cap="none" strike="noStrike">
+      <a:defRPr sz="1400" b="0" i="0" u="none" strike="noStrike" cap="none">
         <a:solidFill>
           <a:srgbClr val="000000"/>
         </a:solidFill>
@@ -643,7 +654,7 @@
         <a:sym typeface="Arial"/>
       </a:defRPr>
     </a:lvl2pPr>
-    <a:lvl3pPr lvl="2" marR="0" rtl="0" algn="l">
+    <a:lvl3pPr marR="0" lvl="2" algn="l" rtl="0">
       <a:lnSpc>
         <a:spcPct val="100000"/>
       </a:lnSpc>
@@ -657,7 +668,7 @@
         <a:srgbClr val="000000"/>
       </a:buClr>
       <a:buFont typeface="Arial"/>
-      <a:defRPr b="0" i="0" sz="1400" u="none" cap="none" strike="noStrike">
+      <a:defRPr sz="1400" b="0" i="0" u="none" strike="noStrike" cap="none">
         <a:solidFill>
           <a:srgbClr val="000000"/>
         </a:solidFill>
@@ -667,7 +678,7 @@
         <a:sym typeface="Arial"/>
       </a:defRPr>
     </a:lvl3pPr>
-    <a:lvl4pPr lvl="3" marR="0" rtl="0" algn="l">
+    <a:lvl4pPr marR="0" lvl="3" algn="l" rtl="0">
       <a:lnSpc>
         <a:spcPct val="100000"/>
       </a:lnSpc>
@@ -681,7 +692,7 @@
         <a:srgbClr val="000000"/>
       </a:buClr>
       <a:buFont typeface="Arial"/>
-      <a:defRPr b="0" i="0" sz="1400" u="none" cap="none" strike="noStrike">
+      <a:defRPr sz="1400" b="0" i="0" u="none" strike="noStrike" cap="none">
         <a:solidFill>
           <a:srgbClr val="000000"/>
         </a:solidFill>
@@ -691,7 +702,7 @@
         <a:sym typeface="Arial"/>
       </a:defRPr>
     </a:lvl4pPr>
-    <a:lvl5pPr lvl="4" marR="0" rtl="0" algn="l">
+    <a:lvl5pPr marR="0" lvl="4" algn="l" rtl="0">
       <a:lnSpc>
         <a:spcPct val="100000"/>
       </a:lnSpc>
@@ -705,7 +716,7 @@
         <a:srgbClr val="000000"/>
       </a:buClr>
       <a:buFont typeface="Arial"/>
-      <a:defRPr b="0" i="0" sz="1400" u="none" cap="none" strike="noStrike">
+      <a:defRPr sz="1400" b="0" i="0" u="none" strike="noStrike" cap="none">
         <a:solidFill>
           <a:srgbClr val="000000"/>
         </a:solidFill>
@@ -715,7 +726,7 @@
         <a:sym typeface="Arial"/>
       </a:defRPr>
     </a:lvl5pPr>
-    <a:lvl6pPr lvl="5" marR="0" rtl="0" algn="l">
+    <a:lvl6pPr marR="0" lvl="5" algn="l" rtl="0">
       <a:lnSpc>
         <a:spcPct val="100000"/>
       </a:lnSpc>
@@ -729,7 +740,7 @@
         <a:srgbClr val="000000"/>
       </a:buClr>
       <a:buFont typeface="Arial"/>
-      <a:defRPr b="0" i="0" sz="1400" u="none" cap="none" strike="noStrike">
+      <a:defRPr sz="1400" b="0" i="0" u="none" strike="noStrike" cap="none">
         <a:solidFill>
           <a:srgbClr val="000000"/>
         </a:solidFill>
@@ -739,7 +750,7 @@
         <a:sym typeface="Arial"/>
       </a:defRPr>
     </a:lvl6pPr>
-    <a:lvl7pPr lvl="6" marR="0" rtl="0" algn="l">
+    <a:lvl7pPr marR="0" lvl="6" algn="l" rtl="0">
       <a:lnSpc>
         <a:spcPct val="100000"/>
       </a:lnSpc>
@@ -753,7 +764,7 @@
         <a:srgbClr val="000000"/>
       </a:buClr>
       <a:buFont typeface="Arial"/>
-      <a:defRPr b="0" i="0" sz="1400" u="none" cap="none" strike="noStrike">
+      <a:defRPr sz="1400" b="0" i="0" u="none" strike="noStrike" cap="none">
         <a:solidFill>
           <a:srgbClr val="000000"/>
         </a:solidFill>
@@ -763,7 +774,7 @@
         <a:sym typeface="Arial"/>
       </a:defRPr>
     </a:lvl7pPr>
-    <a:lvl8pPr lvl="7" marR="0" rtl="0" algn="l">
+    <a:lvl8pPr marR="0" lvl="7" algn="l" rtl="0">
       <a:lnSpc>
         <a:spcPct val="100000"/>
       </a:lnSpc>
@@ -777,7 +788,7 @@
         <a:srgbClr val="000000"/>
       </a:buClr>
       <a:buFont typeface="Arial"/>
-      <a:defRPr b="0" i="0" sz="1400" u="none" cap="none" strike="noStrike">
+      <a:defRPr sz="1400" b="0" i="0" u="none" strike="noStrike" cap="none">
         <a:solidFill>
           <a:srgbClr val="000000"/>
         </a:solidFill>
@@ -787,7 +798,7 @@
         <a:sym typeface="Arial"/>
       </a:defRPr>
     </a:lvl8pPr>
-    <a:lvl9pPr lvl="8" marR="0" rtl="0" algn="l">
+    <a:lvl9pPr marR="0" lvl="8" algn="l" rtl="0">
       <a:lnSpc>
         <a:spcPct val="100000"/>
       </a:lnSpc>
@@ -801,7 +812,7 @@
         <a:srgbClr val="000000"/>
       </a:buClr>
       <a:buFont typeface="Arial"/>
-      <a:defRPr b="0" i="0" sz="1400" u="none" cap="none" strike="noStrike">
+      <a:defRPr sz="1400" b="0" i="0" u="none" strike="noStrike" cap="none">
         <a:solidFill>
           <a:srgbClr val="000000"/>
         </a:solidFill>
@@ -816,11 +827,11 @@
 </file>
 
 <file path=ppt/notesSlides/notesSlide1.xml><?xml version="1.0" encoding="utf-8"?>
-<p:notes xmlns:a="http://schemas.openxmlformats.org/drawingml/2006/main" xmlns:r="http://schemas.openxmlformats.org/officeDocument/2006/relationships" xmlns:mc="http://schemas.openxmlformats.org/markup-compatibility/2006" xmlns:mv="urn:schemas-microsoft-com:mac:vml" xmlns:p="http://schemas.openxmlformats.org/presentationml/2006/main" xmlns:c="http://schemas.openxmlformats.org/drawingml/2006/chart" xmlns:dgm="http://schemas.openxmlformats.org/drawingml/2006/diagram" xmlns:o="urn:schemas-microsoft-com:office:office" xmlns:v="urn:schemas-microsoft-com:vml" xmlns:pvml="urn:schemas-microsoft-com:office:powerpoint" xmlns:com="http://schemas.openxmlformats.org/drawingml/2006/compatibility" xmlns:p14="http://schemas.microsoft.com/office/powerpoint/2010/main" xmlns:p15="http://schemas.microsoft.com/office/powerpoint/2012/main" xmlns:ahyp="http://schemas.microsoft.com/office/drawing/2018/hyperlinkcolor" showMasterPhAnim="0" showMasterSp="0">
+<p:notes xmlns:a="http://schemas.openxmlformats.org/drawingml/2006/main" xmlns:r="http://schemas.openxmlformats.org/officeDocument/2006/relationships" xmlns:p="http://schemas.openxmlformats.org/presentationml/2006/main" showMasterSp="0" showMasterPhAnim="0">
   <p:cSld>
     <p:spTree>
       <p:nvGrpSpPr>
-        <p:cNvPr id="35" name="Shape 35"/>
+        <p:cNvPr id="1" name="Shape 35"/>
         <p:cNvGrpSpPr/>
         <p:nvPr/>
       </p:nvGrpSpPr>
@@ -835,9 +846,11 @@
       <p:sp>
         <p:nvSpPr>
           <p:cNvPr id="36" name="Google Shape;36;p1:notes"/>
-          <p:cNvSpPr txBox="1"/>
+          <p:cNvSpPr txBox="1">
+            <a:spLocks noGrp="1"/>
+          </p:cNvSpPr>
           <p:nvPr>
-            <p:ph idx="1" type="body"/>
+            <p:ph type="body" idx="1"/>
           </p:nvPr>
         </p:nvSpPr>
         <p:spPr>
@@ -850,12 +863,12 @@
           </a:prstGeom>
         </p:spPr>
         <p:txBody>
-          <a:bodyPr anchorCtr="0" anchor="t" bIns="91425" lIns="91425" spcFirstLastPara="1" rIns="91425" wrap="square" tIns="91425">
+          <a:bodyPr spcFirstLastPara="1" wrap="square" lIns="91425" tIns="91425" rIns="91425" bIns="91425" anchor="t" anchorCtr="0">
             <a:noAutofit/>
           </a:bodyPr>
           <a:lstStyle/>
           <a:p>
-            <a:pPr indent="0" lvl="0" marL="0" rtl="0" algn="l">
+            <a:pPr marL="0" lvl="0" indent="0" algn="l" rtl="0">
               <a:spcBef>
                 <a:spcPts val="0"/>
               </a:spcBef>
@@ -864,9 +877,6 @@
               </a:spcAft>
               <a:buNone/>
             </a:pPr>
-            <a:r>
-              <a:t/>
-            </a:r>
             <a:endParaRPr/>
           </a:p>
         </p:txBody>
@@ -874,20 +884,26 @@
       <p:sp>
         <p:nvSpPr>
           <p:cNvPr id="37" name="Google Shape;37;p1:notes"/>
-          <p:cNvSpPr/>
+          <p:cNvSpPr>
+            <a:spLocks noGrp="1" noRot="1" noChangeAspect="1"/>
+          </p:cNvSpPr>
           <p:nvPr>
-            <p:ph idx="2" type="sldImg"/>
+            <p:ph type="sldImg" idx="2"/>
           </p:nvPr>
         </p:nvSpPr>
         <p:spPr>
           <a:xfrm>
-            <a:off x="381300" y="685800"/>
-            <a:ext cx="6096075" cy="3429000"/>
+            <a:off x="381000" y="685800"/>
+            <a:ext cx="6096000" cy="3429000"/>
           </a:xfrm>
           <a:custGeom>
-            <a:rect b="b" l="l" r="r" t="t"/>
+            <a:avLst/>
+            <a:gdLst/>
+            <a:ahLst/>
+            <a:cxnLst/>
+            <a:rect l="l" t="t" r="r" b="b"/>
             <a:pathLst>
-              <a:path extrusionOk="0" h="120000" w="120000">
+              <a:path w="120000" h="120000" extrusionOk="0">
                 <a:moveTo>
                   <a:pt x="0" y="0"/>
                 </a:moveTo>
@@ -915,11 +931,11 @@
 </file>
 
 <file path=ppt/notesSlides/notesSlide2.xml><?xml version="1.0" encoding="utf-8"?>
-<p:notes xmlns:a="http://schemas.openxmlformats.org/drawingml/2006/main" xmlns:r="http://schemas.openxmlformats.org/officeDocument/2006/relationships" xmlns:mc="http://schemas.openxmlformats.org/markup-compatibility/2006" xmlns:mv="urn:schemas-microsoft-com:mac:vml" xmlns:p="http://schemas.openxmlformats.org/presentationml/2006/main" xmlns:c="http://schemas.openxmlformats.org/drawingml/2006/chart" xmlns:dgm="http://schemas.openxmlformats.org/drawingml/2006/diagram" xmlns:o="urn:schemas-microsoft-com:office:office" xmlns:v="urn:schemas-microsoft-com:vml" xmlns:pvml="urn:schemas-microsoft-com:office:powerpoint" xmlns:com="http://schemas.openxmlformats.org/drawingml/2006/compatibility" xmlns:p14="http://schemas.microsoft.com/office/powerpoint/2010/main" xmlns:p15="http://schemas.microsoft.com/office/powerpoint/2012/main" xmlns:ahyp="http://schemas.microsoft.com/office/drawing/2018/hyperlinkcolor" showMasterPhAnim="0" showMasterSp="0">
+<p:notes xmlns:a="http://schemas.openxmlformats.org/drawingml/2006/main" xmlns:r="http://schemas.openxmlformats.org/officeDocument/2006/relationships" xmlns:p="http://schemas.openxmlformats.org/presentationml/2006/main" showMasterSp="0" showMasterPhAnim="0">
   <p:cSld>
     <p:spTree>
       <p:nvGrpSpPr>
-        <p:cNvPr id="45" name="Shape 45"/>
+        <p:cNvPr id="1" name="Shape 45"/>
         <p:cNvGrpSpPr/>
         <p:nvPr/>
       </p:nvGrpSpPr>
@@ -934,9 +950,11 @@
       <p:sp>
         <p:nvSpPr>
           <p:cNvPr id="46" name="Google Shape;46;p2:notes"/>
-          <p:cNvSpPr txBox="1"/>
+          <p:cNvSpPr txBox="1">
+            <a:spLocks noGrp="1"/>
+          </p:cNvSpPr>
           <p:nvPr>
-            <p:ph idx="1" type="body"/>
+            <p:ph type="body" idx="1"/>
           </p:nvPr>
         </p:nvSpPr>
         <p:spPr>
@@ -949,12 +967,12 @@
           </a:prstGeom>
         </p:spPr>
         <p:txBody>
-          <a:bodyPr anchorCtr="0" anchor="t" bIns="91425" lIns="91425" spcFirstLastPara="1" rIns="91425" wrap="square" tIns="91425">
+          <a:bodyPr spcFirstLastPara="1" wrap="square" lIns="91425" tIns="91425" rIns="91425" bIns="91425" anchor="t" anchorCtr="0">
             <a:noAutofit/>
           </a:bodyPr>
           <a:lstStyle/>
           <a:p>
-            <a:pPr indent="0" lvl="0" marL="0" rtl="0" algn="l">
+            <a:pPr marL="0" lvl="0" indent="0" algn="l" rtl="0">
               <a:spcBef>
                 <a:spcPts val="0"/>
               </a:spcBef>
@@ -963,9 +981,6 @@
               </a:spcAft>
               <a:buNone/>
             </a:pPr>
-            <a:r>
-              <a:t/>
-            </a:r>
             <a:endParaRPr/>
           </a:p>
         </p:txBody>
@@ -973,20 +988,26 @@
       <p:sp>
         <p:nvSpPr>
           <p:cNvPr id="47" name="Google Shape;47;p2:notes"/>
-          <p:cNvSpPr/>
+          <p:cNvSpPr>
+            <a:spLocks noGrp="1" noRot="1" noChangeAspect="1"/>
+          </p:cNvSpPr>
           <p:nvPr>
-            <p:ph idx="2" type="sldImg"/>
+            <p:ph type="sldImg" idx="2"/>
           </p:nvPr>
         </p:nvSpPr>
         <p:spPr>
           <a:xfrm>
-            <a:off x="381300" y="685800"/>
-            <a:ext cx="6096075" cy="3429000"/>
+            <a:off x="381000" y="685800"/>
+            <a:ext cx="6096000" cy="3429000"/>
           </a:xfrm>
           <a:custGeom>
-            <a:rect b="b" l="l" r="r" t="t"/>
+            <a:avLst/>
+            <a:gdLst/>
+            <a:ahLst/>
+            <a:cxnLst/>
+            <a:rect l="l" t="t" r="r" b="b"/>
             <a:pathLst>
-              <a:path extrusionOk="0" h="120000" w="120000">
+              <a:path w="120000" h="120000" extrusionOk="0">
                 <a:moveTo>
                   <a:pt x="0" y="0"/>
                 </a:moveTo>
@@ -1014,11 +1035,11 @@
 </file>
 
 <file path=ppt/notesSlides/notesSlide3.xml><?xml version="1.0" encoding="utf-8"?>
-<p:notes xmlns:a="http://schemas.openxmlformats.org/drawingml/2006/main" xmlns:r="http://schemas.openxmlformats.org/officeDocument/2006/relationships" xmlns:mc="http://schemas.openxmlformats.org/markup-compatibility/2006" xmlns:mv="urn:schemas-microsoft-com:mac:vml" xmlns:p="http://schemas.openxmlformats.org/presentationml/2006/main" xmlns:c="http://schemas.openxmlformats.org/drawingml/2006/chart" xmlns:dgm="http://schemas.openxmlformats.org/drawingml/2006/diagram" xmlns:o="urn:schemas-microsoft-com:office:office" xmlns:v="urn:schemas-microsoft-com:vml" xmlns:pvml="urn:schemas-microsoft-com:office:powerpoint" xmlns:com="http://schemas.openxmlformats.org/drawingml/2006/compatibility" xmlns:p14="http://schemas.microsoft.com/office/powerpoint/2010/main" xmlns:p15="http://schemas.microsoft.com/office/powerpoint/2012/main" xmlns:ahyp="http://schemas.microsoft.com/office/drawing/2018/hyperlinkcolor" showMasterPhAnim="0" showMasterSp="0">
+<p:notes xmlns:a="http://schemas.openxmlformats.org/drawingml/2006/main" xmlns:r="http://schemas.openxmlformats.org/officeDocument/2006/relationships" xmlns:p="http://schemas.openxmlformats.org/presentationml/2006/main" showMasterSp="0" showMasterPhAnim="0">
   <p:cSld>
     <p:spTree>
       <p:nvGrpSpPr>
-        <p:cNvPr id="51" name="Shape 51"/>
+        <p:cNvPr id="1" name="Shape 51"/>
         <p:cNvGrpSpPr/>
         <p:nvPr/>
       </p:nvGrpSpPr>
@@ -1033,20 +1054,26 @@
       <p:sp>
         <p:nvSpPr>
           <p:cNvPr id="52" name="Google Shape;52;g3196b399cc9_0_22:notes"/>
-          <p:cNvSpPr/>
+          <p:cNvSpPr>
+            <a:spLocks noGrp="1" noRot="1" noChangeAspect="1"/>
+          </p:cNvSpPr>
           <p:nvPr>
-            <p:ph idx="2" type="sldImg"/>
+            <p:ph type="sldImg" idx="2"/>
           </p:nvPr>
         </p:nvSpPr>
         <p:spPr>
           <a:xfrm>
-            <a:off x="381300" y="685800"/>
+            <a:off x="381000" y="685800"/>
             <a:ext cx="6096000" cy="3429000"/>
           </a:xfrm>
           <a:custGeom>
-            <a:rect b="b" l="l" r="r" t="t"/>
+            <a:avLst/>
+            <a:gdLst/>
+            <a:ahLst/>
+            <a:cxnLst/>
+            <a:rect l="l" t="t" r="r" b="b"/>
             <a:pathLst>
-              <a:path extrusionOk="0" h="120000" w="120000">
+              <a:path w="120000" h="120000" extrusionOk="0">
                 <a:moveTo>
                   <a:pt x="0" y="0"/>
                 </a:moveTo>
@@ -1068,9 +1095,11 @@
       <p:sp>
         <p:nvSpPr>
           <p:cNvPr id="53" name="Google Shape;53;g3196b399cc9_0_22:notes"/>
-          <p:cNvSpPr txBox="1"/>
+          <p:cNvSpPr txBox="1">
+            <a:spLocks noGrp="1"/>
+          </p:cNvSpPr>
           <p:nvPr>
-            <p:ph idx="1" type="body"/>
+            <p:ph type="body" idx="1"/>
           </p:nvPr>
         </p:nvSpPr>
         <p:spPr>
@@ -1083,12 +1112,12 @@
           </a:prstGeom>
         </p:spPr>
         <p:txBody>
-          <a:bodyPr anchorCtr="0" anchor="t" bIns="91425" lIns="91425" spcFirstLastPara="1" rIns="91425" wrap="square" tIns="91425">
+          <a:bodyPr spcFirstLastPara="1" wrap="square" lIns="91425" tIns="91425" rIns="91425" bIns="91425" anchor="t" anchorCtr="0">
             <a:noAutofit/>
           </a:bodyPr>
           <a:lstStyle/>
           <a:p>
-            <a:pPr indent="0" lvl="0" marL="0" rtl="0" algn="l">
+            <a:pPr marL="0" lvl="0" indent="0" algn="l" rtl="0">
               <a:spcBef>
                 <a:spcPts val="0"/>
               </a:spcBef>
@@ -1097,9 +1126,6 @@
               </a:spcAft>
               <a:buNone/>
             </a:pPr>
-            <a:r>
-              <a:t/>
-            </a:r>
             <a:endParaRPr/>
           </a:p>
         </p:txBody>
@@ -1113,11 +1139,11 @@
 </file>
 
 <file path=ppt/notesSlides/notesSlide4.xml><?xml version="1.0" encoding="utf-8"?>
-<p:notes xmlns:a="http://schemas.openxmlformats.org/drawingml/2006/main" xmlns:r="http://schemas.openxmlformats.org/officeDocument/2006/relationships" xmlns:mc="http://schemas.openxmlformats.org/markup-compatibility/2006" xmlns:mv="urn:schemas-microsoft-com:mac:vml" xmlns:p="http://schemas.openxmlformats.org/presentationml/2006/main" xmlns:c="http://schemas.openxmlformats.org/drawingml/2006/chart" xmlns:dgm="http://schemas.openxmlformats.org/drawingml/2006/diagram" xmlns:o="urn:schemas-microsoft-com:office:office" xmlns:v="urn:schemas-microsoft-com:vml" xmlns:pvml="urn:schemas-microsoft-com:office:powerpoint" xmlns:com="http://schemas.openxmlformats.org/drawingml/2006/compatibility" xmlns:p14="http://schemas.microsoft.com/office/powerpoint/2010/main" xmlns:p15="http://schemas.microsoft.com/office/powerpoint/2012/main" xmlns:ahyp="http://schemas.microsoft.com/office/drawing/2018/hyperlinkcolor" showMasterPhAnim="0" showMasterSp="0">
+<p:notes xmlns:a="http://schemas.openxmlformats.org/drawingml/2006/main" xmlns:r="http://schemas.openxmlformats.org/officeDocument/2006/relationships" xmlns:p="http://schemas.openxmlformats.org/presentationml/2006/main" showMasterSp="0" showMasterPhAnim="0">
   <p:cSld>
     <p:spTree>
       <p:nvGrpSpPr>
-        <p:cNvPr id="58" name="Shape 58"/>
+        <p:cNvPr id="1" name="Shape 58"/>
         <p:cNvGrpSpPr/>
         <p:nvPr/>
       </p:nvGrpSpPr>
@@ -1132,9 +1158,11 @@
       <p:sp>
         <p:nvSpPr>
           <p:cNvPr id="59" name="Google Shape;59;g3196b399cc9_0_5:notes"/>
-          <p:cNvSpPr txBox="1"/>
+          <p:cNvSpPr txBox="1">
+            <a:spLocks noGrp="1"/>
+          </p:cNvSpPr>
           <p:nvPr>
-            <p:ph idx="1" type="body"/>
+            <p:ph type="body" idx="1"/>
           </p:nvPr>
         </p:nvSpPr>
         <p:spPr>
@@ -1147,12 +1175,12 @@
           </a:prstGeom>
         </p:spPr>
         <p:txBody>
-          <a:bodyPr anchorCtr="0" anchor="t" bIns="91425" lIns="91425" spcFirstLastPara="1" rIns="91425" wrap="square" tIns="91425">
+          <a:bodyPr spcFirstLastPara="1" wrap="square" lIns="91425" tIns="91425" rIns="91425" bIns="91425" anchor="t" anchorCtr="0">
             <a:noAutofit/>
           </a:bodyPr>
           <a:lstStyle/>
           <a:p>
-            <a:pPr indent="0" lvl="0" marL="0" rtl="0" algn="l">
+            <a:pPr marL="0" lvl="0" indent="0" algn="l" rtl="0">
               <a:spcBef>
                 <a:spcPts val="0"/>
               </a:spcBef>
@@ -1161,9 +1189,6 @@
               </a:spcAft>
               <a:buNone/>
             </a:pPr>
-            <a:r>
-              <a:t/>
-            </a:r>
             <a:endParaRPr/>
           </a:p>
         </p:txBody>
@@ -1171,20 +1196,26 @@
       <p:sp>
         <p:nvSpPr>
           <p:cNvPr id="60" name="Google Shape;60;g3196b399cc9_0_5:notes"/>
-          <p:cNvSpPr/>
+          <p:cNvSpPr>
+            <a:spLocks noGrp="1" noRot="1" noChangeAspect="1"/>
+          </p:cNvSpPr>
           <p:nvPr>
-            <p:ph idx="2" type="sldImg"/>
+            <p:ph type="sldImg" idx="2"/>
           </p:nvPr>
         </p:nvSpPr>
         <p:spPr>
           <a:xfrm>
-            <a:off x="381300" y="685800"/>
+            <a:off x="381000" y="685800"/>
             <a:ext cx="6096000" cy="3429000"/>
           </a:xfrm>
           <a:custGeom>
-            <a:rect b="b" l="l" r="r" t="t"/>
+            <a:avLst/>
+            <a:gdLst/>
+            <a:ahLst/>
+            <a:cxnLst/>
+            <a:rect l="l" t="t" r="r" b="b"/>
             <a:pathLst>
-              <a:path extrusionOk="0" h="120000" w="120000">
+              <a:path w="120000" h="120000" extrusionOk="0">
                 <a:moveTo>
                   <a:pt x="0" y="0"/>
                 </a:moveTo>
@@ -1212,18 +1243,19 @@
 </file>
 
 <file path=ppt/slideLayouts/slideLayout1.xml><?xml version="1.0" encoding="utf-8"?>
-<p:sldLayout xmlns:a="http://schemas.openxmlformats.org/drawingml/2006/main" xmlns:r="http://schemas.openxmlformats.org/officeDocument/2006/relationships" xmlns:mc="http://schemas.openxmlformats.org/markup-compatibility/2006" xmlns:mv="urn:schemas-microsoft-com:mac:vml" xmlns:p="http://schemas.openxmlformats.org/presentationml/2006/main" xmlns:c="http://schemas.openxmlformats.org/drawingml/2006/chart" xmlns:dgm="http://schemas.openxmlformats.org/drawingml/2006/diagram" xmlns:o="urn:schemas-microsoft-com:office:office" xmlns:v="urn:schemas-microsoft-com:vml" xmlns:pvml="urn:schemas-microsoft-com:office:powerpoint" xmlns:com="http://schemas.openxmlformats.org/drawingml/2006/compatibility" xmlns:p14="http://schemas.microsoft.com/office/powerpoint/2010/main" xmlns:p15="http://schemas.microsoft.com/office/powerpoint/2012/main" xmlns:ahyp="http://schemas.microsoft.com/office/drawing/2018/hyperlinkcolor" matchingName="Titolo" type="title">
+<p:sldLayout xmlns:a="http://schemas.openxmlformats.org/drawingml/2006/main" xmlns:r="http://schemas.openxmlformats.org/officeDocument/2006/relationships" xmlns:p="http://schemas.openxmlformats.org/presentationml/2006/main" matchingName="Titolo" type="title">
   <p:cSld name="TITLE">
     <p:bg>
       <p:bgPr>
         <a:solidFill>
           <a:srgbClr val="0C343D"/>
         </a:solidFill>
+        <a:effectLst/>
       </p:bgPr>
     </p:bg>
     <p:spTree>
       <p:nvGrpSpPr>
-        <p:cNvPr id="9" name="Shape 9"/>
+        <p:cNvPr id="1" name="Shape 9"/>
         <p:cNvGrpSpPr/>
         <p:nvPr/>
       </p:nvGrpSpPr>
@@ -1257,12 +1289,12 @@
           </a:ln>
         </p:spPr>
         <p:txBody>
-          <a:bodyPr anchorCtr="0" anchor="ctr" bIns="45700" lIns="91425" spcFirstLastPara="1" rIns="91425" wrap="square" tIns="45700">
+          <a:bodyPr spcFirstLastPara="1" wrap="square" lIns="91425" tIns="45700" rIns="91425" bIns="45700" anchor="ctr" anchorCtr="0">
             <a:noAutofit/>
           </a:bodyPr>
           <a:lstStyle/>
           <a:p>
-            <a:pPr indent="0" lvl="0" marL="0" marR="0" rtl="0" algn="ctr">
+            <a:pPr marL="0" marR="0" lvl="0" indent="0" algn="ctr" rtl="0">
               <a:lnSpc>
                 <a:spcPct val="100000"/>
               </a:lnSpc>
@@ -1274,10 +1306,7 @@
               </a:spcAft>
               <a:buNone/>
             </a:pPr>
-            <a:r>
-              <a:t/>
-            </a:r>
-            <a:endParaRPr b="0" i="0" sz="1400" u="none" cap="none" strike="noStrike">
+            <a:endParaRPr sz="1400" b="0" i="0" u="none" strike="noStrike" cap="none">
               <a:solidFill>
                 <a:schemeClr val="lt1"/>
               </a:solidFill>
@@ -1292,9 +1321,11 @@
       <p:sp>
         <p:nvSpPr>
           <p:cNvPr id="11" name="Google Shape;11;p2"/>
-          <p:cNvSpPr txBox="1"/>
+          <p:cNvSpPr txBox="1">
+            <a:spLocks noGrp="1"/>
+          </p:cNvSpPr>
           <p:nvPr>
-            <p:ph idx="1" type="subTitle"/>
+            <p:ph type="subTitle" idx="1"/>
           </p:nvPr>
         </p:nvSpPr>
         <p:spPr>
@@ -1311,7 +1342,7 @@
           </a:ln>
         </p:spPr>
         <p:txBody>
-          <a:bodyPr anchorCtr="0" anchor="t" bIns="0" lIns="0" spcFirstLastPara="1" rIns="0" wrap="square" tIns="0">
+          <a:bodyPr spcFirstLastPara="1" wrap="square" lIns="0" tIns="0" rIns="0" bIns="0" anchor="t" anchorCtr="0">
             <a:normAutofit/>
           </a:bodyPr>
           <a:lstStyle>
@@ -1454,13 +1485,17 @@
               <a:defRPr/>
             </a:lvl9pPr>
           </a:lstStyle>
-          <a:p/>
+          <a:p>
+            <a:endParaRPr dirty="0"/>
+          </a:p>
         </p:txBody>
       </p:sp>
       <p:sp>
         <p:nvSpPr>
           <p:cNvPr id="12" name="Google Shape;12;p2"/>
-          <p:cNvSpPr txBox="1"/>
+          <p:cNvSpPr txBox="1">
+            <a:spLocks noGrp="1"/>
+          </p:cNvSpPr>
           <p:nvPr>
             <p:ph type="title"/>
           </p:nvPr>
@@ -1479,7 +1514,7 @@
           </a:ln>
         </p:spPr>
         <p:txBody>
-          <a:bodyPr anchorCtr="0" anchor="t" bIns="0" lIns="0" spcFirstLastPara="1" rIns="0" wrap="square" tIns="0">
+          <a:bodyPr spcFirstLastPara="1" wrap="square" lIns="0" tIns="0" rIns="0" bIns="0" anchor="t" anchorCtr="0">
             <a:normAutofit/>
           </a:bodyPr>
           <a:lstStyle>
@@ -1499,7 +1534,7 @@
               <a:buSzPts val="3000"/>
               <a:buFont typeface="Helvetica Neue"/>
               <a:buNone/>
-              <a:defRPr b="1" sz="3000">
+              <a:defRPr sz="3000" b="1">
                 <a:solidFill>
                   <a:schemeClr val="lt1"/>
                 </a:solidFill>
@@ -1622,7 +1657,9 @@
               <a:defRPr/>
             </a:lvl9pPr>
           </a:lstStyle>
-          <a:p/>
+          <a:p>
+            <a:endParaRPr dirty="0"/>
+          </a:p>
         </p:txBody>
       </p:sp>
       <p:pic>
@@ -1635,7 +1672,7 @@
           <a:blip r:embed="rId2">
             <a:alphaModFix/>
           </a:blip>
-          <a:srcRect b="0" l="0" r="0" t="0"/>
+          <a:srcRect/>
           <a:stretch/>
         </p:blipFill>
         <p:spPr>
@@ -1686,12 +1723,12 @@
             </a:ln>
           </p:spPr>
           <p:txBody>
-            <a:bodyPr anchorCtr="0" anchor="ctr" bIns="0" lIns="0" spcFirstLastPara="1" rIns="0" wrap="square" tIns="0">
+            <a:bodyPr spcFirstLastPara="1" wrap="square" lIns="0" tIns="0" rIns="0" bIns="0" anchor="ctr" anchorCtr="0">
               <a:noAutofit/>
             </a:bodyPr>
             <a:lstStyle/>
             <a:p>
-              <a:pPr indent="0" lvl="0" marL="0" marR="0" rtl="0" algn="l">
+              <a:pPr marL="0" marR="0" lvl="0" indent="0" algn="l" rtl="0">
                 <a:lnSpc>
                   <a:spcPct val="100000"/>
                 </a:lnSpc>
@@ -1709,7 +1746,7 @@
                 <a:buNone/>
               </a:pPr>
               <a:r>
-                <a:rPr b="1" i="0" lang="en-US" sz="1400" u="none" cap="none" strike="noStrike">
+                <a:rPr lang="en-US" sz="1400" b="1" i="0" u="none" strike="noStrike" cap="none">
                   <a:solidFill>
                     <a:schemeClr val="lt1"/>
                   </a:solidFill>
@@ -1720,7 +1757,7 @@
                 </a:rPr>
                 <a:t>Automation, </a:t>
               </a:r>
-              <a:endParaRPr b="1" i="0" sz="1400" u="none" cap="none" strike="noStrike">
+              <a:endParaRPr sz="1400" b="1" i="0" u="none" strike="noStrike" cap="none">
                 <a:solidFill>
                   <a:schemeClr val="lt1"/>
                 </a:solidFill>
@@ -1731,7 +1768,7 @@
               </a:endParaRPr>
             </a:p>
             <a:p>
-              <a:pPr indent="0" lvl="0" marL="0" marR="0" rtl="0" algn="l">
+              <a:pPr marL="0" marR="0" lvl="0" indent="0" algn="l" rtl="0">
                 <a:lnSpc>
                   <a:spcPct val="100000"/>
                 </a:lnSpc>
@@ -1749,7 +1786,7 @@
                 <a:buNone/>
               </a:pPr>
               <a:r>
-                <a:rPr b="1" i="0" lang="en-US" sz="1400" u="none" cap="none" strike="noStrike">
+                <a:rPr lang="en-US" sz="1400" b="1" i="0" u="none" strike="noStrike" cap="none">
                   <a:solidFill>
                     <a:schemeClr val="lt1"/>
                   </a:solidFill>
@@ -1760,7 +1797,7 @@
                 </a:rPr>
                 <a:t>Robotics and </a:t>
               </a:r>
-              <a:endParaRPr b="1" i="0" sz="1400" u="none" cap="none" strike="noStrike">
+              <a:endParaRPr sz="1400" b="1" i="0" u="none" strike="noStrike" cap="none">
                 <a:solidFill>
                   <a:schemeClr val="lt1"/>
                 </a:solidFill>
@@ -1771,7 +1808,7 @@
               </a:endParaRPr>
             </a:p>
             <a:p>
-              <a:pPr indent="0" lvl="0" marL="0" marR="0" rtl="0" algn="l">
+              <a:pPr marL="0" marR="0" lvl="0" indent="0" algn="l" rtl="0">
                 <a:lnSpc>
                   <a:spcPct val="100000"/>
                 </a:lnSpc>
@@ -1789,7 +1826,7 @@
                 <a:buNone/>
               </a:pPr>
               <a:r>
-                <a:rPr b="1" i="0" lang="en-US" sz="1400" u="none" cap="none" strike="noStrike">
+                <a:rPr lang="en-US" sz="1400" b="1" i="0" u="none" strike="noStrike" cap="none">
                   <a:solidFill>
                     <a:schemeClr val="lt1"/>
                   </a:solidFill>
@@ -1800,7 +1837,7 @@
                 </a:rPr>
                 <a:t>System Control</a:t>
               </a:r>
-              <a:endParaRPr b="1" i="0" sz="1400" u="none" cap="none" strike="noStrike">
+              <a:endParaRPr sz="1400" b="1" i="0" u="none" strike="noStrike" cap="none">
                 <a:solidFill>
                   <a:schemeClr val="lt1"/>
                 </a:solidFill>
@@ -1822,7 +1859,7 @@
             <a:blip r:embed="rId3">
               <a:alphaModFix/>
             </a:blip>
-            <a:srcRect b="0" l="0" r="0" t="0"/>
+            <a:srcRect/>
             <a:stretch/>
           </p:blipFill>
           <p:spPr>
@@ -1854,14 +1891,14 @@
               <a:avLst/>
             </a:prstGeom>
             <a:noFill/>
-            <a:ln cap="flat" cmpd="sng" w="28575">
+            <a:ln w="28575" cap="flat" cmpd="sng">
               <a:solidFill>
                 <a:schemeClr val="lt1"/>
               </a:solidFill>
               <a:prstDash val="solid"/>
               <a:round/>
-              <a:headEnd len="sm" w="sm" type="none"/>
-              <a:tailEnd len="sm" w="sm" type="none"/>
+              <a:headEnd type="none" w="sm" len="sm"/>
+              <a:tailEnd type="none" w="sm" len="sm"/>
             </a:ln>
           </p:spPr>
         </p:cxnSp>
@@ -1869,9 +1906,11 @@
       <p:sp>
         <p:nvSpPr>
           <p:cNvPr id="18" name="Google Shape;18;p2"/>
-          <p:cNvSpPr txBox="1"/>
+          <p:cNvSpPr txBox="1">
+            <a:spLocks noGrp="1"/>
+          </p:cNvSpPr>
           <p:nvPr>
-            <p:ph idx="2" type="body"/>
+            <p:ph type="body" idx="2"/>
           </p:nvPr>
         </p:nvSpPr>
         <p:spPr>
@@ -1888,11 +1927,11 @@
           </a:ln>
         </p:spPr>
         <p:txBody>
-          <a:bodyPr anchorCtr="0" anchor="t" bIns="0" lIns="0" spcFirstLastPara="1" rIns="0" wrap="square" tIns="0">
+          <a:bodyPr spcFirstLastPara="1" wrap="square" lIns="0" tIns="0" rIns="0" bIns="0" anchor="t" anchorCtr="0">
             <a:noAutofit/>
           </a:bodyPr>
           <a:lstStyle>
-            <a:lvl1pPr indent="-228600" lvl="0" marL="457200" algn="l">
+            <a:lvl1pPr marL="457200" lvl="0" indent="-228600" algn="l">
               <a:lnSpc>
                 <a:spcPct val="115000"/>
               </a:lnSpc>
@@ -1904,7 +1943,7 @@
               </a:spcAft>
               <a:buSzPts val="1800"/>
               <a:buNone/>
-              <a:defRPr b="1" sz="1200">
+              <a:defRPr sz="1200" b="1">
                 <a:solidFill>
                   <a:schemeClr val="lt1"/>
                 </a:solidFill>
@@ -1914,19 +1953,19 @@
                 <a:sym typeface="Calibri"/>
               </a:defRPr>
             </a:lvl1pPr>
-            <a:lvl2pPr indent="-228600" lvl="1" marL="914400" algn="l">
-              <a:lnSpc>
-                <a:spcPct val="115000"/>
-              </a:lnSpc>
-              <a:spcBef>
-                <a:spcPts val="0"/>
-              </a:spcBef>
-              <a:spcAft>
-                <a:spcPts val="0"/>
-              </a:spcAft>
-              <a:buSzPts val="1400"/>
-              <a:buNone/>
-              <a:defRPr b="1" sz="1200">
+            <a:lvl2pPr marL="914400" lvl="1" indent="-228600" algn="l">
+              <a:lnSpc>
+                <a:spcPct val="115000"/>
+              </a:lnSpc>
+              <a:spcBef>
+                <a:spcPts val="0"/>
+              </a:spcBef>
+              <a:spcAft>
+                <a:spcPts val="0"/>
+              </a:spcAft>
+              <a:buSzPts val="1400"/>
+              <a:buNone/>
+              <a:defRPr sz="1200" b="1">
                 <a:solidFill>
                   <a:schemeClr val="lt1"/>
                 </a:solidFill>
@@ -1936,19 +1975,19 @@
                 <a:sym typeface="Calibri"/>
               </a:defRPr>
             </a:lvl2pPr>
-            <a:lvl3pPr indent="-228600" lvl="2" marL="1371600" algn="l">
-              <a:lnSpc>
-                <a:spcPct val="115000"/>
-              </a:lnSpc>
-              <a:spcBef>
-                <a:spcPts val="0"/>
-              </a:spcBef>
-              <a:spcAft>
-                <a:spcPts val="0"/>
-              </a:spcAft>
-              <a:buSzPts val="1400"/>
-              <a:buNone/>
-              <a:defRPr b="1" sz="1200">
+            <a:lvl3pPr marL="1371600" lvl="2" indent="-228600" algn="l">
+              <a:lnSpc>
+                <a:spcPct val="115000"/>
+              </a:lnSpc>
+              <a:spcBef>
+                <a:spcPts val="0"/>
+              </a:spcBef>
+              <a:spcAft>
+                <a:spcPts val="0"/>
+              </a:spcAft>
+              <a:buSzPts val="1400"/>
+              <a:buNone/>
+              <a:defRPr sz="1200" b="1">
                 <a:solidFill>
                   <a:schemeClr val="lt1"/>
                 </a:solidFill>
@@ -1958,19 +1997,19 @@
                 <a:sym typeface="Calibri"/>
               </a:defRPr>
             </a:lvl3pPr>
-            <a:lvl4pPr indent="-228600" lvl="3" marL="1828800" algn="l">
-              <a:lnSpc>
-                <a:spcPct val="115000"/>
-              </a:lnSpc>
-              <a:spcBef>
-                <a:spcPts val="0"/>
-              </a:spcBef>
-              <a:spcAft>
-                <a:spcPts val="0"/>
-              </a:spcAft>
-              <a:buSzPts val="1400"/>
-              <a:buNone/>
-              <a:defRPr b="1" sz="1200">
+            <a:lvl4pPr marL="1828800" lvl="3" indent="-228600" algn="l">
+              <a:lnSpc>
+                <a:spcPct val="115000"/>
+              </a:lnSpc>
+              <a:spcBef>
+                <a:spcPts val="0"/>
+              </a:spcBef>
+              <a:spcAft>
+                <a:spcPts val="0"/>
+              </a:spcAft>
+              <a:buSzPts val="1400"/>
+              <a:buNone/>
+              <a:defRPr sz="1200" b="1">
                 <a:solidFill>
                   <a:schemeClr val="lt1"/>
                 </a:solidFill>
@@ -1980,19 +2019,19 @@
                 <a:sym typeface="Calibri"/>
               </a:defRPr>
             </a:lvl4pPr>
-            <a:lvl5pPr indent="-228600" lvl="4" marL="2286000" algn="l">
-              <a:lnSpc>
-                <a:spcPct val="115000"/>
-              </a:lnSpc>
-              <a:spcBef>
-                <a:spcPts val="0"/>
-              </a:spcBef>
-              <a:spcAft>
-                <a:spcPts val="0"/>
-              </a:spcAft>
-              <a:buSzPts val="1400"/>
-              <a:buNone/>
-              <a:defRPr b="1" sz="1200">
+            <a:lvl5pPr marL="2286000" lvl="4" indent="-228600" algn="l">
+              <a:lnSpc>
+                <a:spcPct val="115000"/>
+              </a:lnSpc>
+              <a:spcBef>
+                <a:spcPts val="0"/>
+              </a:spcBef>
+              <a:spcAft>
+                <a:spcPts val="0"/>
+              </a:spcAft>
+              <a:buSzPts val="1400"/>
+              <a:buNone/>
+              <a:defRPr sz="1200" b="1">
                 <a:solidFill>
                   <a:schemeClr val="lt1"/>
                 </a:solidFill>
@@ -2002,7 +2041,7 @@
                 <a:sym typeface="Calibri"/>
               </a:defRPr>
             </a:lvl5pPr>
-            <a:lvl6pPr indent="-317500" lvl="5" marL="2743200" algn="l">
+            <a:lvl6pPr marL="2743200" lvl="5" indent="-317500" algn="l">
               <a:lnSpc>
                 <a:spcPct val="115000"/>
               </a:lnSpc>
@@ -2016,7 +2055,7 @@
               <a:buChar char="■"/>
               <a:defRPr/>
             </a:lvl6pPr>
-            <a:lvl7pPr indent="-317500" lvl="6" marL="3200400" algn="l">
+            <a:lvl7pPr marL="3200400" lvl="6" indent="-317500" algn="l">
               <a:lnSpc>
                 <a:spcPct val="115000"/>
               </a:lnSpc>
@@ -2030,7 +2069,7 @@
               <a:buChar char="●"/>
               <a:defRPr/>
             </a:lvl7pPr>
-            <a:lvl8pPr indent="-317500" lvl="7" marL="3657600" algn="l">
+            <a:lvl8pPr marL="3657600" lvl="7" indent="-317500" algn="l">
               <a:lnSpc>
                 <a:spcPct val="115000"/>
               </a:lnSpc>
@@ -2044,7 +2083,7 @@
               <a:buChar char="○"/>
               <a:defRPr/>
             </a:lvl8pPr>
-            <a:lvl9pPr indent="-317500" lvl="8" marL="4114800" algn="l">
+            <a:lvl9pPr marL="4114800" lvl="8" indent="-317500" algn="l">
               <a:lnSpc>
                 <a:spcPct val="115000"/>
               </a:lnSpc>
@@ -2059,15 +2098,19 @@
               <a:defRPr/>
             </a:lvl9pPr>
           </a:lstStyle>
-          <a:p/>
+          <a:p>
+            <a:endParaRPr/>
+          </a:p>
         </p:txBody>
       </p:sp>
       <p:sp>
         <p:nvSpPr>
           <p:cNvPr id="19" name="Google Shape;19;p2"/>
-          <p:cNvSpPr txBox="1"/>
+          <p:cNvSpPr txBox="1">
+            <a:spLocks noGrp="1"/>
+          </p:cNvSpPr>
           <p:nvPr>
-            <p:ph idx="3" type="body"/>
+            <p:ph type="body" idx="3"/>
           </p:nvPr>
         </p:nvSpPr>
         <p:spPr>
@@ -2084,11 +2127,11 @@
           </a:ln>
         </p:spPr>
         <p:txBody>
-          <a:bodyPr anchorCtr="0" anchor="t" bIns="0" lIns="0" spcFirstLastPara="1" rIns="0" wrap="square" tIns="0">
+          <a:bodyPr spcFirstLastPara="1" wrap="square" lIns="0" tIns="0" rIns="0" bIns="0" anchor="t" anchorCtr="0">
             <a:noAutofit/>
           </a:bodyPr>
           <a:lstStyle>
-            <a:lvl1pPr indent="-228600" lvl="0" marL="457200" algn="l">
+            <a:lvl1pPr marL="457200" lvl="0" indent="-228600" algn="l">
               <a:lnSpc>
                 <a:spcPct val="115000"/>
               </a:lnSpc>
@@ -2100,7 +2143,7 @@
               </a:spcAft>
               <a:buSzPts val="1800"/>
               <a:buNone/>
-              <a:defRPr b="1" sz="1200">
+              <a:defRPr sz="1200" b="1">
                 <a:solidFill>
                   <a:schemeClr val="lt1"/>
                 </a:solidFill>
@@ -2110,19 +2153,19 @@
                 <a:sym typeface="Calibri"/>
               </a:defRPr>
             </a:lvl1pPr>
-            <a:lvl2pPr indent="-228600" lvl="1" marL="914400" algn="l">
-              <a:lnSpc>
-                <a:spcPct val="115000"/>
-              </a:lnSpc>
-              <a:spcBef>
-                <a:spcPts val="0"/>
-              </a:spcBef>
-              <a:spcAft>
-                <a:spcPts val="0"/>
-              </a:spcAft>
-              <a:buSzPts val="1400"/>
-              <a:buNone/>
-              <a:defRPr b="1" sz="1200">
+            <a:lvl2pPr marL="914400" lvl="1" indent="-228600" algn="l">
+              <a:lnSpc>
+                <a:spcPct val="115000"/>
+              </a:lnSpc>
+              <a:spcBef>
+                <a:spcPts val="0"/>
+              </a:spcBef>
+              <a:spcAft>
+                <a:spcPts val="0"/>
+              </a:spcAft>
+              <a:buSzPts val="1400"/>
+              <a:buNone/>
+              <a:defRPr sz="1200" b="1">
                 <a:solidFill>
                   <a:schemeClr val="lt1"/>
                 </a:solidFill>
@@ -2132,19 +2175,19 @@
                 <a:sym typeface="Calibri"/>
               </a:defRPr>
             </a:lvl2pPr>
-            <a:lvl3pPr indent="-228600" lvl="2" marL="1371600" algn="l">
-              <a:lnSpc>
-                <a:spcPct val="115000"/>
-              </a:lnSpc>
-              <a:spcBef>
-                <a:spcPts val="0"/>
-              </a:spcBef>
-              <a:spcAft>
-                <a:spcPts val="0"/>
-              </a:spcAft>
-              <a:buSzPts val="1400"/>
-              <a:buNone/>
-              <a:defRPr b="1" sz="1200">
+            <a:lvl3pPr marL="1371600" lvl="2" indent="-228600" algn="l">
+              <a:lnSpc>
+                <a:spcPct val="115000"/>
+              </a:lnSpc>
+              <a:spcBef>
+                <a:spcPts val="0"/>
+              </a:spcBef>
+              <a:spcAft>
+                <a:spcPts val="0"/>
+              </a:spcAft>
+              <a:buSzPts val="1400"/>
+              <a:buNone/>
+              <a:defRPr sz="1200" b="1">
                 <a:solidFill>
                   <a:schemeClr val="lt1"/>
                 </a:solidFill>
@@ -2154,19 +2197,19 @@
                 <a:sym typeface="Calibri"/>
               </a:defRPr>
             </a:lvl3pPr>
-            <a:lvl4pPr indent="-228600" lvl="3" marL="1828800" algn="l">
-              <a:lnSpc>
-                <a:spcPct val="115000"/>
-              </a:lnSpc>
-              <a:spcBef>
-                <a:spcPts val="0"/>
-              </a:spcBef>
-              <a:spcAft>
-                <a:spcPts val="0"/>
-              </a:spcAft>
-              <a:buSzPts val="1400"/>
-              <a:buNone/>
-              <a:defRPr b="1" sz="1200">
+            <a:lvl4pPr marL="1828800" lvl="3" indent="-228600" algn="l">
+              <a:lnSpc>
+                <a:spcPct val="115000"/>
+              </a:lnSpc>
+              <a:spcBef>
+                <a:spcPts val="0"/>
+              </a:spcBef>
+              <a:spcAft>
+                <a:spcPts val="0"/>
+              </a:spcAft>
+              <a:buSzPts val="1400"/>
+              <a:buNone/>
+              <a:defRPr sz="1200" b="1">
                 <a:solidFill>
                   <a:schemeClr val="lt1"/>
                 </a:solidFill>
@@ -2176,19 +2219,19 @@
                 <a:sym typeface="Calibri"/>
               </a:defRPr>
             </a:lvl4pPr>
-            <a:lvl5pPr indent="-228600" lvl="4" marL="2286000" algn="l">
-              <a:lnSpc>
-                <a:spcPct val="115000"/>
-              </a:lnSpc>
-              <a:spcBef>
-                <a:spcPts val="0"/>
-              </a:spcBef>
-              <a:spcAft>
-                <a:spcPts val="0"/>
-              </a:spcAft>
-              <a:buSzPts val="1400"/>
-              <a:buNone/>
-              <a:defRPr b="1" sz="1200">
+            <a:lvl5pPr marL="2286000" lvl="4" indent="-228600" algn="l">
+              <a:lnSpc>
+                <a:spcPct val="115000"/>
+              </a:lnSpc>
+              <a:spcBef>
+                <a:spcPts val="0"/>
+              </a:spcBef>
+              <a:spcAft>
+                <a:spcPts val="0"/>
+              </a:spcAft>
+              <a:buSzPts val="1400"/>
+              <a:buNone/>
+              <a:defRPr sz="1200" b="1">
                 <a:solidFill>
                   <a:schemeClr val="lt1"/>
                 </a:solidFill>
@@ -2198,7 +2241,7 @@
                 <a:sym typeface="Calibri"/>
               </a:defRPr>
             </a:lvl5pPr>
-            <a:lvl6pPr indent="-317500" lvl="5" marL="2743200" algn="l">
+            <a:lvl6pPr marL="2743200" lvl="5" indent="-317500" algn="l">
               <a:lnSpc>
                 <a:spcPct val="115000"/>
               </a:lnSpc>
@@ -2212,7 +2255,7 @@
               <a:buChar char="■"/>
               <a:defRPr/>
             </a:lvl6pPr>
-            <a:lvl7pPr indent="-317500" lvl="6" marL="3200400" algn="l">
+            <a:lvl7pPr marL="3200400" lvl="6" indent="-317500" algn="l">
               <a:lnSpc>
                 <a:spcPct val="115000"/>
               </a:lnSpc>
@@ -2226,7 +2269,7 @@
               <a:buChar char="●"/>
               <a:defRPr/>
             </a:lvl7pPr>
-            <a:lvl8pPr indent="-317500" lvl="7" marL="3657600" algn="l">
+            <a:lvl8pPr marL="3657600" lvl="7" indent="-317500" algn="l">
               <a:lnSpc>
                 <a:spcPct val="115000"/>
               </a:lnSpc>
@@ -2240,7 +2283,7 @@
               <a:buChar char="○"/>
               <a:defRPr/>
             </a:lvl8pPr>
-            <a:lvl9pPr indent="-317500" lvl="8" marL="4114800" algn="l">
+            <a:lvl9pPr marL="4114800" lvl="8" indent="-317500" algn="l">
               <a:lnSpc>
                 <a:spcPct val="115000"/>
               </a:lnSpc>
@@ -2255,15 +2298,19 @@
               <a:defRPr/>
             </a:lvl9pPr>
           </a:lstStyle>
-          <a:p/>
+          <a:p>
+            <a:endParaRPr/>
+          </a:p>
         </p:txBody>
       </p:sp>
       <p:sp>
         <p:nvSpPr>
           <p:cNvPr id="20" name="Google Shape;20;p2"/>
-          <p:cNvSpPr txBox="1"/>
+          <p:cNvSpPr txBox="1">
+            <a:spLocks noGrp="1"/>
+          </p:cNvSpPr>
           <p:nvPr>
-            <p:ph idx="4" type="body"/>
+            <p:ph type="body" idx="4"/>
           </p:nvPr>
         </p:nvSpPr>
         <p:spPr>
@@ -2280,11 +2327,11 @@
           </a:ln>
         </p:spPr>
         <p:txBody>
-          <a:bodyPr anchorCtr="0" anchor="t" bIns="0" lIns="0" spcFirstLastPara="1" rIns="0" wrap="square" tIns="0">
+          <a:bodyPr spcFirstLastPara="1" wrap="square" lIns="0" tIns="0" rIns="0" bIns="0" anchor="t" anchorCtr="0">
             <a:noAutofit/>
           </a:bodyPr>
           <a:lstStyle>
-            <a:lvl1pPr indent="-228600" lvl="0" marL="457200" algn="l">
+            <a:lvl1pPr marL="457200" lvl="0" indent="-228600" algn="l">
               <a:lnSpc>
                 <a:spcPct val="115000"/>
               </a:lnSpc>
@@ -2296,7 +2343,7 @@
               </a:spcAft>
               <a:buSzPts val="1800"/>
               <a:buNone/>
-              <a:defRPr b="1" sz="1200">
+              <a:defRPr sz="1200" b="1">
                 <a:solidFill>
                   <a:schemeClr val="lt1"/>
                 </a:solidFill>
@@ -2306,19 +2353,19 @@
                 <a:sym typeface="Calibri"/>
               </a:defRPr>
             </a:lvl1pPr>
-            <a:lvl2pPr indent="-228600" lvl="1" marL="914400" algn="l">
-              <a:lnSpc>
-                <a:spcPct val="115000"/>
-              </a:lnSpc>
-              <a:spcBef>
-                <a:spcPts val="0"/>
-              </a:spcBef>
-              <a:spcAft>
-                <a:spcPts val="0"/>
-              </a:spcAft>
-              <a:buSzPts val="1400"/>
-              <a:buNone/>
-              <a:defRPr b="1" sz="1200">
+            <a:lvl2pPr marL="914400" lvl="1" indent="-228600" algn="l">
+              <a:lnSpc>
+                <a:spcPct val="115000"/>
+              </a:lnSpc>
+              <a:spcBef>
+                <a:spcPts val="0"/>
+              </a:spcBef>
+              <a:spcAft>
+                <a:spcPts val="0"/>
+              </a:spcAft>
+              <a:buSzPts val="1400"/>
+              <a:buNone/>
+              <a:defRPr sz="1200" b="1">
                 <a:solidFill>
                   <a:schemeClr val="lt1"/>
                 </a:solidFill>
@@ -2328,19 +2375,19 @@
                 <a:sym typeface="Calibri"/>
               </a:defRPr>
             </a:lvl2pPr>
-            <a:lvl3pPr indent="-228600" lvl="2" marL="1371600" algn="l">
-              <a:lnSpc>
-                <a:spcPct val="115000"/>
-              </a:lnSpc>
-              <a:spcBef>
-                <a:spcPts val="0"/>
-              </a:spcBef>
-              <a:spcAft>
-                <a:spcPts val="0"/>
-              </a:spcAft>
-              <a:buSzPts val="1400"/>
-              <a:buNone/>
-              <a:defRPr b="1" sz="1200">
+            <a:lvl3pPr marL="1371600" lvl="2" indent="-228600" algn="l">
+              <a:lnSpc>
+                <a:spcPct val="115000"/>
+              </a:lnSpc>
+              <a:spcBef>
+                <a:spcPts val="0"/>
+              </a:spcBef>
+              <a:spcAft>
+                <a:spcPts val="0"/>
+              </a:spcAft>
+              <a:buSzPts val="1400"/>
+              <a:buNone/>
+              <a:defRPr sz="1200" b="1">
                 <a:solidFill>
                   <a:schemeClr val="lt1"/>
                 </a:solidFill>
@@ -2350,19 +2397,19 @@
                 <a:sym typeface="Calibri"/>
               </a:defRPr>
             </a:lvl3pPr>
-            <a:lvl4pPr indent="-228600" lvl="3" marL="1828800" algn="l">
-              <a:lnSpc>
-                <a:spcPct val="115000"/>
-              </a:lnSpc>
-              <a:spcBef>
-                <a:spcPts val="0"/>
-              </a:spcBef>
-              <a:spcAft>
-                <a:spcPts val="0"/>
-              </a:spcAft>
-              <a:buSzPts val="1400"/>
-              <a:buNone/>
-              <a:defRPr b="1" sz="1200">
+            <a:lvl4pPr marL="1828800" lvl="3" indent="-228600" algn="l">
+              <a:lnSpc>
+                <a:spcPct val="115000"/>
+              </a:lnSpc>
+              <a:spcBef>
+                <a:spcPts val="0"/>
+              </a:spcBef>
+              <a:spcAft>
+                <a:spcPts val="0"/>
+              </a:spcAft>
+              <a:buSzPts val="1400"/>
+              <a:buNone/>
+              <a:defRPr sz="1200" b="1">
                 <a:solidFill>
                   <a:schemeClr val="lt1"/>
                 </a:solidFill>
@@ -2372,19 +2419,19 @@
                 <a:sym typeface="Calibri"/>
               </a:defRPr>
             </a:lvl4pPr>
-            <a:lvl5pPr indent="-228600" lvl="4" marL="2286000" algn="l">
-              <a:lnSpc>
-                <a:spcPct val="115000"/>
-              </a:lnSpc>
-              <a:spcBef>
-                <a:spcPts val="0"/>
-              </a:spcBef>
-              <a:spcAft>
-                <a:spcPts val="0"/>
-              </a:spcAft>
-              <a:buSzPts val="1400"/>
-              <a:buNone/>
-              <a:defRPr b="1" sz="1200">
+            <a:lvl5pPr marL="2286000" lvl="4" indent="-228600" algn="l">
+              <a:lnSpc>
+                <a:spcPct val="115000"/>
+              </a:lnSpc>
+              <a:spcBef>
+                <a:spcPts val="0"/>
+              </a:spcBef>
+              <a:spcAft>
+                <a:spcPts val="0"/>
+              </a:spcAft>
+              <a:buSzPts val="1400"/>
+              <a:buNone/>
+              <a:defRPr sz="1200" b="1">
                 <a:solidFill>
                   <a:schemeClr val="lt1"/>
                 </a:solidFill>
@@ -2394,7 +2441,7 @@
                 <a:sym typeface="Calibri"/>
               </a:defRPr>
             </a:lvl5pPr>
-            <a:lvl6pPr indent="-317500" lvl="5" marL="2743200" algn="l">
+            <a:lvl6pPr marL="2743200" lvl="5" indent="-317500" algn="l">
               <a:lnSpc>
                 <a:spcPct val="115000"/>
               </a:lnSpc>
@@ -2408,7 +2455,7 @@
               <a:buChar char="■"/>
               <a:defRPr/>
             </a:lvl6pPr>
-            <a:lvl7pPr indent="-317500" lvl="6" marL="3200400" algn="l">
+            <a:lvl7pPr marL="3200400" lvl="6" indent="-317500" algn="l">
               <a:lnSpc>
                 <a:spcPct val="115000"/>
               </a:lnSpc>
@@ -2422,7 +2469,7 @@
               <a:buChar char="●"/>
               <a:defRPr/>
             </a:lvl7pPr>
-            <a:lvl8pPr indent="-317500" lvl="7" marL="3657600" algn="l">
+            <a:lvl8pPr marL="3657600" lvl="7" indent="-317500" algn="l">
               <a:lnSpc>
                 <a:spcPct val="115000"/>
               </a:lnSpc>
@@ -2436,7 +2483,7 @@
               <a:buChar char="○"/>
               <a:defRPr/>
             </a:lvl8pPr>
-            <a:lvl9pPr indent="-317500" lvl="8" marL="4114800" algn="l">
+            <a:lvl9pPr marL="4114800" lvl="8" indent="-317500" algn="l">
               <a:lnSpc>
                 <a:spcPct val="115000"/>
               </a:lnSpc>
@@ -2451,15 +2498,19 @@
               <a:defRPr/>
             </a:lvl9pPr>
           </a:lstStyle>
-          <a:p/>
+          <a:p>
+            <a:endParaRPr/>
+          </a:p>
         </p:txBody>
       </p:sp>
       <p:sp>
         <p:nvSpPr>
           <p:cNvPr id="21" name="Google Shape;21;p2"/>
-          <p:cNvSpPr txBox="1"/>
+          <p:cNvSpPr txBox="1">
+            <a:spLocks noGrp="1"/>
+          </p:cNvSpPr>
           <p:nvPr>
-            <p:ph idx="5" type="body"/>
+            <p:ph type="body" idx="5"/>
           </p:nvPr>
         </p:nvSpPr>
         <p:spPr>
@@ -2476,11 +2527,11 @@
           </a:ln>
         </p:spPr>
         <p:txBody>
-          <a:bodyPr anchorCtr="0" anchor="t" bIns="0" lIns="0" spcFirstLastPara="1" rIns="0" wrap="square" tIns="0">
+          <a:bodyPr spcFirstLastPara="1" wrap="square" lIns="0" tIns="0" rIns="0" bIns="0" anchor="t" anchorCtr="0">
             <a:noAutofit/>
           </a:bodyPr>
           <a:lstStyle>
-            <a:lvl1pPr indent="-228600" lvl="0" marL="457200" algn="l">
+            <a:lvl1pPr marL="457200" lvl="0" indent="-228600" algn="l">
               <a:lnSpc>
                 <a:spcPct val="115000"/>
               </a:lnSpc>
@@ -2492,7 +2543,7 @@
               </a:spcAft>
               <a:buSzPts val="1800"/>
               <a:buNone/>
-              <a:defRPr b="1" sz="1200">
+              <a:defRPr sz="1200" b="1">
                 <a:solidFill>
                   <a:schemeClr val="lt1"/>
                 </a:solidFill>
@@ -2502,19 +2553,19 @@
                 <a:sym typeface="Calibri"/>
               </a:defRPr>
             </a:lvl1pPr>
-            <a:lvl2pPr indent="-228600" lvl="1" marL="914400" algn="l">
-              <a:lnSpc>
-                <a:spcPct val="115000"/>
-              </a:lnSpc>
-              <a:spcBef>
-                <a:spcPts val="0"/>
-              </a:spcBef>
-              <a:spcAft>
-                <a:spcPts val="0"/>
-              </a:spcAft>
-              <a:buSzPts val="1400"/>
-              <a:buNone/>
-              <a:defRPr b="1" sz="1200">
+            <a:lvl2pPr marL="914400" lvl="1" indent="-228600" algn="l">
+              <a:lnSpc>
+                <a:spcPct val="115000"/>
+              </a:lnSpc>
+              <a:spcBef>
+                <a:spcPts val="0"/>
+              </a:spcBef>
+              <a:spcAft>
+                <a:spcPts val="0"/>
+              </a:spcAft>
+              <a:buSzPts val="1400"/>
+              <a:buNone/>
+              <a:defRPr sz="1200" b="1">
                 <a:solidFill>
                   <a:schemeClr val="lt1"/>
                 </a:solidFill>
@@ -2524,19 +2575,19 @@
                 <a:sym typeface="Calibri"/>
               </a:defRPr>
             </a:lvl2pPr>
-            <a:lvl3pPr indent="-228600" lvl="2" marL="1371600" algn="l">
-              <a:lnSpc>
-                <a:spcPct val="115000"/>
-              </a:lnSpc>
-              <a:spcBef>
-                <a:spcPts val="0"/>
-              </a:spcBef>
-              <a:spcAft>
-                <a:spcPts val="0"/>
-              </a:spcAft>
-              <a:buSzPts val="1400"/>
-              <a:buNone/>
-              <a:defRPr b="1" sz="1200">
+            <a:lvl3pPr marL="1371600" lvl="2" indent="-228600" algn="l">
+              <a:lnSpc>
+                <a:spcPct val="115000"/>
+              </a:lnSpc>
+              <a:spcBef>
+                <a:spcPts val="0"/>
+              </a:spcBef>
+              <a:spcAft>
+                <a:spcPts val="0"/>
+              </a:spcAft>
+              <a:buSzPts val="1400"/>
+              <a:buNone/>
+              <a:defRPr sz="1200" b="1">
                 <a:solidFill>
                   <a:schemeClr val="lt1"/>
                 </a:solidFill>
@@ -2546,19 +2597,19 @@
                 <a:sym typeface="Calibri"/>
               </a:defRPr>
             </a:lvl3pPr>
-            <a:lvl4pPr indent="-228600" lvl="3" marL="1828800" algn="l">
-              <a:lnSpc>
-                <a:spcPct val="115000"/>
-              </a:lnSpc>
-              <a:spcBef>
-                <a:spcPts val="0"/>
-              </a:spcBef>
-              <a:spcAft>
-                <a:spcPts val="0"/>
-              </a:spcAft>
-              <a:buSzPts val="1400"/>
-              <a:buNone/>
-              <a:defRPr b="1" sz="1200">
+            <a:lvl4pPr marL="1828800" lvl="3" indent="-228600" algn="l">
+              <a:lnSpc>
+                <a:spcPct val="115000"/>
+              </a:lnSpc>
+              <a:spcBef>
+                <a:spcPts val="0"/>
+              </a:spcBef>
+              <a:spcAft>
+                <a:spcPts val="0"/>
+              </a:spcAft>
+              <a:buSzPts val="1400"/>
+              <a:buNone/>
+              <a:defRPr sz="1200" b="1">
                 <a:solidFill>
                   <a:schemeClr val="lt1"/>
                 </a:solidFill>
@@ -2568,19 +2619,19 @@
                 <a:sym typeface="Calibri"/>
               </a:defRPr>
             </a:lvl4pPr>
-            <a:lvl5pPr indent="-228600" lvl="4" marL="2286000" algn="l">
-              <a:lnSpc>
-                <a:spcPct val="115000"/>
-              </a:lnSpc>
-              <a:spcBef>
-                <a:spcPts val="0"/>
-              </a:spcBef>
-              <a:spcAft>
-                <a:spcPts val="0"/>
-              </a:spcAft>
-              <a:buSzPts val="1400"/>
-              <a:buNone/>
-              <a:defRPr b="1" sz="1200">
+            <a:lvl5pPr marL="2286000" lvl="4" indent="-228600" algn="l">
+              <a:lnSpc>
+                <a:spcPct val="115000"/>
+              </a:lnSpc>
+              <a:spcBef>
+                <a:spcPts val="0"/>
+              </a:spcBef>
+              <a:spcAft>
+                <a:spcPts val="0"/>
+              </a:spcAft>
+              <a:buSzPts val="1400"/>
+              <a:buNone/>
+              <a:defRPr sz="1200" b="1">
                 <a:solidFill>
                   <a:schemeClr val="lt1"/>
                 </a:solidFill>
@@ -2590,7 +2641,7 @@
                 <a:sym typeface="Calibri"/>
               </a:defRPr>
             </a:lvl5pPr>
-            <a:lvl6pPr indent="-317500" lvl="5" marL="2743200" algn="l">
+            <a:lvl6pPr marL="2743200" lvl="5" indent="-317500" algn="l">
               <a:lnSpc>
                 <a:spcPct val="115000"/>
               </a:lnSpc>
@@ -2604,7 +2655,7 @@
               <a:buChar char="■"/>
               <a:defRPr/>
             </a:lvl6pPr>
-            <a:lvl7pPr indent="-317500" lvl="6" marL="3200400" algn="l">
+            <a:lvl7pPr marL="3200400" lvl="6" indent="-317500" algn="l">
               <a:lnSpc>
                 <a:spcPct val="115000"/>
               </a:lnSpc>
@@ -2618,7 +2669,7 @@
               <a:buChar char="●"/>
               <a:defRPr/>
             </a:lvl7pPr>
-            <a:lvl8pPr indent="-317500" lvl="7" marL="3657600" algn="l">
+            <a:lvl8pPr marL="3657600" lvl="7" indent="-317500" algn="l">
               <a:lnSpc>
                 <a:spcPct val="115000"/>
               </a:lnSpc>
@@ -2632,7 +2683,7 @@
               <a:buChar char="○"/>
               <a:defRPr/>
             </a:lvl8pPr>
-            <a:lvl9pPr indent="-317500" lvl="8" marL="4114800" algn="l">
+            <a:lvl9pPr marL="4114800" lvl="8" indent="-317500" algn="l">
               <a:lnSpc>
                 <a:spcPct val="115000"/>
               </a:lnSpc>
@@ -2647,7 +2698,9 @@
               <a:defRPr/>
             </a:lvl9pPr>
           </a:lstStyle>
-          <a:p/>
+          <a:p>
+            <a:endParaRPr/>
+          </a:p>
         </p:txBody>
       </p:sp>
     </p:spTree>
@@ -2659,11 +2712,11 @@
 </file>
 
 <file path=ppt/slideLayouts/slideLayout2.xml><?xml version="1.0" encoding="utf-8"?>
-<p:sldLayout xmlns:a="http://schemas.openxmlformats.org/drawingml/2006/main" xmlns:r="http://schemas.openxmlformats.org/officeDocument/2006/relationships" xmlns:mc="http://schemas.openxmlformats.org/markup-compatibility/2006" xmlns:mv="urn:schemas-microsoft-com:mac:vml" xmlns:p="http://schemas.openxmlformats.org/presentationml/2006/main" xmlns:c="http://schemas.openxmlformats.org/drawingml/2006/chart" xmlns:dgm="http://schemas.openxmlformats.org/drawingml/2006/diagram" xmlns:o="urn:schemas-microsoft-com:office:office" xmlns:v="urn:schemas-microsoft-com:vml" xmlns:pvml="urn:schemas-microsoft-com:office:powerpoint" xmlns:com="http://schemas.openxmlformats.org/drawingml/2006/compatibility" xmlns:p14="http://schemas.microsoft.com/office/powerpoint/2010/main" xmlns:p15="http://schemas.microsoft.com/office/powerpoint/2012/main" xmlns:ahyp="http://schemas.microsoft.com/office/drawing/2018/hyperlinkcolor" matchingName="Title and body" type="tx">
+<p:sldLayout xmlns:a="http://schemas.openxmlformats.org/drawingml/2006/main" xmlns:r="http://schemas.openxmlformats.org/officeDocument/2006/relationships" xmlns:p="http://schemas.openxmlformats.org/presentationml/2006/main" matchingName="Title and body" type="tx">
   <p:cSld name="TITLE_AND_BODY">
     <p:spTree>
       <p:nvGrpSpPr>
-        <p:cNvPr id="22" name="Shape 22"/>
+        <p:cNvPr id="1" name="Shape 22"/>
         <p:cNvGrpSpPr/>
         <p:nvPr/>
       </p:nvGrpSpPr>
@@ -2678,7 +2731,9 @@
       <p:sp>
         <p:nvSpPr>
           <p:cNvPr id="23" name="Google Shape;23;p3"/>
-          <p:cNvSpPr txBox="1"/>
+          <p:cNvSpPr txBox="1">
+            <a:spLocks noGrp="1"/>
+          </p:cNvSpPr>
           <p:nvPr>
             <p:ph type="title"/>
           </p:nvPr>
@@ -2697,7 +2752,7 @@
           </a:ln>
         </p:spPr>
         <p:txBody>
-          <a:bodyPr anchorCtr="0" anchor="ctr" bIns="91425" lIns="91425" spcFirstLastPara="1" rIns="91425" wrap="square" tIns="91425">
+          <a:bodyPr spcFirstLastPara="1" wrap="square" lIns="91425" tIns="91425" rIns="91425" bIns="91425" anchor="ctr" anchorCtr="0">
             <a:normAutofit/>
           </a:bodyPr>
           <a:lstStyle>
@@ -2833,15 +2888,19 @@
               <a:defRPr/>
             </a:lvl9pPr>
           </a:lstStyle>
-          <a:p/>
+          <a:p>
+            <a:endParaRPr dirty="0"/>
+          </a:p>
         </p:txBody>
       </p:sp>
       <p:sp>
         <p:nvSpPr>
           <p:cNvPr id="24" name="Google Shape;24;p3"/>
-          <p:cNvSpPr txBox="1"/>
+          <p:cNvSpPr txBox="1">
+            <a:spLocks noGrp="1"/>
+          </p:cNvSpPr>
           <p:nvPr>
-            <p:ph idx="1" type="body"/>
+            <p:ph type="body" idx="1"/>
           </p:nvPr>
         </p:nvSpPr>
         <p:spPr>
@@ -2858,11 +2917,11 @@
           </a:ln>
         </p:spPr>
         <p:txBody>
-          <a:bodyPr anchorCtr="0" anchor="t" bIns="91425" lIns="91425" spcFirstLastPara="1" rIns="91425" wrap="square" tIns="91425">
+          <a:bodyPr spcFirstLastPara="1" wrap="square" lIns="91425" tIns="91425" rIns="91425" bIns="91425" anchor="t" anchorCtr="0">
             <a:normAutofit/>
           </a:bodyPr>
           <a:lstStyle>
-            <a:lvl1pPr indent="-342900" lvl="0" marL="457200" algn="l">
+            <a:lvl1pPr marL="457200" lvl="0" indent="-342900" algn="l">
               <a:lnSpc>
                 <a:spcPct val="115000"/>
               </a:lnSpc>
@@ -2881,7 +2940,7 @@
                 </a:solidFill>
               </a:defRPr>
             </a:lvl1pPr>
-            <a:lvl2pPr indent="-317500" lvl="1" marL="914400" algn="l">
+            <a:lvl2pPr marL="914400" lvl="1" indent="-317500" algn="l">
               <a:lnSpc>
                 <a:spcPct val="115000"/>
               </a:lnSpc>
@@ -2901,7 +2960,7 @@
                 <a:sym typeface="Calibri"/>
               </a:defRPr>
             </a:lvl2pPr>
-            <a:lvl3pPr indent="-317500" lvl="2" marL="1371600" algn="l">
+            <a:lvl3pPr marL="1371600" lvl="2" indent="-317500" algn="l">
               <a:lnSpc>
                 <a:spcPct val="115000"/>
               </a:lnSpc>
@@ -2921,7 +2980,7 @@
                 <a:sym typeface="Calibri"/>
               </a:defRPr>
             </a:lvl3pPr>
-            <a:lvl4pPr indent="-317500" lvl="3" marL="1828800" algn="l">
+            <a:lvl4pPr marL="1828800" lvl="3" indent="-317500" algn="l">
               <a:lnSpc>
                 <a:spcPct val="115000"/>
               </a:lnSpc>
@@ -2941,7 +3000,7 @@
                 <a:sym typeface="Calibri"/>
               </a:defRPr>
             </a:lvl4pPr>
-            <a:lvl5pPr indent="-317500" lvl="4" marL="2286000" algn="l">
+            <a:lvl5pPr marL="2286000" lvl="4" indent="-317500" algn="l">
               <a:lnSpc>
                 <a:spcPct val="115000"/>
               </a:lnSpc>
@@ -2961,7 +3020,7 @@
                 <a:sym typeface="Calibri"/>
               </a:defRPr>
             </a:lvl5pPr>
-            <a:lvl6pPr indent="-317500" lvl="5" marL="2743200" algn="l">
+            <a:lvl6pPr marL="2743200" lvl="5" indent="-317500" algn="l">
               <a:lnSpc>
                 <a:spcPct val="115000"/>
               </a:lnSpc>
@@ -2981,7 +3040,7 @@
                 <a:sym typeface="Calibri"/>
               </a:defRPr>
             </a:lvl6pPr>
-            <a:lvl7pPr indent="-317500" lvl="6" marL="3200400" algn="l">
+            <a:lvl7pPr marL="3200400" lvl="6" indent="-317500" algn="l">
               <a:lnSpc>
                 <a:spcPct val="115000"/>
               </a:lnSpc>
@@ -3001,7 +3060,7 @@
                 <a:sym typeface="Calibri"/>
               </a:defRPr>
             </a:lvl7pPr>
-            <a:lvl8pPr indent="-317500" lvl="7" marL="3657600" algn="l">
+            <a:lvl8pPr marL="3657600" lvl="7" indent="-317500" algn="l">
               <a:lnSpc>
                 <a:spcPct val="115000"/>
               </a:lnSpc>
@@ -3021,7 +3080,7 @@
                 <a:sym typeface="Calibri"/>
               </a:defRPr>
             </a:lvl8pPr>
-            <a:lvl9pPr indent="-317500" lvl="8" marL="4114800" algn="l">
+            <a:lvl9pPr marL="4114800" lvl="8" indent="-317500" algn="l">
               <a:lnSpc>
                 <a:spcPct val="115000"/>
               </a:lnSpc>
@@ -3042,12 +3101,14 @@
               </a:defRPr>
             </a:lvl9pPr>
           </a:lstStyle>
-          <a:p/>
+          <a:p>
+            <a:endParaRPr dirty="0"/>
+          </a:p>
         </p:txBody>
       </p:sp>
       <p:pic>
         <p:nvPicPr>
-          <p:cNvPr descr="A black background with a black square&#10;&#10;Description automatically generated with medium confidence" id="25" name="Google Shape;25;p3"/>
+          <p:cNvPr id="25" name="Google Shape;25;p3" descr="A black background with a black square&#10;&#10;Description automatically generated with medium confidence"/>
           <p:cNvPicPr preferRelativeResize="0"/>
           <p:nvPr/>
         </p:nvPicPr>
@@ -3055,7 +3116,7 @@
           <a:blip r:embed="rId2">
             <a:alphaModFix/>
           </a:blip>
-          <a:srcRect b="0" l="0" r="0" t="0"/>
+          <a:srcRect/>
           <a:stretch/>
         </p:blipFill>
         <p:spPr>
@@ -3081,11 +3142,11 @@
 </file>
 
 <file path=ppt/slideLayouts/slideLayout3.xml><?xml version="1.0" encoding="utf-8"?>
-<p:sldLayout xmlns:a="http://schemas.openxmlformats.org/drawingml/2006/main" xmlns:r="http://schemas.openxmlformats.org/officeDocument/2006/relationships" xmlns:mc="http://schemas.openxmlformats.org/markup-compatibility/2006" xmlns:mv="urn:schemas-microsoft-com:mac:vml" xmlns:p="http://schemas.openxmlformats.org/presentationml/2006/main" xmlns:c="http://schemas.openxmlformats.org/drawingml/2006/chart" xmlns:dgm="http://schemas.openxmlformats.org/drawingml/2006/diagram" xmlns:o="urn:schemas-microsoft-com:office:office" xmlns:v="urn:schemas-microsoft-com:vml" xmlns:pvml="urn:schemas-microsoft-com:office:powerpoint" xmlns:com="http://schemas.openxmlformats.org/drawingml/2006/compatibility" xmlns:p14="http://schemas.microsoft.com/office/powerpoint/2010/main" xmlns:p15="http://schemas.microsoft.com/office/powerpoint/2012/main" xmlns:ahyp="http://schemas.microsoft.com/office/drawing/2018/hyperlinkcolor" matchingName="Title and two columns" type="twoColTx">
+<p:sldLayout xmlns:a="http://schemas.openxmlformats.org/drawingml/2006/main" xmlns:r="http://schemas.openxmlformats.org/officeDocument/2006/relationships" xmlns:p="http://schemas.openxmlformats.org/presentationml/2006/main" matchingName="Title and two columns" type="twoColTx">
   <p:cSld name="TITLE_AND_TWO_COLUMNS">
     <p:spTree>
       <p:nvGrpSpPr>
-        <p:cNvPr id="26" name="Shape 26"/>
+        <p:cNvPr id="1" name="Shape 26"/>
         <p:cNvGrpSpPr/>
         <p:nvPr/>
       </p:nvGrpSpPr>
@@ -3100,7 +3161,9 @@
       <p:sp>
         <p:nvSpPr>
           <p:cNvPr id="27" name="Google Shape;27;p4"/>
-          <p:cNvSpPr txBox="1"/>
+          <p:cNvSpPr txBox="1">
+            <a:spLocks noGrp="1"/>
+          </p:cNvSpPr>
           <p:nvPr>
             <p:ph type="title"/>
           </p:nvPr>
@@ -3119,7 +3182,7 @@
           </a:ln>
         </p:spPr>
         <p:txBody>
-          <a:bodyPr anchorCtr="0" anchor="ctr" bIns="91425" lIns="91425" spcFirstLastPara="1" rIns="91425" wrap="square" tIns="91425">
+          <a:bodyPr spcFirstLastPara="1" wrap="square" lIns="91425" tIns="91425" rIns="91425" bIns="91425" anchor="ctr" anchorCtr="0">
             <a:normAutofit/>
           </a:bodyPr>
           <a:lstStyle>
@@ -3255,15 +3318,19 @@
               <a:defRPr/>
             </a:lvl9pPr>
           </a:lstStyle>
-          <a:p/>
+          <a:p>
+            <a:endParaRPr/>
+          </a:p>
         </p:txBody>
       </p:sp>
       <p:sp>
         <p:nvSpPr>
           <p:cNvPr id="28" name="Google Shape;28;p4"/>
-          <p:cNvSpPr txBox="1"/>
+          <p:cNvSpPr txBox="1">
+            <a:spLocks noGrp="1"/>
+          </p:cNvSpPr>
           <p:nvPr>
-            <p:ph idx="1" type="body"/>
+            <p:ph type="body" idx="1"/>
           </p:nvPr>
         </p:nvSpPr>
         <p:spPr>
@@ -3280,11 +3347,11 @@
           </a:ln>
         </p:spPr>
         <p:txBody>
-          <a:bodyPr anchorCtr="0" anchor="t" bIns="91425" lIns="91425" spcFirstLastPara="1" rIns="91425" wrap="square" tIns="91425">
+          <a:bodyPr spcFirstLastPara="1" wrap="square" lIns="91425" tIns="91425" rIns="91425" bIns="91425" anchor="t" anchorCtr="0">
             <a:normAutofit/>
           </a:bodyPr>
           <a:lstStyle>
-            <a:lvl1pPr indent="-317500" lvl="0" marL="457200" algn="l">
+            <a:lvl1pPr marL="457200" lvl="0" indent="-317500" algn="l">
               <a:lnSpc>
                 <a:spcPct val="115000"/>
               </a:lnSpc>
@@ -3307,7 +3374,7 @@
                 <a:sym typeface="Calibri"/>
               </a:defRPr>
             </a:lvl1pPr>
-            <a:lvl2pPr indent="-304800" lvl="1" marL="914400" algn="l">
+            <a:lvl2pPr marL="914400" lvl="1" indent="-304800" algn="l">
               <a:lnSpc>
                 <a:spcPct val="115000"/>
               </a:lnSpc>
@@ -3321,7 +3388,7 @@
               <a:buChar char="○"/>
               <a:defRPr sz="1200"/>
             </a:lvl2pPr>
-            <a:lvl3pPr indent="-304800" lvl="2" marL="1371600" algn="l">
+            <a:lvl3pPr marL="1371600" lvl="2" indent="-304800" algn="l">
               <a:lnSpc>
                 <a:spcPct val="115000"/>
               </a:lnSpc>
@@ -3335,7 +3402,7 @@
               <a:buChar char="■"/>
               <a:defRPr sz="1200"/>
             </a:lvl3pPr>
-            <a:lvl4pPr indent="-304800" lvl="3" marL="1828800" algn="l">
+            <a:lvl4pPr marL="1828800" lvl="3" indent="-304800" algn="l">
               <a:lnSpc>
                 <a:spcPct val="115000"/>
               </a:lnSpc>
@@ -3349,7 +3416,7 @@
               <a:buChar char="●"/>
               <a:defRPr sz="1200"/>
             </a:lvl4pPr>
-            <a:lvl5pPr indent="-304800" lvl="4" marL="2286000" algn="l">
+            <a:lvl5pPr marL="2286000" lvl="4" indent="-304800" algn="l">
               <a:lnSpc>
                 <a:spcPct val="115000"/>
               </a:lnSpc>
@@ -3363,7 +3430,7 @@
               <a:buChar char="○"/>
               <a:defRPr sz="1200"/>
             </a:lvl5pPr>
-            <a:lvl6pPr indent="-304800" lvl="5" marL="2743200" algn="l">
+            <a:lvl6pPr marL="2743200" lvl="5" indent="-304800" algn="l">
               <a:lnSpc>
                 <a:spcPct val="115000"/>
               </a:lnSpc>
@@ -3377,7 +3444,7 @@
               <a:buChar char="■"/>
               <a:defRPr sz="1200"/>
             </a:lvl6pPr>
-            <a:lvl7pPr indent="-304800" lvl="6" marL="3200400" algn="l">
+            <a:lvl7pPr marL="3200400" lvl="6" indent="-304800" algn="l">
               <a:lnSpc>
                 <a:spcPct val="115000"/>
               </a:lnSpc>
@@ -3391,7 +3458,7 @@
               <a:buChar char="●"/>
               <a:defRPr sz="1200"/>
             </a:lvl7pPr>
-            <a:lvl8pPr indent="-304800" lvl="7" marL="3657600" algn="l">
+            <a:lvl8pPr marL="3657600" lvl="7" indent="-304800" algn="l">
               <a:lnSpc>
                 <a:spcPct val="115000"/>
               </a:lnSpc>
@@ -3405,7 +3472,7 @@
               <a:buChar char="○"/>
               <a:defRPr sz="1200"/>
             </a:lvl8pPr>
-            <a:lvl9pPr indent="-304800" lvl="8" marL="4114800" algn="l">
+            <a:lvl9pPr marL="4114800" lvl="8" indent="-304800" algn="l">
               <a:lnSpc>
                 <a:spcPct val="115000"/>
               </a:lnSpc>
@@ -3420,15 +3487,19 @@
               <a:defRPr sz="1200"/>
             </a:lvl9pPr>
           </a:lstStyle>
-          <a:p/>
+          <a:p>
+            <a:endParaRPr dirty="0"/>
+          </a:p>
         </p:txBody>
       </p:sp>
       <p:sp>
         <p:nvSpPr>
           <p:cNvPr id="29" name="Google Shape;29;p4"/>
-          <p:cNvSpPr txBox="1"/>
+          <p:cNvSpPr txBox="1">
+            <a:spLocks noGrp="1"/>
+          </p:cNvSpPr>
           <p:nvPr>
-            <p:ph idx="2" type="body"/>
+            <p:ph type="body" idx="2"/>
           </p:nvPr>
         </p:nvSpPr>
         <p:spPr>
@@ -3445,11 +3516,11 @@
           </a:ln>
         </p:spPr>
         <p:txBody>
-          <a:bodyPr anchorCtr="0" anchor="t" bIns="91425" lIns="91425" spcFirstLastPara="1" rIns="91425" wrap="square" tIns="91425">
+          <a:bodyPr spcFirstLastPara="1" wrap="square" lIns="91425" tIns="91425" rIns="91425" bIns="91425" anchor="t" anchorCtr="0">
             <a:normAutofit/>
           </a:bodyPr>
           <a:lstStyle>
-            <a:lvl1pPr indent="-317500" lvl="0" marL="457200" algn="l">
+            <a:lvl1pPr marL="457200" lvl="0" indent="-317500" algn="l">
               <a:lnSpc>
                 <a:spcPct val="115000"/>
               </a:lnSpc>
@@ -3472,7 +3543,7 @@
                 <a:sym typeface="Calibri"/>
               </a:defRPr>
             </a:lvl1pPr>
-            <a:lvl2pPr indent="-304800" lvl="1" marL="914400" algn="l">
+            <a:lvl2pPr marL="914400" lvl="1" indent="-304800" algn="l">
               <a:lnSpc>
                 <a:spcPct val="115000"/>
               </a:lnSpc>
@@ -3486,7 +3557,7 @@
               <a:buChar char="○"/>
               <a:defRPr sz="1200"/>
             </a:lvl2pPr>
-            <a:lvl3pPr indent="-304800" lvl="2" marL="1371600" algn="l">
+            <a:lvl3pPr marL="1371600" lvl="2" indent="-304800" algn="l">
               <a:lnSpc>
                 <a:spcPct val="115000"/>
               </a:lnSpc>
@@ -3500,7 +3571,7 @@
               <a:buChar char="■"/>
               <a:defRPr sz="1200"/>
             </a:lvl3pPr>
-            <a:lvl4pPr indent="-304800" lvl="3" marL="1828800" algn="l">
+            <a:lvl4pPr marL="1828800" lvl="3" indent="-304800" algn="l">
               <a:lnSpc>
                 <a:spcPct val="115000"/>
               </a:lnSpc>
@@ -3514,7 +3585,7 @@
               <a:buChar char="●"/>
               <a:defRPr sz="1200"/>
             </a:lvl4pPr>
-            <a:lvl5pPr indent="-304800" lvl="4" marL="2286000" algn="l">
+            <a:lvl5pPr marL="2286000" lvl="4" indent="-304800" algn="l">
               <a:lnSpc>
                 <a:spcPct val="115000"/>
               </a:lnSpc>
@@ -3528,7 +3599,7 @@
               <a:buChar char="○"/>
               <a:defRPr sz="1200"/>
             </a:lvl5pPr>
-            <a:lvl6pPr indent="-304800" lvl="5" marL="2743200" algn="l">
+            <a:lvl6pPr marL="2743200" lvl="5" indent="-304800" algn="l">
               <a:lnSpc>
                 <a:spcPct val="115000"/>
               </a:lnSpc>
@@ -3542,7 +3613,7 @@
               <a:buChar char="■"/>
               <a:defRPr sz="1200"/>
             </a:lvl6pPr>
-            <a:lvl7pPr indent="-304800" lvl="6" marL="3200400" algn="l">
+            <a:lvl7pPr marL="3200400" lvl="6" indent="-304800" algn="l">
               <a:lnSpc>
                 <a:spcPct val="115000"/>
               </a:lnSpc>
@@ -3556,7 +3627,7 @@
               <a:buChar char="●"/>
               <a:defRPr sz="1200"/>
             </a:lvl7pPr>
-            <a:lvl8pPr indent="-304800" lvl="7" marL="3657600" algn="l">
+            <a:lvl8pPr marL="3657600" lvl="7" indent="-304800" algn="l">
               <a:lnSpc>
                 <a:spcPct val="115000"/>
               </a:lnSpc>
@@ -3570,7 +3641,7 @@
               <a:buChar char="○"/>
               <a:defRPr sz="1200"/>
             </a:lvl8pPr>
-            <a:lvl9pPr indent="-304800" lvl="8" marL="4114800" algn="l">
+            <a:lvl9pPr marL="4114800" lvl="8" indent="-304800" algn="l">
               <a:lnSpc>
                 <a:spcPct val="115000"/>
               </a:lnSpc>
@@ -3585,7 +3656,9 @@
               <a:defRPr sz="1200"/>
             </a:lvl9pPr>
           </a:lstStyle>
-          <a:p/>
+          <a:p>
+            <a:endParaRPr/>
+          </a:p>
         </p:txBody>
       </p:sp>
     </p:spTree>
@@ -3597,11 +3670,11 @@
 </file>
 
 <file path=ppt/slideLayouts/slideLayout4.xml><?xml version="1.0" encoding="utf-8"?>
-<p:sldLayout xmlns:a="http://schemas.openxmlformats.org/drawingml/2006/main" xmlns:r="http://schemas.openxmlformats.org/officeDocument/2006/relationships" xmlns:mc="http://schemas.openxmlformats.org/markup-compatibility/2006" xmlns:mv="urn:schemas-microsoft-com:mac:vml" xmlns:p="http://schemas.openxmlformats.org/presentationml/2006/main" xmlns:c="http://schemas.openxmlformats.org/drawingml/2006/chart" xmlns:dgm="http://schemas.openxmlformats.org/drawingml/2006/diagram" xmlns:o="urn:schemas-microsoft-com:office:office" xmlns:v="urn:schemas-microsoft-com:vml" xmlns:pvml="urn:schemas-microsoft-com:office:powerpoint" xmlns:com="http://schemas.openxmlformats.org/drawingml/2006/compatibility" xmlns:p14="http://schemas.microsoft.com/office/powerpoint/2010/main" xmlns:p15="http://schemas.microsoft.com/office/powerpoint/2012/main" xmlns:ahyp="http://schemas.microsoft.com/office/drawing/2018/hyperlinkcolor" matchingName="Title only" type="titleOnly">
+<p:sldLayout xmlns:a="http://schemas.openxmlformats.org/drawingml/2006/main" xmlns:r="http://schemas.openxmlformats.org/officeDocument/2006/relationships" xmlns:p="http://schemas.openxmlformats.org/presentationml/2006/main" matchingName="Title only" type="titleOnly">
   <p:cSld name="TITLE_ONLY">
     <p:spTree>
       <p:nvGrpSpPr>
-        <p:cNvPr id="30" name="Shape 30"/>
+        <p:cNvPr id="1" name="Shape 30"/>
         <p:cNvGrpSpPr/>
         <p:nvPr/>
       </p:nvGrpSpPr>
@@ -3616,7 +3689,9 @@
       <p:sp>
         <p:nvSpPr>
           <p:cNvPr id="31" name="Google Shape;31;p5"/>
-          <p:cNvSpPr txBox="1"/>
+          <p:cNvSpPr txBox="1">
+            <a:spLocks noGrp="1"/>
+          </p:cNvSpPr>
           <p:nvPr>
             <p:ph type="title"/>
           </p:nvPr>
@@ -3635,7 +3710,7 @@
           </a:ln>
         </p:spPr>
         <p:txBody>
-          <a:bodyPr anchorCtr="0" anchor="ctr" bIns="91425" lIns="91425" spcFirstLastPara="1" rIns="91425" wrap="square" tIns="91425">
+          <a:bodyPr spcFirstLastPara="1" wrap="square" lIns="91425" tIns="91425" rIns="91425" bIns="91425" anchor="ctr" anchorCtr="0">
             <a:normAutofit/>
           </a:bodyPr>
           <a:lstStyle>
@@ -3771,15 +3846,19 @@
               <a:defRPr/>
             </a:lvl9pPr>
           </a:lstStyle>
-          <a:p/>
+          <a:p>
+            <a:endParaRPr/>
+          </a:p>
         </p:txBody>
       </p:sp>
       <p:sp>
         <p:nvSpPr>
           <p:cNvPr id="32" name="Google Shape;32;p5"/>
-          <p:cNvSpPr txBox="1"/>
+          <p:cNvSpPr txBox="1">
+            <a:spLocks noGrp="1"/>
+          </p:cNvSpPr>
           <p:nvPr>
-            <p:ph idx="12" type="sldNum"/>
+            <p:ph type="sldNum" idx="12"/>
           </p:nvPr>
         </p:nvSpPr>
         <p:spPr>
@@ -3796,11 +3875,11 @@
           </a:ln>
         </p:spPr>
         <p:txBody>
-          <a:bodyPr anchorCtr="0" anchor="t" bIns="91425" lIns="91425" spcFirstLastPara="1" rIns="91425" wrap="square" tIns="91425">
+          <a:bodyPr spcFirstLastPara="1" wrap="square" lIns="91425" tIns="91425" rIns="91425" bIns="91425" anchor="t" anchorCtr="0">
             <a:noAutofit/>
           </a:bodyPr>
           <a:lstStyle>
-            <a:lvl1pPr indent="0" lvl="0" marL="0" marR="0" algn="r">
+            <a:lvl1pPr marL="0" marR="0" lvl="0" indent="0" algn="r">
               <a:lnSpc>
                 <a:spcPct val="100000"/>
               </a:lnSpc>
@@ -3816,7 +3895,7 @@
               <a:buSzPts val="1400"/>
               <a:buFont typeface="Arial"/>
               <a:buNone/>
-              <a:defRPr b="1" i="0" sz="1400" u="none" cap="none" strike="noStrike">
+              <a:defRPr sz="1400" b="1" i="0" u="none" strike="noStrike" cap="none">
                 <a:solidFill>
                   <a:schemeClr val="dk1"/>
                 </a:solidFill>
@@ -3826,7 +3905,7 @@
                 <a:sym typeface="Calibri"/>
               </a:defRPr>
             </a:lvl1pPr>
-            <a:lvl2pPr indent="0" lvl="1" marL="0" marR="0" algn="r">
+            <a:lvl2pPr marL="0" marR="0" lvl="1" indent="0" algn="r">
               <a:lnSpc>
                 <a:spcPct val="100000"/>
               </a:lnSpc>
@@ -3842,7 +3921,7 @@
               <a:buSzPts val="1400"/>
               <a:buFont typeface="Arial"/>
               <a:buNone/>
-              <a:defRPr b="1" i="0" sz="1400" u="none" cap="none" strike="noStrike">
+              <a:defRPr sz="1400" b="1" i="0" u="none" strike="noStrike" cap="none">
                 <a:solidFill>
                   <a:schemeClr val="dk1"/>
                 </a:solidFill>
@@ -3852,7 +3931,7 @@
                 <a:sym typeface="Calibri"/>
               </a:defRPr>
             </a:lvl2pPr>
-            <a:lvl3pPr indent="0" lvl="2" marL="0" marR="0" algn="r">
+            <a:lvl3pPr marL="0" marR="0" lvl="2" indent="0" algn="r">
               <a:lnSpc>
                 <a:spcPct val="100000"/>
               </a:lnSpc>
@@ -3868,7 +3947,7 @@
               <a:buSzPts val="1400"/>
               <a:buFont typeface="Arial"/>
               <a:buNone/>
-              <a:defRPr b="1" i="0" sz="1400" u="none" cap="none" strike="noStrike">
+              <a:defRPr sz="1400" b="1" i="0" u="none" strike="noStrike" cap="none">
                 <a:solidFill>
                   <a:schemeClr val="dk1"/>
                 </a:solidFill>
@@ -3878,7 +3957,7 @@
                 <a:sym typeface="Calibri"/>
               </a:defRPr>
             </a:lvl3pPr>
-            <a:lvl4pPr indent="0" lvl="3" marL="0" marR="0" algn="r">
+            <a:lvl4pPr marL="0" marR="0" lvl="3" indent="0" algn="r">
               <a:lnSpc>
                 <a:spcPct val="100000"/>
               </a:lnSpc>
@@ -3894,7 +3973,7 @@
               <a:buSzPts val="1400"/>
               <a:buFont typeface="Arial"/>
               <a:buNone/>
-              <a:defRPr b="1" i="0" sz="1400" u="none" cap="none" strike="noStrike">
+              <a:defRPr sz="1400" b="1" i="0" u="none" strike="noStrike" cap="none">
                 <a:solidFill>
                   <a:schemeClr val="dk1"/>
                 </a:solidFill>
@@ -3904,7 +3983,7 @@
                 <a:sym typeface="Calibri"/>
               </a:defRPr>
             </a:lvl4pPr>
-            <a:lvl5pPr indent="0" lvl="4" marL="0" marR="0" algn="r">
+            <a:lvl5pPr marL="0" marR="0" lvl="4" indent="0" algn="r">
               <a:lnSpc>
                 <a:spcPct val="100000"/>
               </a:lnSpc>
@@ -3920,7 +3999,7 @@
               <a:buSzPts val="1400"/>
               <a:buFont typeface="Arial"/>
               <a:buNone/>
-              <a:defRPr b="1" i="0" sz="1400" u="none" cap="none" strike="noStrike">
+              <a:defRPr sz="1400" b="1" i="0" u="none" strike="noStrike" cap="none">
                 <a:solidFill>
                   <a:schemeClr val="dk1"/>
                 </a:solidFill>
@@ -3930,7 +4009,7 @@
                 <a:sym typeface="Calibri"/>
               </a:defRPr>
             </a:lvl5pPr>
-            <a:lvl6pPr indent="0" lvl="5" marL="0" marR="0" algn="r">
+            <a:lvl6pPr marL="0" marR="0" lvl="5" indent="0" algn="r">
               <a:lnSpc>
                 <a:spcPct val="100000"/>
               </a:lnSpc>
@@ -3946,7 +4025,7 @@
               <a:buSzPts val="1400"/>
               <a:buFont typeface="Arial"/>
               <a:buNone/>
-              <a:defRPr b="1" i="0" sz="1400" u="none" cap="none" strike="noStrike">
+              <a:defRPr sz="1400" b="1" i="0" u="none" strike="noStrike" cap="none">
                 <a:solidFill>
                   <a:schemeClr val="dk1"/>
                 </a:solidFill>
@@ -3956,7 +4035,7 @@
                 <a:sym typeface="Calibri"/>
               </a:defRPr>
             </a:lvl6pPr>
-            <a:lvl7pPr indent="0" lvl="6" marL="0" marR="0" algn="r">
+            <a:lvl7pPr marL="0" marR="0" lvl="6" indent="0" algn="r">
               <a:lnSpc>
                 <a:spcPct val="100000"/>
               </a:lnSpc>
@@ -3972,7 +4051,7 @@
               <a:buSzPts val="1400"/>
               <a:buFont typeface="Arial"/>
               <a:buNone/>
-              <a:defRPr b="1" i="0" sz="1400" u="none" cap="none" strike="noStrike">
+              <a:defRPr sz="1400" b="1" i="0" u="none" strike="noStrike" cap="none">
                 <a:solidFill>
                   <a:schemeClr val="dk1"/>
                 </a:solidFill>
@@ -3982,7 +4061,7 @@
                 <a:sym typeface="Calibri"/>
               </a:defRPr>
             </a:lvl7pPr>
-            <a:lvl8pPr indent="0" lvl="7" marL="0" marR="0" algn="r">
+            <a:lvl8pPr marL="0" marR="0" lvl="7" indent="0" algn="r">
               <a:lnSpc>
                 <a:spcPct val="100000"/>
               </a:lnSpc>
@@ -3998,7 +4077,7 @@
               <a:buSzPts val="1400"/>
               <a:buFont typeface="Arial"/>
               <a:buNone/>
-              <a:defRPr b="1" i="0" sz="1400" u="none" cap="none" strike="noStrike">
+              <a:defRPr sz="1400" b="1" i="0" u="none" strike="noStrike" cap="none">
                 <a:solidFill>
                   <a:schemeClr val="dk1"/>
                 </a:solidFill>
@@ -4008,7 +4087,7 @@
                 <a:sym typeface="Calibri"/>
               </a:defRPr>
             </a:lvl8pPr>
-            <a:lvl9pPr indent="0" lvl="8" marL="0" marR="0" algn="r">
+            <a:lvl9pPr marL="0" marR="0" lvl="8" indent="0" algn="r">
               <a:lnSpc>
                 <a:spcPct val="100000"/>
               </a:lnSpc>
@@ -4024,7 +4103,7 @@
               <a:buSzPts val="1400"/>
               <a:buFont typeface="Arial"/>
               <a:buNone/>
-              <a:defRPr b="1" i="0" sz="1400" u="none" cap="none" strike="noStrike">
+              <a:defRPr sz="1400" b="1" i="0" u="none" strike="noStrike" cap="none">
                 <a:solidFill>
                   <a:schemeClr val="dk1"/>
                 </a:solidFill>
@@ -4036,7 +4115,7 @@
             </a:lvl9pPr>
           </a:lstStyle>
           <a:p>
-            <a:pPr indent="0" lvl="0" marL="0" rtl="0" algn="r">
+            <a:pPr marL="0" lvl="0" indent="0" algn="r" rtl="0">
               <a:spcBef>
                 <a:spcPts val="0"/>
               </a:spcBef>
@@ -4047,7 +4126,7 @@
             </a:pPr>
             <a:fld id="{00000000-1234-1234-1234-123412341234}" type="slidenum">
               <a:rPr lang="en-US"/>
-              <a:t>‹#›</a:t>
+              <a:t>‹N›</a:t>
             </a:fld>
             <a:endParaRPr/>
           </a:p>
@@ -4062,11 +4141,11 @@
 </file>
 
 <file path=ppt/slideLayouts/slideLayout5.xml><?xml version="1.0" encoding="utf-8"?>
-<p:sldLayout xmlns:a="http://schemas.openxmlformats.org/drawingml/2006/main" xmlns:r="http://schemas.openxmlformats.org/officeDocument/2006/relationships" xmlns:mc="http://schemas.openxmlformats.org/markup-compatibility/2006" xmlns:mv="urn:schemas-microsoft-com:mac:vml" xmlns:p="http://schemas.openxmlformats.org/presentationml/2006/main" xmlns:c="http://schemas.openxmlformats.org/drawingml/2006/chart" xmlns:dgm="http://schemas.openxmlformats.org/drawingml/2006/diagram" xmlns:o="urn:schemas-microsoft-com:office:office" xmlns:v="urn:schemas-microsoft-com:vml" xmlns:pvml="urn:schemas-microsoft-com:office:powerpoint" xmlns:com="http://schemas.openxmlformats.org/drawingml/2006/compatibility" xmlns:p14="http://schemas.microsoft.com/office/powerpoint/2010/main" xmlns:p15="http://schemas.microsoft.com/office/powerpoint/2012/main" xmlns:ahyp="http://schemas.microsoft.com/office/drawing/2018/hyperlinkcolor" matchingName="Blank" type="blank">
+<p:sldLayout xmlns:a="http://schemas.openxmlformats.org/drawingml/2006/main" xmlns:r="http://schemas.openxmlformats.org/officeDocument/2006/relationships" xmlns:p="http://schemas.openxmlformats.org/presentationml/2006/main" matchingName="Blank" type="blank">
   <p:cSld name="BLANK">
     <p:spTree>
       <p:nvGrpSpPr>
-        <p:cNvPr id="33" name="Shape 33"/>
+        <p:cNvPr id="1" name="Shape 33"/>
         <p:cNvGrpSpPr/>
         <p:nvPr/>
       </p:nvGrpSpPr>
@@ -4081,9 +4160,11 @@
       <p:sp>
         <p:nvSpPr>
           <p:cNvPr id="34" name="Google Shape;34;p6"/>
-          <p:cNvSpPr txBox="1"/>
+          <p:cNvSpPr txBox="1">
+            <a:spLocks noGrp="1"/>
+          </p:cNvSpPr>
           <p:nvPr>
-            <p:ph idx="12" type="sldNum"/>
+            <p:ph type="sldNum" idx="12"/>
           </p:nvPr>
         </p:nvSpPr>
         <p:spPr>
@@ -4100,11 +4181,11 @@
           </a:ln>
         </p:spPr>
         <p:txBody>
-          <a:bodyPr anchorCtr="0" anchor="t" bIns="91425" lIns="91425" spcFirstLastPara="1" rIns="91425" wrap="square" tIns="91425">
+          <a:bodyPr spcFirstLastPara="1" wrap="square" lIns="91425" tIns="91425" rIns="91425" bIns="91425" anchor="t" anchorCtr="0">
             <a:noAutofit/>
           </a:bodyPr>
           <a:lstStyle>
-            <a:lvl1pPr indent="0" lvl="0" marL="0" marR="0" algn="r">
+            <a:lvl1pPr marL="0" marR="0" lvl="0" indent="0" algn="r">
               <a:lnSpc>
                 <a:spcPct val="100000"/>
               </a:lnSpc>
@@ -4120,7 +4201,7 @@
               <a:buSzPts val="1400"/>
               <a:buFont typeface="Arial"/>
               <a:buNone/>
-              <a:defRPr b="1" i="0" sz="1400" u="none" cap="none" strike="noStrike">
+              <a:defRPr sz="1400" b="1" i="0" u="none" strike="noStrike" cap="none">
                 <a:solidFill>
                   <a:schemeClr val="dk1"/>
                 </a:solidFill>
@@ -4130,7 +4211,7 @@
                 <a:sym typeface="Calibri"/>
               </a:defRPr>
             </a:lvl1pPr>
-            <a:lvl2pPr indent="0" lvl="1" marL="0" marR="0" algn="r">
+            <a:lvl2pPr marL="0" marR="0" lvl="1" indent="0" algn="r">
               <a:lnSpc>
                 <a:spcPct val="100000"/>
               </a:lnSpc>
@@ -4146,7 +4227,7 @@
               <a:buSzPts val="1400"/>
               <a:buFont typeface="Arial"/>
               <a:buNone/>
-              <a:defRPr b="1" i="0" sz="1400" u="none" cap="none" strike="noStrike">
+              <a:defRPr sz="1400" b="1" i="0" u="none" strike="noStrike" cap="none">
                 <a:solidFill>
                   <a:schemeClr val="dk1"/>
                 </a:solidFill>
@@ -4156,7 +4237,7 @@
                 <a:sym typeface="Calibri"/>
               </a:defRPr>
             </a:lvl2pPr>
-            <a:lvl3pPr indent="0" lvl="2" marL="0" marR="0" algn="r">
+            <a:lvl3pPr marL="0" marR="0" lvl="2" indent="0" algn="r">
               <a:lnSpc>
                 <a:spcPct val="100000"/>
               </a:lnSpc>
@@ -4172,7 +4253,7 @@
               <a:buSzPts val="1400"/>
               <a:buFont typeface="Arial"/>
               <a:buNone/>
-              <a:defRPr b="1" i="0" sz="1400" u="none" cap="none" strike="noStrike">
+              <a:defRPr sz="1400" b="1" i="0" u="none" strike="noStrike" cap="none">
                 <a:solidFill>
                   <a:schemeClr val="dk1"/>
                 </a:solidFill>
@@ -4182,7 +4263,7 @@
                 <a:sym typeface="Calibri"/>
               </a:defRPr>
             </a:lvl3pPr>
-            <a:lvl4pPr indent="0" lvl="3" marL="0" marR="0" algn="r">
+            <a:lvl4pPr marL="0" marR="0" lvl="3" indent="0" algn="r">
               <a:lnSpc>
                 <a:spcPct val="100000"/>
               </a:lnSpc>
@@ -4198,7 +4279,7 @@
               <a:buSzPts val="1400"/>
               <a:buFont typeface="Arial"/>
               <a:buNone/>
-              <a:defRPr b="1" i="0" sz="1400" u="none" cap="none" strike="noStrike">
+              <a:defRPr sz="1400" b="1" i="0" u="none" strike="noStrike" cap="none">
                 <a:solidFill>
                   <a:schemeClr val="dk1"/>
                 </a:solidFill>
@@ -4208,7 +4289,7 @@
                 <a:sym typeface="Calibri"/>
               </a:defRPr>
             </a:lvl4pPr>
-            <a:lvl5pPr indent="0" lvl="4" marL="0" marR="0" algn="r">
+            <a:lvl5pPr marL="0" marR="0" lvl="4" indent="0" algn="r">
               <a:lnSpc>
                 <a:spcPct val="100000"/>
               </a:lnSpc>
@@ -4224,7 +4305,7 @@
               <a:buSzPts val="1400"/>
               <a:buFont typeface="Arial"/>
               <a:buNone/>
-              <a:defRPr b="1" i="0" sz="1400" u="none" cap="none" strike="noStrike">
+              <a:defRPr sz="1400" b="1" i="0" u="none" strike="noStrike" cap="none">
                 <a:solidFill>
                   <a:schemeClr val="dk1"/>
                 </a:solidFill>
@@ -4234,7 +4315,7 @@
                 <a:sym typeface="Calibri"/>
               </a:defRPr>
             </a:lvl5pPr>
-            <a:lvl6pPr indent="0" lvl="5" marL="0" marR="0" algn="r">
+            <a:lvl6pPr marL="0" marR="0" lvl="5" indent="0" algn="r">
               <a:lnSpc>
                 <a:spcPct val="100000"/>
               </a:lnSpc>
@@ -4250,7 +4331,7 @@
               <a:buSzPts val="1400"/>
               <a:buFont typeface="Arial"/>
               <a:buNone/>
-              <a:defRPr b="1" i="0" sz="1400" u="none" cap="none" strike="noStrike">
+              <a:defRPr sz="1400" b="1" i="0" u="none" strike="noStrike" cap="none">
                 <a:solidFill>
                   <a:schemeClr val="dk1"/>
                 </a:solidFill>
@@ -4260,7 +4341,7 @@
                 <a:sym typeface="Calibri"/>
               </a:defRPr>
             </a:lvl6pPr>
-            <a:lvl7pPr indent="0" lvl="6" marL="0" marR="0" algn="r">
+            <a:lvl7pPr marL="0" marR="0" lvl="6" indent="0" algn="r">
               <a:lnSpc>
                 <a:spcPct val="100000"/>
               </a:lnSpc>
@@ -4276,7 +4357,7 @@
               <a:buSzPts val="1400"/>
               <a:buFont typeface="Arial"/>
               <a:buNone/>
-              <a:defRPr b="1" i="0" sz="1400" u="none" cap="none" strike="noStrike">
+              <a:defRPr sz="1400" b="1" i="0" u="none" strike="noStrike" cap="none">
                 <a:solidFill>
                   <a:schemeClr val="dk1"/>
                 </a:solidFill>
@@ -4286,7 +4367,7 @@
                 <a:sym typeface="Calibri"/>
               </a:defRPr>
             </a:lvl7pPr>
-            <a:lvl8pPr indent="0" lvl="7" marL="0" marR="0" algn="r">
+            <a:lvl8pPr marL="0" marR="0" lvl="7" indent="0" algn="r">
               <a:lnSpc>
                 <a:spcPct val="100000"/>
               </a:lnSpc>
@@ -4302,7 +4383,7 @@
               <a:buSzPts val="1400"/>
               <a:buFont typeface="Arial"/>
               <a:buNone/>
-              <a:defRPr b="1" i="0" sz="1400" u="none" cap="none" strike="noStrike">
+              <a:defRPr sz="1400" b="1" i="0" u="none" strike="noStrike" cap="none">
                 <a:solidFill>
                   <a:schemeClr val="dk1"/>
                 </a:solidFill>
@@ -4312,7 +4393,7 @@
                 <a:sym typeface="Calibri"/>
               </a:defRPr>
             </a:lvl8pPr>
-            <a:lvl9pPr indent="0" lvl="8" marL="0" marR="0" algn="r">
+            <a:lvl9pPr marL="0" marR="0" lvl="8" indent="0" algn="r">
               <a:lnSpc>
                 <a:spcPct val="100000"/>
               </a:lnSpc>
@@ -4328,7 +4409,7 @@
               <a:buSzPts val="1400"/>
               <a:buFont typeface="Arial"/>
               <a:buNone/>
-              <a:defRPr b="1" i="0" sz="1400" u="none" cap="none" strike="noStrike">
+              <a:defRPr sz="1400" b="1" i="0" u="none" strike="noStrike" cap="none">
                 <a:solidFill>
                   <a:schemeClr val="dk1"/>
                 </a:solidFill>
@@ -4340,7 +4421,7 @@
             </a:lvl9pPr>
           </a:lstStyle>
           <a:p>
-            <a:pPr indent="0" lvl="0" marL="0" rtl="0" algn="r">
+            <a:pPr marL="0" lvl="0" indent="0" algn="r" rtl="0">
               <a:spcBef>
                 <a:spcPts val="0"/>
               </a:spcBef>
@@ -4351,7 +4432,7 @@
             </a:pPr>
             <a:fld id="{00000000-1234-1234-1234-123412341234}" type="slidenum">
               <a:rPr lang="en-US"/>
-              <a:t>‹#›</a:t>
+              <a:t>‹N›</a:t>
             </a:fld>
             <a:endParaRPr/>
           </a:p>
@@ -4366,18 +4447,19 @@
 </file>
 
 <file path=ppt/slideMasters/slideMaster1.xml><?xml version="1.0" encoding="utf-8"?>
-<p:sldMaster xmlns:a="http://schemas.openxmlformats.org/drawingml/2006/main" xmlns:r="http://schemas.openxmlformats.org/officeDocument/2006/relationships" xmlns:mc="http://schemas.openxmlformats.org/markup-compatibility/2006" xmlns:mv="urn:schemas-microsoft-com:mac:vml" xmlns:p="http://schemas.openxmlformats.org/presentationml/2006/main" xmlns:c="http://schemas.openxmlformats.org/drawingml/2006/chart" xmlns:dgm="http://schemas.openxmlformats.org/drawingml/2006/diagram" xmlns:o="urn:schemas-microsoft-com:office:office" xmlns:v="urn:schemas-microsoft-com:vml" xmlns:pvml="urn:schemas-microsoft-com:office:powerpoint" xmlns:com="http://schemas.openxmlformats.org/drawingml/2006/compatibility" xmlns:p14="http://schemas.microsoft.com/office/powerpoint/2010/main" xmlns:p15="http://schemas.microsoft.com/office/powerpoint/2012/main" xmlns:ahyp="http://schemas.microsoft.com/office/drawing/2018/hyperlinkcolor">
+<p:sldMaster xmlns:a="http://schemas.openxmlformats.org/drawingml/2006/main" xmlns:r="http://schemas.openxmlformats.org/officeDocument/2006/relationships" xmlns:p="http://schemas.openxmlformats.org/presentationml/2006/main">
   <p:cSld name="simple-light-2">
     <p:bg>
       <p:bgPr>
         <a:solidFill>
           <a:schemeClr val="lt1"/>
         </a:solidFill>
+        <a:effectLst/>
       </p:bgPr>
     </p:bg>
     <p:spTree>
       <p:nvGrpSpPr>
-        <p:cNvPr id="5" name="Shape 5"/>
+        <p:cNvPr id="1" name="Shape 5"/>
         <p:cNvGrpSpPr/>
         <p:nvPr/>
       </p:nvGrpSpPr>
@@ -4392,7 +4474,9 @@
       <p:sp>
         <p:nvSpPr>
           <p:cNvPr id="6" name="Google Shape;6;p1"/>
-          <p:cNvSpPr txBox="1"/>
+          <p:cNvSpPr txBox="1">
+            <a:spLocks noGrp="1"/>
+          </p:cNvSpPr>
           <p:nvPr>
             <p:ph type="title"/>
           </p:nvPr>
@@ -4411,11 +4495,11 @@
           </a:ln>
         </p:spPr>
         <p:txBody>
-          <a:bodyPr anchorCtr="0" anchor="ctr" bIns="91425" lIns="91425" spcFirstLastPara="1" rIns="91425" wrap="square" tIns="91425">
+          <a:bodyPr spcFirstLastPara="1" wrap="square" lIns="91425" tIns="91425" rIns="91425" bIns="91425" anchor="ctr" anchorCtr="0">
             <a:normAutofit/>
           </a:bodyPr>
           <a:lstStyle>
-            <a:lvl1pPr lvl="0" marR="0" rtl="0" algn="l">
+            <a:lvl1pPr marR="0" lvl="0" algn="l" rtl="0">
               <a:lnSpc>
                 <a:spcPct val="100000"/>
               </a:lnSpc>
@@ -4431,7 +4515,7 @@
               <a:buSzPts val="2800"/>
               <a:buFont typeface="Calibri"/>
               <a:buNone/>
-              <a:defRPr b="1" i="0" sz="2800" u="none" cap="none" strike="noStrike">
+              <a:defRPr sz="2800" b="1" i="0" u="none" strike="noStrike" cap="none">
                 <a:solidFill>
                   <a:schemeClr val="dk1"/>
                 </a:solidFill>
@@ -4441,7 +4525,7 @@
                 <a:sym typeface="Calibri"/>
               </a:defRPr>
             </a:lvl1pPr>
-            <a:lvl2pPr lvl="1" marR="0" rtl="0" algn="l">
+            <a:lvl2pPr marR="0" lvl="1" algn="l" rtl="0">
               <a:lnSpc>
                 <a:spcPct val="100000"/>
               </a:lnSpc>
@@ -4457,7 +4541,7 @@
               <a:buSzPts val="2800"/>
               <a:buFont typeface="Calibri"/>
               <a:buNone/>
-              <a:defRPr b="1" i="0" sz="2800" u="none" cap="none" strike="noStrike">
+              <a:defRPr sz="2800" b="1" i="0" u="none" strike="noStrike" cap="none">
                 <a:solidFill>
                   <a:schemeClr val="dk1"/>
                 </a:solidFill>
@@ -4467,7 +4551,7 @@
                 <a:sym typeface="Calibri"/>
               </a:defRPr>
             </a:lvl2pPr>
-            <a:lvl3pPr lvl="2" marR="0" rtl="0" algn="l">
+            <a:lvl3pPr marR="0" lvl="2" algn="l" rtl="0">
               <a:lnSpc>
                 <a:spcPct val="100000"/>
               </a:lnSpc>
@@ -4483,7 +4567,7 @@
               <a:buSzPts val="2800"/>
               <a:buFont typeface="Calibri"/>
               <a:buNone/>
-              <a:defRPr b="1" i="0" sz="2800" u="none" cap="none" strike="noStrike">
+              <a:defRPr sz="2800" b="1" i="0" u="none" strike="noStrike" cap="none">
                 <a:solidFill>
                   <a:schemeClr val="dk1"/>
                 </a:solidFill>
@@ -4493,7 +4577,7 @@
                 <a:sym typeface="Calibri"/>
               </a:defRPr>
             </a:lvl3pPr>
-            <a:lvl4pPr lvl="3" marR="0" rtl="0" algn="l">
+            <a:lvl4pPr marR="0" lvl="3" algn="l" rtl="0">
               <a:lnSpc>
                 <a:spcPct val="100000"/>
               </a:lnSpc>
@@ -4509,7 +4593,7 @@
               <a:buSzPts val="2800"/>
               <a:buFont typeface="Calibri"/>
               <a:buNone/>
-              <a:defRPr b="1" i="0" sz="2800" u="none" cap="none" strike="noStrike">
+              <a:defRPr sz="2800" b="1" i="0" u="none" strike="noStrike" cap="none">
                 <a:solidFill>
                   <a:schemeClr val="dk1"/>
                 </a:solidFill>
@@ -4519,7 +4603,7 @@
                 <a:sym typeface="Calibri"/>
               </a:defRPr>
             </a:lvl4pPr>
-            <a:lvl5pPr lvl="4" marR="0" rtl="0" algn="l">
+            <a:lvl5pPr marR="0" lvl="4" algn="l" rtl="0">
               <a:lnSpc>
                 <a:spcPct val="100000"/>
               </a:lnSpc>
@@ -4535,7 +4619,7 @@
               <a:buSzPts val="2800"/>
               <a:buFont typeface="Calibri"/>
               <a:buNone/>
-              <a:defRPr b="1" i="0" sz="2800" u="none" cap="none" strike="noStrike">
+              <a:defRPr sz="2800" b="1" i="0" u="none" strike="noStrike" cap="none">
                 <a:solidFill>
                   <a:schemeClr val="dk1"/>
                 </a:solidFill>
@@ -4545,7 +4629,7 @@
                 <a:sym typeface="Calibri"/>
               </a:defRPr>
             </a:lvl5pPr>
-            <a:lvl6pPr lvl="5" marR="0" rtl="0" algn="l">
+            <a:lvl6pPr marR="0" lvl="5" algn="l" rtl="0">
               <a:lnSpc>
                 <a:spcPct val="100000"/>
               </a:lnSpc>
@@ -4561,7 +4645,7 @@
               <a:buSzPts val="2800"/>
               <a:buFont typeface="Calibri"/>
               <a:buNone/>
-              <a:defRPr b="1" i="0" sz="2800" u="none" cap="none" strike="noStrike">
+              <a:defRPr sz="2800" b="1" i="0" u="none" strike="noStrike" cap="none">
                 <a:solidFill>
                   <a:schemeClr val="dk1"/>
                 </a:solidFill>
@@ -4571,7 +4655,7 @@
                 <a:sym typeface="Calibri"/>
               </a:defRPr>
             </a:lvl6pPr>
-            <a:lvl7pPr lvl="6" marR="0" rtl="0" algn="l">
+            <a:lvl7pPr marR="0" lvl="6" algn="l" rtl="0">
               <a:lnSpc>
                 <a:spcPct val="100000"/>
               </a:lnSpc>
@@ -4587,7 +4671,7 @@
               <a:buSzPts val="2800"/>
               <a:buFont typeface="Calibri"/>
               <a:buNone/>
-              <a:defRPr b="1" i="0" sz="2800" u="none" cap="none" strike="noStrike">
+              <a:defRPr sz="2800" b="1" i="0" u="none" strike="noStrike" cap="none">
                 <a:solidFill>
                   <a:schemeClr val="dk1"/>
                 </a:solidFill>
@@ -4597,7 +4681,7 @@
                 <a:sym typeface="Calibri"/>
               </a:defRPr>
             </a:lvl7pPr>
-            <a:lvl8pPr lvl="7" marR="0" rtl="0" algn="l">
+            <a:lvl8pPr marR="0" lvl="7" algn="l" rtl="0">
               <a:lnSpc>
                 <a:spcPct val="100000"/>
               </a:lnSpc>
@@ -4613,7 +4697,7 @@
               <a:buSzPts val="2800"/>
               <a:buFont typeface="Calibri"/>
               <a:buNone/>
-              <a:defRPr b="1" i="0" sz="2800" u="none" cap="none" strike="noStrike">
+              <a:defRPr sz="2800" b="1" i="0" u="none" strike="noStrike" cap="none">
                 <a:solidFill>
                   <a:schemeClr val="dk1"/>
                 </a:solidFill>
@@ -4623,7 +4707,7 @@
                 <a:sym typeface="Calibri"/>
               </a:defRPr>
             </a:lvl8pPr>
-            <a:lvl9pPr lvl="8" marR="0" rtl="0" algn="l">
+            <a:lvl9pPr marR="0" lvl="8" algn="l" rtl="0">
               <a:lnSpc>
                 <a:spcPct val="100000"/>
               </a:lnSpc>
@@ -4639,7 +4723,7 @@
               <a:buSzPts val="2800"/>
               <a:buFont typeface="Calibri"/>
               <a:buNone/>
-              <a:defRPr b="1" i="0" sz="2800" u="none" cap="none" strike="noStrike">
+              <a:defRPr sz="2800" b="1" i="0" u="none" strike="noStrike" cap="none">
                 <a:solidFill>
                   <a:schemeClr val="dk1"/>
                 </a:solidFill>
@@ -4650,15 +4734,19 @@
               </a:defRPr>
             </a:lvl9pPr>
           </a:lstStyle>
-          <a:p/>
+          <a:p>
+            <a:endParaRPr/>
+          </a:p>
         </p:txBody>
       </p:sp>
       <p:sp>
         <p:nvSpPr>
           <p:cNvPr id="7" name="Google Shape;7;p1"/>
-          <p:cNvSpPr txBox="1"/>
+          <p:cNvSpPr txBox="1">
+            <a:spLocks noGrp="1"/>
+          </p:cNvSpPr>
           <p:nvPr>
-            <p:ph idx="1" type="body"/>
+            <p:ph type="body" idx="1"/>
           </p:nvPr>
         </p:nvSpPr>
         <p:spPr>
@@ -4675,11 +4763,11 @@
           </a:ln>
         </p:spPr>
         <p:txBody>
-          <a:bodyPr anchorCtr="0" anchor="t" bIns="91425" lIns="91425" spcFirstLastPara="1" rIns="91425" wrap="square" tIns="91425">
+          <a:bodyPr spcFirstLastPara="1" wrap="square" lIns="91425" tIns="91425" rIns="91425" bIns="91425" anchor="t" anchorCtr="0">
             <a:normAutofit/>
           </a:bodyPr>
           <a:lstStyle>
-            <a:lvl1pPr indent="-342900" lvl="0" marL="457200" marR="0" rtl="0" algn="l">
+            <a:lvl1pPr marL="457200" marR="0" lvl="0" indent="-342900" algn="l" rtl="0">
               <a:lnSpc>
                 <a:spcPct val="115000"/>
               </a:lnSpc>
@@ -4695,7 +4783,7 @@
               <a:buSzPts val="1800"/>
               <a:buFont typeface="Calibri"/>
               <a:buChar char="●"/>
-              <a:defRPr i="0" sz="1800" u="none" cap="none" strike="noStrike">
+              <a:defRPr sz="1800" i="0" u="none" strike="noStrike" cap="none">
                 <a:solidFill>
                   <a:schemeClr val="dk2"/>
                 </a:solidFill>
@@ -4705,7 +4793,7 @@
                 <a:sym typeface="Calibri"/>
               </a:defRPr>
             </a:lvl1pPr>
-            <a:lvl2pPr indent="-317500" lvl="1" marL="914400" marR="0" rtl="0" algn="l">
+            <a:lvl2pPr marL="914400" marR="0" lvl="1" indent="-317500" algn="l" rtl="0">
               <a:lnSpc>
                 <a:spcPct val="115000"/>
               </a:lnSpc>
@@ -4721,7 +4809,7 @@
               <a:buSzPts val="1400"/>
               <a:buFont typeface="Calibri"/>
               <a:buChar char="○"/>
-              <a:defRPr i="0" sz="1400" u="none" cap="none" strike="noStrike">
+              <a:defRPr sz="1400" i="0" u="none" strike="noStrike" cap="none">
                 <a:solidFill>
                   <a:schemeClr val="dk2"/>
                 </a:solidFill>
@@ -4731,7 +4819,7 @@
                 <a:sym typeface="Calibri"/>
               </a:defRPr>
             </a:lvl2pPr>
-            <a:lvl3pPr indent="-317500" lvl="2" marL="1371600" marR="0" rtl="0" algn="l">
+            <a:lvl3pPr marL="1371600" marR="0" lvl="2" indent="-317500" algn="l" rtl="0">
               <a:lnSpc>
                 <a:spcPct val="115000"/>
               </a:lnSpc>
@@ -4747,7 +4835,7 @@
               <a:buSzPts val="1400"/>
               <a:buFont typeface="Calibri"/>
               <a:buChar char="■"/>
-              <a:defRPr i="0" sz="1400" u="none" cap="none" strike="noStrike">
+              <a:defRPr sz="1400" i="0" u="none" strike="noStrike" cap="none">
                 <a:solidFill>
                   <a:schemeClr val="dk2"/>
                 </a:solidFill>
@@ -4757,7 +4845,7 @@
                 <a:sym typeface="Calibri"/>
               </a:defRPr>
             </a:lvl3pPr>
-            <a:lvl4pPr indent="-317500" lvl="3" marL="1828800" marR="0" rtl="0" algn="l">
+            <a:lvl4pPr marL="1828800" marR="0" lvl="3" indent="-317500" algn="l" rtl="0">
               <a:lnSpc>
                 <a:spcPct val="115000"/>
               </a:lnSpc>
@@ -4773,7 +4861,7 @@
               <a:buSzPts val="1400"/>
               <a:buFont typeface="Calibri"/>
               <a:buChar char="●"/>
-              <a:defRPr i="0" sz="1400" u="none" cap="none" strike="noStrike">
+              <a:defRPr sz="1400" i="0" u="none" strike="noStrike" cap="none">
                 <a:solidFill>
                   <a:schemeClr val="dk2"/>
                 </a:solidFill>
@@ -4783,7 +4871,7 @@
                 <a:sym typeface="Calibri"/>
               </a:defRPr>
             </a:lvl4pPr>
-            <a:lvl5pPr indent="-317500" lvl="4" marL="2286000" marR="0" rtl="0" algn="l">
+            <a:lvl5pPr marL="2286000" marR="0" lvl="4" indent="-317500" algn="l" rtl="0">
               <a:lnSpc>
                 <a:spcPct val="115000"/>
               </a:lnSpc>
@@ -4799,7 +4887,7 @@
               <a:buSzPts val="1400"/>
               <a:buFont typeface="Calibri"/>
               <a:buChar char="○"/>
-              <a:defRPr i="0" sz="1400" u="none" cap="none" strike="noStrike">
+              <a:defRPr sz="1400" i="0" u="none" strike="noStrike" cap="none">
                 <a:solidFill>
                   <a:schemeClr val="dk2"/>
                 </a:solidFill>
@@ -4809,7 +4897,7 @@
                 <a:sym typeface="Calibri"/>
               </a:defRPr>
             </a:lvl5pPr>
-            <a:lvl6pPr indent="-317500" lvl="5" marL="2743200" marR="0" rtl="0" algn="l">
+            <a:lvl6pPr marL="2743200" marR="0" lvl="5" indent="-317500" algn="l" rtl="0">
               <a:lnSpc>
                 <a:spcPct val="115000"/>
               </a:lnSpc>
@@ -4825,7 +4913,7 @@
               <a:buSzPts val="1400"/>
               <a:buFont typeface="Calibri"/>
               <a:buChar char="■"/>
-              <a:defRPr i="0" sz="1400" u="none" cap="none" strike="noStrike">
+              <a:defRPr sz="1400" i="0" u="none" strike="noStrike" cap="none">
                 <a:solidFill>
                   <a:schemeClr val="dk2"/>
                 </a:solidFill>
@@ -4835,7 +4923,7 @@
                 <a:sym typeface="Calibri"/>
               </a:defRPr>
             </a:lvl6pPr>
-            <a:lvl7pPr indent="-317500" lvl="6" marL="3200400" marR="0" rtl="0" algn="l">
+            <a:lvl7pPr marL="3200400" marR="0" lvl="6" indent="-317500" algn="l" rtl="0">
               <a:lnSpc>
                 <a:spcPct val="115000"/>
               </a:lnSpc>
@@ -4851,7 +4939,7 @@
               <a:buSzPts val="1400"/>
               <a:buFont typeface="Calibri"/>
               <a:buChar char="●"/>
-              <a:defRPr i="0" sz="1400" u="none" cap="none" strike="noStrike">
+              <a:defRPr sz="1400" i="0" u="none" strike="noStrike" cap="none">
                 <a:solidFill>
                   <a:schemeClr val="dk2"/>
                 </a:solidFill>
@@ -4861,7 +4949,7 @@
                 <a:sym typeface="Calibri"/>
               </a:defRPr>
             </a:lvl7pPr>
-            <a:lvl8pPr indent="-317500" lvl="7" marL="3657600" marR="0" rtl="0" algn="l">
+            <a:lvl8pPr marL="3657600" marR="0" lvl="7" indent="-317500" algn="l" rtl="0">
               <a:lnSpc>
                 <a:spcPct val="115000"/>
               </a:lnSpc>
@@ -4877,7 +4965,7 @@
               <a:buSzPts val="1400"/>
               <a:buFont typeface="Calibri"/>
               <a:buChar char="○"/>
-              <a:defRPr i="0" sz="1400" u="none" cap="none" strike="noStrike">
+              <a:defRPr sz="1400" i="0" u="none" strike="noStrike" cap="none">
                 <a:solidFill>
                   <a:schemeClr val="dk2"/>
                 </a:solidFill>
@@ -4887,7 +4975,7 @@
                 <a:sym typeface="Calibri"/>
               </a:defRPr>
             </a:lvl8pPr>
-            <a:lvl9pPr indent="-317500" lvl="8" marL="4114800" marR="0" rtl="0" algn="l">
+            <a:lvl9pPr marL="4114800" marR="0" lvl="8" indent="-317500" algn="l" rtl="0">
               <a:lnSpc>
                 <a:spcPct val="115000"/>
               </a:lnSpc>
@@ -4903,7 +4991,7 @@
               <a:buSzPts val="1400"/>
               <a:buFont typeface="Calibri"/>
               <a:buChar char="■"/>
-              <a:defRPr i="0" sz="1400" u="none" cap="none" strike="noStrike">
+              <a:defRPr sz="1400" i="0" u="none" strike="noStrike" cap="none">
                 <a:solidFill>
                   <a:schemeClr val="dk2"/>
                 </a:solidFill>
@@ -4914,20 +5002,22 @@
               </a:defRPr>
             </a:lvl9pPr>
           </a:lstStyle>
-          <a:p/>
+          <a:p>
+            <a:endParaRPr/>
+          </a:p>
         </p:txBody>
       </p:sp>
       <p:pic>
         <p:nvPicPr>
-          <p:cNvPr descr="A black background with a black square&#10;&#10;Description automatically generated with medium confidence" id="8" name="Google Shape;8;p1"/>
+          <p:cNvPr id="8" name="Google Shape;8;p1" descr="A black background with a black square&#10;&#10;Description automatically generated with medium confidence"/>
           <p:cNvPicPr preferRelativeResize="0"/>
           <p:nvPr/>
         </p:nvPicPr>
         <p:blipFill rotWithShape="1">
-          <a:blip r:embed="rId1">
+          <a:blip r:embed="rId7">
             <a:alphaModFix/>
           </a:blip>
-          <a:srcRect b="0" l="0" r="0" t="0"/>
+          <a:srcRect/>
           <a:stretch/>
         </p:blipFill>
         <p:spPr>
@@ -4946,18 +5036,18 @@
       </p:pic>
     </p:spTree>
   </p:cSld>
-  <p:clrMap accent1="accent1" accent2="accent2" accent3="accent3" accent4="accent4" accent5="accent5" accent6="accent6" bg1="lt1" bg2="dk2" tx1="dk1" tx2="lt2" folHlink="folHlink" hlink="hlink"/>
+  <p:clrMap bg1="lt1" tx1="dk1" bg2="dk2" tx2="lt2" accent1="accent1" accent2="accent2" accent3="accent3" accent4="accent4" accent5="accent5" accent6="accent6" hlink="hlink" folHlink="folHlink"/>
   <p:sldLayoutIdLst>
-    <p:sldLayoutId id="2147483648" r:id="rId2"/>
-    <p:sldLayoutId id="2147483649" r:id="rId3"/>
-    <p:sldLayoutId id="2147483650" r:id="rId4"/>
-    <p:sldLayoutId id="2147483651" r:id="rId5"/>
-    <p:sldLayoutId id="2147483652" r:id="rId6"/>
+    <p:sldLayoutId id="2147483648" r:id="rId1"/>
+    <p:sldLayoutId id="2147483649" r:id="rId2"/>
+    <p:sldLayoutId id="2147483650" r:id="rId3"/>
+    <p:sldLayoutId id="2147483651" r:id="rId4"/>
+    <p:sldLayoutId id="2147483652" r:id="rId5"/>
   </p:sldLayoutIdLst>
-  <p:hf dt="0" ftr="0" hdr="0" sldNum="0"/>
+  <p:hf sldNum="0" hdr="0" ftr="0" dt="0"/>
   <p:txStyles>
     <p:titleStyle>
-      <a:defPPr lvl="0" marR="0" rtl="0" algn="l">
+      <a:defPPr marR="0" lvl="0" algn="l" rtl="0">
         <a:lnSpc>
           <a:spcPct val="100000"/>
         </a:lnSpc>
@@ -4968,7 +5058,7 @@
           <a:spcPts val="0"/>
         </a:spcAft>
       </a:defPPr>
-      <a:lvl1pPr lvl="0" marR="0" rtl="0" algn="l">
+      <a:lvl1pPr marR="0" lvl="0" algn="l" rtl="0">
         <a:lnSpc>
           <a:spcPct val="100000"/>
         </a:lnSpc>
@@ -4982,7 +5072,7 @@
           <a:srgbClr val="000000"/>
         </a:buClr>
         <a:buFont typeface="Arial"/>
-        <a:defRPr b="0" i="0" sz="1400" u="none" cap="none" strike="noStrike">
+        <a:defRPr sz="1400" b="0" i="0" u="none" strike="noStrike" cap="none">
           <a:solidFill>
             <a:srgbClr val="000000"/>
           </a:solidFill>
@@ -4992,7 +5082,7 @@
           <a:sym typeface="Arial"/>
         </a:defRPr>
       </a:lvl1pPr>
-      <a:lvl2pPr lvl="1" marR="0" rtl="0" algn="l">
+      <a:lvl2pPr marR="0" lvl="1" algn="l" rtl="0">
         <a:lnSpc>
           <a:spcPct val="100000"/>
         </a:lnSpc>
@@ -5006,7 +5096,7 @@
           <a:srgbClr val="000000"/>
         </a:buClr>
         <a:buFont typeface="Arial"/>
-        <a:defRPr b="0" i="0" sz="1400" u="none" cap="none" strike="noStrike">
+        <a:defRPr sz="1400" b="0" i="0" u="none" strike="noStrike" cap="none">
           <a:solidFill>
             <a:srgbClr val="000000"/>
           </a:solidFill>
@@ -5016,7 +5106,7 @@
           <a:sym typeface="Arial"/>
         </a:defRPr>
       </a:lvl2pPr>
-      <a:lvl3pPr lvl="2" marR="0" rtl="0" algn="l">
+      <a:lvl3pPr marR="0" lvl="2" algn="l" rtl="0">
         <a:lnSpc>
           <a:spcPct val="100000"/>
         </a:lnSpc>
@@ -5030,7 +5120,7 @@
           <a:srgbClr val="000000"/>
         </a:buClr>
         <a:buFont typeface="Arial"/>
-        <a:defRPr b="0" i="0" sz="1400" u="none" cap="none" strike="noStrike">
+        <a:defRPr sz="1400" b="0" i="0" u="none" strike="noStrike" cap="none">
           <a:solidFill>
             <a:srgbClr val="000000"/>
           </a:solidFill>
@@ -5040,7 +5130,7 @@
           <a:sym typeface="Arial"/>
         </a:defRPr>
       </a:lvl3pPr>
-      <a:lvl4pPr lvl="3" marR="0" rtl="0" algn="l">
+      <a:lvl4pPr marR="0" lvl="3" algn="l" rtl="0">
         <a:lnSpc>
           <a:spcPct val="100000"/>
         </a:lnSpc>
@@ -5054,7 +5144,7 @@
           <a:srgbClr val="000000"/>
         </a:buClr>
         <a:buFont typeface="Arial"/>
-        <a:defRPr b="0" i="0" sz="1400" u="none" cap="none" strike="noStrike">
+        <a:defRPr sz="1400" b="0" i="0" u="none" strike="noStrike" cap="none">
           <a:solidFill>
             <a:srgbClr val="000000"/>
           </a:solidFill>
@@ -5064,7 +5154,7 @@
           <a:sym typeface="Arial"/>
         </a:defRPr>
       </a:lvl4pPr>
-      <a:lvl5pPr lvl="4" marR="0" rtl="0" algn="l">
+      <a:lvl5pPr marR="0" lvl="4" algn="l" rtl="0">
         <a:lnSpc>
           <a:spcPct val="100000"/>
         </a:lnSpc>
@@ -5078,7 +5168,7 @@
           <a:srgbClr val="000000"/>
         </a:buClr>
         <a:buFont typeface="Arial"/>
-        <a:defRPr b="0" i="0" sz="1400" u="none" cap="none" strike="noStrike">
+        <a:defRPr sz="1400" b="0" i="0" u="none" strike="noStrike" cap="none">
           <a:solidFill>
             <a:srgbClr val="000000"/>
           </a:solidFill>
@@ -5088,7 +5178,7 @@
           <a:sym typeface="Arial"/>
         </a:defRPr>
       </a:lvl5pPr>
-      <a:lvl6pPr lvl="5" marR="0" rtl="0" algn="l">
+      <a:lvl6pPr marR="0" lvl="5" algn="l" rtl="0">
         <a:lnSpc>
           <a:spcPct val="100000"/>
         </a:lnSpc>
@@ -5102,7 +5192,7 @@
           <a:srgbClr val="000000"/>
         </a:buClr>
         <a:buFont typeface="Arial"/>
-        <a:defRPr b="0" i="0" sz="1400" u="none" cap="none" strike="noStrike">
+        <a:defRPr sz="1400" b="0" i="0" u="none" strike="noStrike" cap="none">
           <a:solidFill>
             <a:srgbClr val="000000"/>
           </a:solidFill>
@@ -5112,7 +5202,7 @@
           <a:sym typeface="Arial"/>
         </a:defRPr>
       </a:lvl6pPr>
-      <a:lvl7pPr lvl="6" marR="0" rtl="0" algn="l">
+      <a:lvl7pPr marR="0" lvl="6" algn="l" rtl="0">
         <a:lnSpc>
           <a:spcPct val="100000"/>
         </a:lnSpc>
@@ -5126,7 +5216,7 @@
           <a:srgbClr val="000000"/>
         </a:buClr>
         <a:buFont typeface="Arial"/>
-        <a:defRPr b="0" i="0" sz="1400" u="none" cap="none" strike="noStrike">
+        <a:defRPr sz="1400" b="0" i="0" u="none" strike="noStrike" cap="none">
           <a:solidFill>
             <a:srgbClr val="000000"/>
           </a:solidFill>
@@ -5136,7 +5226,7 @@
           <a:sym typeface="Arial"/>
         </a:defRPr>
       </a:lvl7pPr>
-      <a:lvl8pPr lvl="7" marR="0" rtl="0" algn="l">
+      <a:lvl8pPr marR="0" lvl="7" algn="l" rtl="0">
         <a:lnSpc>
           <a:spcPct val="100000"/>
         </a:lnSpc>
@@ -5150,7 +5240,7 @@
           <a:srgbClr val="000000"/>
         </a:buClr>
         <a:buFont typeface="Arial"/>
-        <a:defRPr b="0" i="0" sz="1400" u="none" cap="none" strike="noStrike">
+        <a:defRPr sz="1400" b="0" i="0" u="none" strike="noStrike" cap="none">
           <a:solidFill>
             <a:srgbClr val="000000"/>
           </a:solidFill>
@@ -5160,7 +5250,7 @@
           <a:sym typeface="Arial"/>
         </a:defRPr>
       </a:lvl8pPr>
-      <a:lvl9pPr lvl="8" marR="0" rtl="0" algn="l">
+      <a:lvl9pPr marR="0" lvl="8" algn="l" rtl="0">
         <a:lnSpc>
           <a:spcPct val="100000"/>
         </a:lnSpc>
@@ -5174,7 +5264,7 @@
           <a:srgbClr val="000000"/>
         </a:buClr>
         <a:buFont typeface="Arial"/>
-        <a:defRPr b="0" i="0" sz="1400" u="none" cap="none" strike="noStrike">
+        <a:defRPr sz="1400" b="0" i="0" u="none" strike="noStrike" cap="none">
           <a:solidFill>
             <a:srgbClr val="000000"/>
           </a:solidFill>
@@ -5186,7 +5276,7 @@
       </a:lvl9pPr>
     </p:titleStyle>
     <p:bodyStyle>
-      <a:defPPr lvl="0" marR="0" rtl="0" algn="l">
+      <a:defPPr marR="0" lvl="0" algn="l" rtl="0">
         <a:lnSpc>
           <a:spcPct val="100000"/>
         </a:lnSpc>
@@ -5197,7 +5287,7 @@
           <a:spcPts val="0"/>
         </a:spcAft>
       </a:defPPr>
-      <a:lvl1pPr lvl="0" marR="0" rtl="0" algn="l">
+      <a:lvl1pPr marR="0" lvl="0" algn="l" rtl="0">
         <a:lnSpc>
           <a:spcPct val="100000"/>
         </a:lnSpc>
@@ -5211,7 +5301,7 @@
           <a:srgbClr val="000000"/>
         </a:buClr>
         <a:buFont typeface="Arial"/>
-        <a:defRPr b="0" i="0" sz="1400" u="none" cap="none" strike="noStrike">
+        <a:defRPr sz="1400" b="0" i="0" u="none" strike="noStrike" cap="none">
           <a:solidFill>
             <a:srgbClr val="000000"/>
           </a:solidFill>
@@ -5221,7 +5311,7 @@
           <a:sym typeface="Arial"/>
         </a:defRPr>
       </a:lvl1pPr>
-      <a:lvl2pPr lvl="1" marR="0" rtl="0" algn="l">
+      <a:lvl2pPr marR="0" lvl="1" algn="l" rtl="0">
         <a:lnSpc>
           <a:spcPct val="100000"/>
         </a:lnSpc>
@@ -5235,7 +5325,7 @@
           <a:srgbClr val="000000"/>
         </a:buClr>
         <a:buFont typeface="Arial"/>
-        <a:defRPr b="0" i="0" sz="1400" u="none" cap="none" strike="noStrike">
+        <a:defRPr sz="1400" b="0" i="0" u="none" strike="noStrike" cap="none">
           <a:solidFill>
             <a:srgbClr val="000000"/>
           </a:solidFill>
@@ -5245,7 +5335,7 @@
           <a:sym typeface="Arial"/>
         </a:defRPr>
       </a:lvl2pPr>
-      <a:lvl3pPr lvl="2" marR="0" rtl="0" algn="l">
+      <a:lvl3pPr marR="0" lvl="2" algn="l" rtl="0">
         <a:lnSpc>
           <a:spcPct val="100000"/>
         </a:lnSpc>
@@ -5259,7 +5349,7 @@
           <a:srgbClr val="000000"/>
         </a:buClr>
         <a:buFont typeface="Arial"/>
-        <a:defRPr b="0" i="0" sz="1400" u="none" cap="none" strike="noStrike">
+        <a:defRPr sz="1400" b="0" i="0" u="none" strike="noStrike" cap="none">
           <a:solidFill>
             <a:srgbClr val="000000"/>
           </a:solidFill>
@@ -5269,7 +5359,7 @@
           <a:sym typeface="Arial"/>
         </a:defRPr>
       </a:lvl3pPr>
-      <a:lvl4pPr lvl="3" marR="0" rtl="0" algn="l">
+      <a:lvl4pPr marR="0" lvl="3" algn="l" rtl="0">
         <a:lnSpc>
           <a:spcPct val="100000"/>
         </a:lnSpc>
@@ -5283,7 +5373,7 @@
           <a:srgbClr val="000000"/>
         </a:buClr>
         <a:buFont typeface="Arial"/>
-        <a:defRPr b="0" i="0" sz="1400" u="none" cap="none" strike="noStrike">
+        <a:defRPr sz="1400" b="0" i="0" u="none" strike="noStrike" cap="none">
           <a:solidFill>
             <a:srgbClr val="000000"/>
           </a:solidFill>
@@ -5293,7 +5383,7 @@
           <a:sym typeface="Arial"/>
         </a:defRPr>
       </a:lvl4pPr>
-      <a:lvl5pPr lvl="4" marR="0" rtl="0" algn="l">
+      <a:lvl5pPr marR="0" lvl="4" algn="l" rtl="0">
         <a:lnSpc>
           <a:spcPct val="100000"/>
         </a:lnSpc>
@@ -5307,7 +5397,7 @@
           <a:srgbClr val="000000"/>
         </a:buClr>
         <a:buFont typeface="Arial"/>
-        <a:defRPr b="0" i="0" sz="1400" u="none" cap="none" strike="noStrike">
+        <a:defRPr sz="1400" b="0" i="0" u="none" strike="noStrike" cap="none">
           <a:solidFill>
             <a:srgbClr val="000000"/>
           </a:solidFill>
@@ -5317,7 +5407,7 @@
           <a:sym typeface="Arial"/>
         </a:defRPr>
       </a:lvl5pPr>
-      <a:lvl6pPr lvl="5" marR="0" rtl="0" algn="l">
+      <a:lvl6pPr marR="0" lvl="5" algn="l" rtl="0">
         <a:lnSpc>
           <a:spcPct val="100000"/>
         </a:lnSpc>
@@ -5331,7 +5421,7 @@
           <a:srgbClr val="000000"/>
         </a:buClr>
         <a:buFont typeface="Arial"/>
-        <a:defRPr b="0" i="0" sz="1400" u="none" cap="none" strike="noStrike">
+        <a:defRPr sz="1400" b="0" i="0" u="none" strike="noStrike" cap="none">
           <a:solidFill>
             <a:srgbClr val="000000"/>
           </a:solidFill>
@@ -5341,7 +5431,7 @@
           <a:sym typeface="Arial"/>
         </a:defRPr>
       </a:lvl6pPr>
-      <a:lvl7pPr lvl="6" marR="0" rtl="0" algn="l">
+      <a:lvl7pPr marR="0" lvl="6" algn="l" rtl="0">
         <a:lnSpc>
           <a:spcPct val="100000"/>
         </a:lnSpc>
@@ -5355,7 +5445,7 @@
           <a:srgbClr val="000000"/>
         </a:buClr>
         <a:buFont typeface="Arial"/>
-        <a:defRPr b="0" i="0" sz="1400" u="none" cap="none" strike="noStrike">
+        <a:defRPr sz="1400" b="0" i="0" u="none" strike="noStrike" cap="none">
           <a:solidFill>
             <a:srgbClr val="000000"/>
           </a:solidFill>
@@ -5365,7 +5455,7 @@
           <a:sym typeface="Arial"/>
         </a:defRPr>
       </a:lvl7pPr>
-      <a:lvl8pPr lvl="7" marR="0" rtl="0" algn="l">
+      <a:lvl8pPr marR="0" lvl="7" algn="l" rtl="0">
         <a:lnSpc>
           <a:spcPct val="100000"/>
         </a:lnSpc>
@@ -5379,7 +5469,7 @@
           <a:srgbClr val="000000"/>
         </a:buClr>
         <a:buFont typeface="Arial"/>
-        <a:defRPr b="0" i="0" sz="1400" u="none" cap="none" strike="noStrike">
+        <a:defRPr sz="1400" b="0" i="0" u="none" strike="noStrike" cap="none">
           <a:solidFill>
             <a:srgbClr val="000000"/>
           </a:solidFill>
@@ -5389,7 +5479,7 @@
           <a:sym typeface="Arial"/>
         </a:defRPr>
       </a:lvl8pPr>
-      <a:lvl9pPr lvl="8" marR="0" rtl="0" algn="l">
+      <a:lvl9pPr marR="0" lvl="8" algn="l" rtl="0">
         <a:lnSpc>
           <a:spcPct val="100000"/>
         </a:lnSpc>
@@ -5403,7 +5493,7 @@
           <a:srgbClr val="000000"/>
         </a:buClr>
         <a:buFont typeface="Arial"/>
-        <a:defRPr b="0" i="0" sz="1400" u="none" cap="none" strike="noStrike">
+        <a:defRPr sz="1400" b="0" i="0" u="none" strike="noStrike" cap="none">
           <a:solidFill>
             <a:srgbClr val="000000"/>
           </a:solidFill>
@@ -5415,7 +5505,7 @@
       </a:lvl9pPr>
     </p:bodyStyle>
     <p:otherStyle>
-      <a:defPPr lvl="0" marR="0" rtl="0" algn="l">
+      <a:defPPr marR="0" lvl="0" algn="l" rtl="0">
         <a:lnSpc>
           <a:spcPct val="100000"/>
         </a:lnSpc>
@@ -5426,7 +5516,7 @@
           <a:spcPts val="0"/>
         </a:spcAft>
       </a:defPPr>
-      <a:lvl1pPr lvl="0" marR="0" rtl="0" algn="l">
+      <a:lvl1pPr marR="0" lvl="0" algn="l" rtl="0">
         <a:lnSpc>
           <a:spcPct val="100000"/>
         </a:lnSpc>
@@ -5440,7 +5530,7 @@
           <a:srgbClr val="000000"/>
         </a:buClr>
         <a:buFont typeface="Arial"/>
-        <a:defRPr b="0" i="0" sz="1400" u="none" cap="none" strike="noStrike">
+        <a:defRPr sz="1400" b="0" i="0" u="none" strike="noStrike" cap="none">
           <a:solidFill>
             <a:srgbClr val="000000"/>
           </a:solidFill>
@@ -5450,7 +5540,7 @@
           <a:sym typeface="Arial"/>
         </a:defRPr>
       </a:lvl1pPr>
-      <a:lvl2pPr lvl="1" marR="0" rtl="0" algn="l">
+      <a:lvl2pPr marR="0" lvl="1" algn="l" rtl="0">
         <a:lnSpc>
           <a:spcPct val="100000"/>
         </a:lnSpc>
@@ -5464,7 +5554,7 @@
           <a:srgbClr val="000000"/>
         </a:buClr>
         <a:buFont typeface="Arial"/>
-        <a:defRPr b="0" i="0" sz="1400" u="none" cap="none" strike="noStrike">
+        <a:defRPr sz="1400" b="0" i="0" u="none" strike="noStrike" cap="none">
           <a:solidFill>
             <a:srgbClr val="000000"/>
           </a:solidFill>
@@ -5474,7 +5564,7 @@
           <a:sym typeface="Arial"/>
         </a:defRPr>
       </a:lvl2pPr>
-      <a:lvl3pPr lvl="2" marR="0" rtl="0" algn="l">
+      <a:lvl3pPr marR="0" lvl="2" algn="l" rtl="0">
         <a:lnSpc>
           <a:spcPct val="100000"/>
         </a:lnSpc>
@@ -5488,7 +5578,7 @@
           <a:srgbClr val="000000"/>
         </a:buClr>
         <a:buFont typeface="Arial"/>
-        <a:defRPr b="0" i="0" sz="1400" u="none" cap="none" strike="noStrike">
+        <a:defRPr sz="1400" b="0" i="0" u="none" strike="noStrike" cap="none">
           <a:solidFill>
             <a:srgbClr val="000000"/>
           </a:solidFill>
@@ -5498,7 +5588,7 @@
           <a:sym typeface="Arial"/>
         </a:defRPr>
       </a:lvl3pPr>
-      <a:lvl4pPr lvl="3" marR="0" rtl="0" algn="l">
+      <a:lvl4pPr marR="0" lvl="3" algn="l" rtl="0">
         <a:lnSpc>
           <a:spcPct val="100000"/>
         </a:lnSpc>
@@ -5512,7 +5602,7 @@
           <a:srgbClr val="000000"/>
         </a:buClr>
         <a:buFont typeface="Arial"/>
-        <a:defRPr b="0" i="0" sz="1400" u="none" cap="none" strike="noStrike">
+        <a:defRPr sz="1400" b="0" i="0" u="none" strike="noStrike" cap="none">
           <a:solidFill>
             <a:srgbClr val="000000"/>
           </a:solidFill>
@@ -5522,7 +5612,7 @@
           <a:sym typeface="Arial"/>
         </a:defRPr>
       </a:lvl4pPr>
-      <a:lvl5pPr lvl="4" marR="0" rtl="0" algn="l">
+      <a:lvl5pPr marR="0" lvl="4" algn="l" rtl="0">
         <a:lnSpc>
           <a:spcPct val="100000"/>
         </a:lnSpc>
@@ -5536,7 +5626,7 @@
           <a:srgbClr val="000000"/>
         </a:buClr>
         <a:buFont typeface="Arial"/>
-        <a:defRPr b="0" i="0" sz="1400" u="none" cap="none" strike="noStrike">
+        <a:defRPr sz="1400" b="0" i="0" u="none" strike="noStrike" cap="none">
           <a:solidFill>
             <a:srgbClr val="000000"/>
           </a:solidFill>
@@ -5546,7 +5636,7 @@
           <a:sym typeface="Arial"/>
         </a:defRPr>
       </a:lvl5pPr>
-      <a:lvl6pPr lvl="5" marR="0" rtl="0" algn="l">
+      <a:lvl6pPr marR="0" lvl="5" algn="l" rtl="0">
         <a:lnSpc>
           <a:spcPct val="100000"/>
         </a:lnSpc>
@@ -5560,7 +5650,7 @@
           <a:srgbClr val="000000"/>
         </a:buClr>
         <a:buFont typeface="Arial"/>
-        <a:defRPr b="0" i="0" sz="1400" u="none" cap="none" strike="noStrike">
+        <a:defRPr sz="1400" b="0" i="0" u="none" strike="noStrike" cap="none">
           <a:solidFill>
             <a:srgbClr val="000000"/>
           </a:solidFill>
@@ -5570,7 +5660,7 @@
           <a:sym typeface="Arial"/>
         </a:defRPr>
       </a:lvl6pPr>
-      <a:lvl7pPr lvl="6" marR="0" rtl="0" algn="l">
+      <a:lvl7pPr marR="0" lvl="6" algn="l" rtl="0">
         <a:lnSpc>
           <a:spcPct val="100000"/>
         </a:lnSpc>
@@ -5584,7 +5674,7 @@
           <a:srgbClr val="000000"/>
         </a:buClr>
         <a:buFont typeface="Arial"/>
-        <a:defRPr b="0" i="0" sz="1400" u="none" cap="none" strike="noStrike">
+        <a:defRPr sz="1400" b="0" i="0" u="none" strike="noStrike" cap="none">
           <a:solidFill>
             <a:srgbClr val="000000"/>
           </a:solidFill>
@@ -5594,7 +5684,7 @@
           <a:sym typeface="Arial"/>
         </a:defRPr>
       </a:lvl7pPr>
-      <a:lvl8pPr lvl="7" marR="0" rtl="0" algn="l">
+      <a:lvl8pPr marR="0" lvl="7" algn="l" rtl="0">
         <a:lnSpc>
           <a:spcPct val="100000"/>
         </a:lnSpc>
@@ -5608,7 +5698,7 @@
           <a:srgbClr val="000000"/>
         </a:buClr>
         <a:buFont typeface="Arial"/>
-        <a:defRPr b="0" i="0" sz="1400" u="none" cap="none" strike="noStrike">
+        <a:defRPr sz="1400" b="0" i="0" u="none" strike="noStrike" cap="none">
           <a:solidFill>
             <a:srgbClr val="000000"/>
           </a:solidFill>
@@ -5618,7 +5708,7 @@
           <a:sym typeface="Arial"/>
         </a:defRPr>
       </a:lvl8pPr>
-      <a:lvl9pPr lvl="8" marR="0" rtl="0" algn="l">
+      <a:lvl9pPr marR="0" lvl="8" algn="l" rtl="0">
         <a:lnSpc>
           <a:spcPct val="100000"/>
         </a:lnSpc>
@@ -5632,7 +5722,7 @@
           <a:srgbClr val="000000"/>
         </a:buClr>
         <a:buFont typeface="Arial"/>
-        <a:defRPr b="0" i="0" sz="1400" u="none" cap="none" strike="noStrike">
+        <a:defRPr sz="1400" b="0" i="0" u="none" strike="noStrike" cap="none">
           <a:solidFill>
             <a:srgbClr val="000000"/>
           </a:solidFill>
@@ -5646,7 +5736,7 @@
   </p:txStyles>
   <p:extLst>
     <p:ext uri="{27BBF7A9-308A-43DC-89C8-2F10F3537804}">
-      <p15:sldGuideLst>
+      <p15:sldGuideLst xmlns:p15="http://schemas.microsoft.com/office/powerpoint/2012/main">
         <p15:guide id="1" orient="horz" pos="3127">
           <p15:clr>
             <a:srgbClr val="E46962"/>
@@ -5659,11 +5749,11 @@
 </file>
 
 <file path=ppt/slides/slide1.xml><?xml version="1.0" encoding="utf-8"?>
-<p:sld xmlns:a="http://schemas.openxmlformats.org/drawingml/2006/main" xmlns:r="http://schemas.openxmlformats.org/officeDocument/2006/relationships" xmlns:mc="http://schemas.openxmlformats.org/markup-compatibility/2006" xmlns:mv="urn:schemas-microsoft-com:mac:vml" xmlns:p="http://schemas.openxmlformats.org/presentationml/2006/main" xmlns:c="http://schemas.openxmlformats.org/drawingml/2006/chart" xmlns:dgm="http://schemas.openxmlformats.org/drawingml/2006/diagram" xmlns:o="urn:schemas-microsoft-com:office:office" xmlns:v="urn:schemas-microsoft-com:vml" xmlns:pvml="urn:schemas-microsoft-com:office:powerpoint" xmlns:com="http://schemas.openxmlformats.org/drawingml/2006/compatibility" xmlns:p14="http://schemas.microsoft.com/office/powerpoint/2010/main" xmlns:p15="http://schemas.microsoft.com/office/powerpoint/2012/main" xmlns:ahyp="http://schemas.microsoft.com/office/drawing/2018/hyperlinkcolor">
+<p:sld xmlns:a="http://schemas.openxmlformats.org/drawingml/2006/main" xmlns:r="http://schemas.openxmlformats.org/officeDocument/2006/relationships" xmlns:p="http://schemas.openxmlformats.org/presentationml/2006/main">
   <p:cSld>
     <p:spTree>
       <p:nvGrpSpPr>
-        <p:cNvPr id="38" name="Shape 38"/>
+        <p:cNvPr id="1" name="Shape 38"/>
         <p:cNvGrpSpPr/>
         <p:nvPr/>
       </p:nvGrpSpPr>
@@ -5678,9 +5768,11 @@
       <p:sp>
         <p:nvSpPr>
           <p:cNvPr id="39" name="Google Shape;39;p7"/>
-          <p:cNvSpPr txBox="1"/>
+          <p:cNvSpPr txBox="1">
+            <a:spLocks noGrp="1"/>
+          </p:cNvSpPr>
           <p:nvPr>
-            <p:ph idx="1" type="subTitle"/>
+            <p:ph type="subTitle" idx="1"/>
           </p:nvPr>
         </p:nvSpPr>
         <p:spPr>
@@ -5697,12 +5789,12 @@
           </a:ln>
         </p:spPr>
         <p:txBody>
-          <a:bodyPr anchorCtr="0" anchor="t" bIns="0" lIns="0" spcFirstLastPara="1" rIns="0" wrap="square" tIns="0">
+          <a:bodyPr spcFirstLastPara="1" wrap="square" lIns="0" tIns="0" rIns="0" bIns="0" anchor="t" anchorCtr="0">
             <a:normAutofit/>
           </a:bodyPr>
           <a:lstStyle/>
           <a:p>
-            <a:pPr indent="-347472" lvl="0" marL="347472" rtl="0" algn="l">
+            <a:pPr marL="347472" lvl="0" indent="-347472" algn="l" rtl="0">
               <a:lnSpc>
                 <a:spcPct val="115000"/>
               </a:lnSpc>
@@ -5730,7 +5822,9 @@
       <p:sp>
         <p:nvSpPr>
           <p:cNvPr id="40" name="Google Shape;40;p7"/>
-          <p:cNvSpPr txBox="1"/>
+          <p:cNvSpPr txBox="1">
+            <a:spLocks noGrp="1"/>
+          </p:cNvSpPr>
           <p:nvPr>
             <p:ph type="title"/>
           </p:nvPr>
@@ -5749,12 +5843,12 @@
           </a:ln>
         </p:spPr>
         <p:txBody>
-          <a:bodyPr anchorCtr="0" anchor="t" bIns="0" lIns="0" spcFirstLastPara="1" rIns="0" wrap="square" tIns="0">
+          <a:bodyPr spcFirstLastPara="1" wrap="square" lIns="0" tIns="0" rIns="0" bIns="0" anchor="t" anchorCtr="0">
             <a:normAutofit/>
           </a:bodyPr>
           <a:lstStyle/>
           <a:p>
-            <a:pPr indent="0" lvl="0" marL="0" rtl="0" algn="l">
+            <a:pPr marL="0" lvl="0" indent="0" algn="l" rtl="0">
               <a:lnSpc>
                 <a:spcPct val="100000"/>
               </a:lnSpc>
@@ -5797,9 +5891,11 @@
       <p:sp>
         <p:nvSpPr>
           <p:cNvPr id="41" name="Google Shape;41;p7"/>
-          <p:cNvSpPr txBox="1"/>
+          <p:cNvSpPr txBox="1">
+            <a:spLocks noGrp="1"/>
+          </p:cNvSpPr>
           <p:nvPr>
-            <p:ph idx="2" type="body"/>
+            <p:ph type="body" idx="2"/>
           </p:nvPr>
         </p:nvSpPr>
         <p:spPr>
@@ -5816,12 +5912,12 @@
           </a:ln>
         </p:spPr>
         <p:txBody>
-          <a:bodyPr anchorCtr="0" anchor="t" bIns="0" lIns="0" spcFirstLastPara="1" rIns="0" wrap="square" tIns="0">
+          <a:bodyPr spcFirstLastPara="1" wrap="square" lIns="0" tIns="0" rIns="0" bIns="0" anchor="t" anchorCtr="0">
             <a:noAutofit/>
           </a:bodyPr>
           <a:lstStyle/>
           <a:p>
-            <a:pPr indent="0" lvl="0" marL="0" rtl="0" algn="l">
+            <a:pPr marL="0" lvl="0" indent="0" algn="l" rtl="0">
               <a:lnSpc>
                 <a:spcPct val="115000"/>
               </a:lnSpc>
@@ -5845,9 +5941,11 @@
       <p:sp>
         <p:nvSpPr>
           <p:cNvPr id="42" name="Google Shape;42;p7"/>
-          <p:cNvSpPr txBox="1"/>
+          <p:cNvSpPr txBox="1">
+            <a:spLocks noGrp="1"/>
+          </p:cNvSpPr>
           <p:nvPr>
-            <p:ph idx="3" type="body"/>
+            <p:ph type="body" idx="3"/>
           </p:nvPr>
         </p:nvSpPr>
         <p:spPr>
@@ -5864,12 +5962,12 @@
           </a:ln>
         </p:spPr>
         <p:txBody>
-          <a:bodyPr anchorCtr="0" anchor="t" bIns="0" lIns="0" spcFirstLastPara="1" rIns="0" wrap="square" tIns="0">
+          <a:bodyPr spcFirstLastPara="1" wrap="square" lIns="0" tIns="0" rIns="0" bIns="0" anchor="t" anchorCtr="0">
             <a:noAutofit/>
           </a:bodyPr>
           <a:lstStyle/>
           <a:p>
-            <a:pPr indent="0" lvl="0" marL="0" rtl="0" algn="l">
+            <a:pPr marL="0" lvl="0" indent="0" algn="l" rtl="0">
               <a:lnSpc>
                 <a:spcPct val="115000"/>
               </a:lnSpc>
@@ -5893,9 +5991,11 @@
       <p:sp>
         <p:nvSpPr>
           <p:cNvPr id="43" name="Google Shape;43;p7"/>
-          <p:cNvSpPr txBox="1"/>
+          <p:cNvSpPr txBox="1">
+            <a:spLocks noGrp="1"/>
+          </p:cNvSpPr>
           <p:nvPr>
-            <p:ph idx="4" type="body"/>
+            <p:ph type="body" idx="4"/>
           </p:nvPr>
         </p:nvSpPr>
         <p:spPr>
@@ -5912,12 +6012,12 @@
           </a:ln>
         </p:spPr>
         <p:txBody>
-          <a:bodyPr anchorCtr="0" anchor="t" bIns="0" lIns="0" spcFirstLastPara="1" rIns="0" wrap="square" tIns="0">
+          <a:bodyPr spcFirstLastPara="1" wrap="square" lIns="0" tIns="0" rIns="0" bIns="0" anchor="t" anchorCtr="0">
             <a:noAutofit/>
           </a:bodyPr>
           <a:lstStyle/>
           <a:p>
-            <a:pPr indent="0" lvl="0" marL="0" rtl="0" algn="l">
+            <a:pPr marL="0" lvl="0" indent="0" algn="l" rtl="0">
               <a:lnSpc>
                 <a:spcPct val="115000"/>
               </a:lnSpc>
@@ -5941,9 +6041,11 @@
       <p:sp>
         <p:nvSpPr>
           <p:cNvPr id="44" name="Google Shape;44;p7"/>
-          <p:cNvSpPr txBox="1"/>
+          <p:cNvSpPr txBox="1">
+            <a:spLocks noGrp="1"/>
+          </p:cNvSpPr>
           <p:nvPr>
-            <p:ph idx="5" type="body"/>
+            <p:ph type="body" idx="5"/>
           </p:nvPr>
         </p:nvSpPr>
         <p:spPr>
@@ -5960,12 +6062,12 @@
           </a:ln>
         </p:spPr>
         <p:txBody>
-          <a:bodyPr anchorCtr="0" anchor="t" bIns="0" lIns="0" spcFirstLastPara="1" rIns="0" wrap="square" tIns="0">
+          <a:bodyPr spcFirstLastPara="1" wrap="square" lIns="0" tIns="0" rIns="0" bIns="0" anchor="t" anchorCtr="0">
             <a:noAutofit/>
           </a:bodyPr>
           <a:lstStyle/>
           <a:p>
-            <a:pPr indent="0" lvl="0" marL="0" rtl="0" algn="l">
+            <a:pPr marL="0" lvl="0" indent="0" algn="l" rtl="0">
               <a:lnSpc>
                 <a:spcPct val="115000"/>
               </a:lnSpc>
@@ -5995,11 +6097,11 @@
 </file>
 
 <file path=ppt/slides/slide2.xml><?xml version="1.0" encoding="utf-8"?>
-<p:sld xmlns:a="http://schemas.openxmlformats.org/drawingml/2006/main" xmlns:r="http://schemas.openxmlformats.org/officeDocument/2006/relationships" xmlns:mc="http://schemas.openxmlformats.org/markup-compatibility/2006" xmlns:mv="urn:schemas-microsoft-com:mac:vml" xmlns:p="http://schemas.openxmlformats.org/presentationml/2006/main" xmlns:c="http://schemas.openxmlformats.org/drawingml/2006/chart" xmlns:dgm="http://schemas.openxmlformats.org/drawingml/2006/diagram" xmlns:o="urn:schemas-microsoft-com:office:office" xmlns:v="urn:schemas-microsoft-com:vml" xmlns:pvml="urn:schemas-microsoft-com:office:powerpoint" xmlns:com="http://schemas.openxmlformats.org/drawingml/2006/compatibility" xmlns:p14="http://schemas.microsoft.com/office/powerpoint/2010/main" xmlns:p15="http://schemas.microsoft.com/office/powerpoint/2012/main" xmlns:ahyp="http://schemas.microsoft.com/office/drawing/2018/hyperlinkcolor">
+<p:sld xmlns:a="http://schemas.openxmlformats.org/drawingml/2006/main" xmlns:r="http://schemas.openxmlformats.org/officeDocument/2006/relationships" xmlns:p="http://schemas.openxmlformats.org/presentationml/2006/main">
   <p:cSld>
     <p:spTree>
       <p:nvGrpSpPr>
-        <p:cNvPr id="48" name="Shape 48"/>
+        <p:cNvPr id="1" name="Shape 48"/>
         <p:cNvGrpSpPr/>
         <p:nvPr/>
       </p:nvGrpSpPr>
@@ -6014,7 +6116,9 @@
       <p:sp>
         <p:nvSpPr>
           <p:cNvPr id="49" name="Google Shape;49;p8"/>
-          <p:cNvSpPr txBox="1"/>
+          <p:cNvSpPr txBox="1">
+            <a:spLocks noGrp="1"/>
+          </p:cNvSpPr>
           <p:nvPr>
             <p:ph type="title"/>
           </p:nvPr>
@@ -6033,12 +6137,12 @@
           </a:ln>
         </p:spPr>
         <p:txBody>
-          <a:bodyPr anchorCtr="0" anchor="t" bIns="91425" lIns="91425" spcFirstLastPara="1" rIns="91425" wrap="square" tIns="91425">
+          <a:bodyPr spcFirstLastPara="1" wrap="square" lIns="91425" tIns="91425" rIns="91425" bIns="91425" anchor="t" anchorCtr="0">
             <a:normAutofit fontScale="90000"/>
           </a:bodyPr>
           <a:lstStyle/>
           <a:p>
-            <a:pPr indent="0" lvl="0" marL="0" rtl="0" algn="l">
+            <a:pPr marL="0" lvl="0" indent="0" algn="l" rtl="0">
               <a:lnSpc>
                 <a:spcPct val="100000"/>
               </a:lnSpc>
@@ -6062,9 +6166,11 @@
       <p:sp>
         <p:nvSpPr>
           <p:cNvPr id="50" name="Google Shape;50;p8"/>
-          <p:cNvSpPr txBox="1"/>
+          <p:cNvSpPr txBox="1">
+            <a:spLocks noGrp="1"/>
+          </p:cNvSpPr>
           <p:nvPr>
-            <p:ph idx="1" type="body"/>
+            <p:ph type="body" idx="1"/>
           </p:nvPr>
         </p:nvSpPr>
         <p:spPr>
@@ -6081,12 +6187,12 @@
           </a:ln>
         </p:spPr>
         <p:txBody>
-          <a:bodyPr anchorCtr="0" anchor="t" bIns="91425" lIns="91425" spcFirstLastPara="1" rIns="91425" wrap="square" tIns="91425">
+          <a:bodyPr spcFirstLastPara="1" wrap="square" lIns="91425" tIns="91425" rIns="91425" bIns="91425" anchor="t" anchorCtr="0">
             <a:normAutofit/>
           </a:bodyPr>
           <a:lstStyle/>
           <a:p>
-            <a:pPr indent="0" lvl="0" marL="0" rtl="0" algn="l">
+            <a:pPr marL="0" lvl="0" indent="0" algn="l" rtl="0">
               <a:lnSpc>
                 <a:spcPct val="115000"/>
               </a:lnSpc>
@@ -6105,7 +6211,7 @@
             <a:endParaRPr/>
           </a:p>
           <a:p>
-            <a:pPr indent="-342900" lvl="0" marL="457200" rtl="0" algn="l">
+            <a:pPr marL="457200" lvl="0" indent="-342900" algn="l" rtl="0">
               <a:lnSpc>
                 <a:spcPct val="115000"/>
               </a:lnSpc>
@@ -6135,11 +6241,11 @@
 </file>
 
 <file path=ppt/slides/slide3.xml><?xml version="1.0" encoding="utf-8"?>
-<p:sld xmlns:a="http://schemas.openxmlformats.org/drawingml/2006/main" xmlns:r="http://schemas.openxmlformats.org/officeDocument/2006/relationships" xmlns:mc="http://schemas.openxmlformats.org/markup-compatibility/2006" xmlns:mv="urn:schemas-microsoft-com:mac:vml" xmlns:p="http://schemas.openxmlformats.org/presentationml/2006/main" xmlns:c="http://schemas.openxmlformats.org/drawingml/2006/chart" xmlns:dgm="http://schemas.openxmlformats.org/drawingml/2006/diagram" xmlns:o="urn:schemas-microsoft-com:office:office" xmlns:v="urn:schemas-microsoft-com:vml" xmlns:pvml="urn:schemas-microsoft-com:office:powerpoint" xmlns:com="http://schemas.openxmlformats.org/drawingml/2006/compatibility" xmlns:p14="http://schemas.microsoft.com/office/powerpoint/2010/main" xmlns:p15="http://schemas.microsoft.com/office/powerpoint/2012/main" xmlns:ahyp="http://schemas.microsoft.com/office/drawing/2018/hyperlinkcolor">
+<p:sld xmlns:a="http://schemas.openxmlformats.org/drawingml/2006/main" xmlns:r="http://schemas.openxmlformats.org/officeDocument/2006/relationships" xmlns:p="http://schemas.openxmlformats.org/presentationml/2006/main">
   <p:cSld>
     <p:spTree>
       <p:nvGrpSpPr>
-        <p:cNvPr id="54" name="Shape 54"/>
+        <p:cNvPr id="1" name="Shape 54"/>
         <p:cNvGrpSpPr/>
         <p:nvPr/>
       </p:nvGrpSpPr>
@@ -6154,7 +6260,9 @@
       <p:sp>
         <p:nvSpPr>
           <p:cNvPr id="55" name="Google Shape;55;p9"/>
-          <p:cNvSpPr txBox="1"/>
+          <p:cNvSpPr txBox="1">
+            <a:spLocks noGrp="1"/>
+          </p:cNvSpPr>
           <p:nvPr>
             <p:ph type="title"/>
           </p:nvPr>
@@ -6169,12 +6277,12 @@
           </a:prstGeom>
         </p:spPr>
         <p:txBody>
-          <a:bodyPr anchorCtr="0" anchor="ctr" bIns="91425" lIns="91425" spcFirstLastPara="1" rIns="91425" wrap="square" tIns="91425">
+          <a:bodyPr spcFirstLastPara="1" wrap="square" lIns="91425" tIns="91425" rIns="91425" bIns="91425" anchor="ctr" anchorCtr="0">
             <a:normAutofit fontScale="90000"/>
           </a:bodyPr>
           <a:lstStyle/>
           <a:p>
-            <a:pPr indent="0" lvl="0" marL="0" rtl="0" algn="l">
+            <a:pPr marL="0" lvl="0" indent="0" algn="l" rtl="0">
               <a:spcBef>
                 <a:spcPts val="0"/>
               </a:spcBef>
@@ -6194,9 +6302,11 @@
       <p:sp>
         <p:nvSpPr>
           <p:cNvPr id="56" name="Google Shape;56;p9"/>
-          <p:cNvSpPr txBox="1"/>
+          <p:cNvSpPr txBox="1">
+            <a:spLocks noGrp="1"/>
+          </p:cNvSpPr>
           <p:nvPr>
-            <p:ph idx="1" type="body"/>
+            <p:ph type="body" idx="1"/>
           </p:nvPr>
         </p:nvSpPr>
         <p:spPr>
@@ -6209,12 +6319,12 @@
           </a:prstGeom>
         </p:spPr>
         <p:txBody>
-          <a:bodyPr anchorCtr="0" anchor="t" bIns="91425" lIns="91425" spcFirstLastPara="1" rIns="91425" wrap="square" tIns="91425">
+          <a:bodyPr spcFirstLastPara="1" wrap="square" lIns="91425" tIns="91425" rIns="91425" bIns="91425" anchor="t" anchorCtr="0">
             <a:normAutofit/>
           </a:bodyPr>
           <a:lstStyle/>
           <a:p>
-            <a:pPr indent="0" lvl="0" marL="0" rtl="0" algn="l">
+            <a:pPr marL="0" lvl="0" indent="0" algn="l" rtl="0">
               <a:spcBef>
                 <a:spcPts val="0"/>
               </a:spcBef>
@@ -6234,9 +6344,11 @@
       <p:sp>
         <p:nvSpPr>
           <p:cNvPr id="57" name="Google Shape;57;p9"/>
-          <p:cNvSpPr txBox="1"/>
+          <p:cNvSpPr txBox="1">
+            <a:spLocks noGrp="1"/>
+          </p:cNvSpPr>
           <p:nvPr>
-            <p:ph idx="2" type="body"/>
+            <p:ph type="body" idx="2"/>
           </p:nvPr>
         </p:nvSpPr>
         <p:spPr>
@@ -6249,12 +6361,12 @@
           </a:prstGeom>
         </p:spPr>
         <p:txBody>
-          <a:bodyPr anchorCtr="0" anchor="t" bIns="91425" lIns="91425" spcFirstLastPara="1" rIns="91425" wrap="square" tIns="91425">
+          <a:bodyPr spcFirstLastPara="1" wrap="square" lIns="91425" tIns="91425" rIns="91425" bIns="91425" anchor="t" anchorCtr="0">
             <a:normAutofit/>
           </a:bodyPr>
           <a:lstStyle/>
           <a:p>
-            <a:pPr indent="0" lvl="0" marL="0" rtl="0" algn="l">
+            <a:pPr marL="0" lvl="0" indent="0" algn="l" rtl="0">
               <a:spcBef>
                 <a:spcPts val="0"/>
               </a:spcBef>
@@ -6280,11 +6392,11 @@
 </file>
 
 <file path=ppt/slides/slide4.xml><?xml version="1.0" encoding="utf-8"?>
-<p:sld xmlns:a="http://schemas.openxmlformats.org/drawingml/2006/main" xmlns:r="http://schemas.openxmlformats.org/officeDocument/2006/relationships" xmlns:mc="http://schemas.openxmlformats.org/markup-compatibility/2006" xmlns:mv="urn:schemas-microsoft-com:mac:vml" xmlns:p="http://schemas.openxmlformats.org/presentationml/2006/main" xmlns:c="http://schemas.openxmlformats.org/drawingml/2006/chart" xmlns:dgm="http://schemas.openxmlformats.org/drawingml/2006/diagram" xmlns:o="urn:schemas-microsoft-com:office:office" xmlns:v="urn:schemas-microsoft-com:vml" xmlns:pvml="urn:schemas-microsoft-com:office:powerpoint" xmlns:com="http://schemas.openxmlformats.org/drawingml/2006/compatibility" xmlns:p14="http://schemas.microsoft.com/office/powerpoint/2010/main" xmlns:p15="http://schemas.microsoft.com/office/powerpoint/2012/main" xmlns:ahyp="http://schemas.microsoft.com/office/drawing/2018/hyperlinkcolor">
+<p:sld xmlns:a="http://schemas.openxmlformats.org/drawingml/2006/main" xmlns:r="http://schemas.openxmlformats.org/officeDocument/2006/relationships" xmlns:p="http://schemas.openxmlformats.org/presentationml/2006/main">
   <p:cSld>
     <p:spTree>
       <p:nvGrpSpPr>
-        <p:cNvPr id="61" name="Shape 61"/>
+        <p:cNvPr id="1" name="Shape 61"/>
         <p:cNvGrpSpPr/>
         <p:nvPr/>
       </p:nvGrpSpPr>
@@ -6299,9 +6411,11 @@
       <p:sp>
         <p:nvSpPr>
           <p:cNvPr id="62" name="Google Shape;62;p10"/>
-          <p:cNvSpPr txBox="1"/>
+          <p:cNvSpPr txBox="1">
+            <a:spLocks noGrp="1"/>
+          </p:cNvSpPr>
           <p:nvPr>
-            <p:ph idx="1" type="subTitle"/>
+            <p:ph type="subTitle" idx="1"/>
           </p:nvPr>
         </p:nvSpPr>
         <p:spPr>
@@ -6318,12 +6432,12 @@
           </a:ln>
         </p:spPr>
         <p:txBody>
-          <a:bodyPr anchorCtr="0" anchor="t" bIns="0" lIns="0" spcFirstLastPara="1" rIns="0" wrap="square" tIns="0">
+          <a:bodyPr spcFirstLastPara="1" wrap="square" lIns="0" tIns="0" rIns="0" bIns="0" anchor="t" anchorCtr="0">
             <a:normAutofit/>
           </a:bodyPr>
           <a:lstStyle/>
           <a:p>
-            <a:pPr indent="-347472" lvl="0" marL="347472" rtl="0" algn="l">
+            <a:pPr marL="347472" lvl="0" indent="-347472" algn="l" rtl="0">
               <a:lnSpc>
                 <a:spcPct val="115000"/>
               </a:lnSpc>
@@ -6351,7 +6465,9 @@
       <p:sp>
         <p:nvSpPr>
           <p:cNvPr id="63" name="Google Shape;63;p10"/>
-          <p:cNvSpPr txBox="1"/>
+          <p:cNvSpPr txBox="1">
+            <a:spLocks noGrp="1"/>
+          </p:cNvSpPr>
           <p:nvPr>
             <p:ph type="title"/>
           </p:nvPr>
@@ -6370,12 +6486,12 @@
           </a:ln>
         </p:spPr>
         <p:txBody>
-          <a:bodyPr anchorCtr="0" anchor="t" bIns="0" lIns="0" spcFirstLastPara="1" rIns="0" wrap="square" tIns="0">
+          <a:bodyPr spcFirstLastPara="1" wrap="square" lIns="0" tIns="0" rIns="0" bIns="0" anchor="t" anchorCtr="0">
             <a:normAutofit/>
           </a:bodyPr>
           <a:lstStyle/>
           <a:p>
-            <a:pPr indent="0" lvl="0" marL="0" rtl="0" algn="l">
+            <a:pPr marL="0" lvl="0" indent="0" algn="l" rtl="0">
               <a:lnSpc>
                 <a:spcPct val="100000"/>
               </a:lnSpc>
@@ -6418,9 +6534,11 @@
       <p:sp>
         <p:nvSpPr>
           <p:cNvPr id="64" name="Google Shape;64;p10"/>
-          <p:cNvSpPr txBox="1"/>
+          <p:cNvSpPr txBox="1">
+            <a:spLocks noGrp="1"/>
+          </p:cNvSpPr>
           <p:nvPr>
-            <p:ph idx="2" type="body"/>
+            <p:ph type="body" idx="2"/>
           </p:nvPr>
         </p:nvSpPr>
         <p:spPr>
@@ -6437,12 +6555,12 @@
           </a:ln>
         </p:spPr>
         <p:txBody>
-          <a:bodyPr anchorCtr="0" anchor="t" bIns="0" lIns="0" spcFirstLastPara="1" rIns="0" wrap="square" tIns="0">
+          <a:bodyPr spcFirstLastPara="1" wrap="square" lIns="0" tIns="0" rIns="0" bIns="0" anchor="t" anchorCtr="0">
             <a:noAutofit/>
           </a:bodyPr>
           <a:lstStyle/>
           <a:p>
-            <a:pPr indent="0" lvl="0" marL="0" rtl="0" algn="l">
+            <a:pPr marL="0" lvl="0" indent="0" algn="l" rtl="0">
               <a:lnSpc>
                 <a:spcPct val="115000"/>
               </a:lnSpc>
@@ -6466,9 +6584,11 @@
       <p:sp>
         <p:nvSpPr>
           <p:cNvPr id="65" name="Google Shape;65;p10"/>
-          <p:cNvSpPr txBox="1"/>
+          <p:cNvSpPr txBox="1">
+            <a:spLocks noGrp="1"/>
+          </p:cNvSpPr>
           <p:nvPr>
-            <p:ph idx="3" type="body"/>
+            <p:ph type="body" idx="3"/>
           </p:nvPr>
         </p:nvSpPr>
         <p:spPr>
@@ -6485,12 +6605,12 @@
           </a:ln>
         </p:spPr>
         <p:txBody>
-          <a:bodyPr anchorCtr="0" anchor="t" bIns="0" lIns="0" spcFirstLastPara="1" rIns="0" wrap="square" tIns="0">
+          <a:bodyPr spcFirstLastPara="1" wrap="square" lIns="0" tIns="0" rIns="0" bIns="0" anchor="t" anchorCtr="0">
             <a:noAutofit/>
           </a:bodyPr>
           <a:lstStyle/>
           <a:p>
-            <a:pPr indent="0" lvl="0" marL="0" rtl="0" algn="l">
+            <a:pPr marL="0" lvl="0" indent="0" algn="l" rtl="0">
               <a:lnSpc>
                 <a:spcPct val="115000"/>
               </a:lnSpc>
@@ -6514,9 +6634,11 @@
       <p:sp>
         <p:nvSpPr>
           <p:cNvPr id="66" name="Google Shape;66;p10"/>
-          <p:cNvSpPr txBox="1"/>
+          <p:cNvSpPr txBox="1">
+            <a:spLocks noGrp="1"/>
+          </p:cNvSpPr>
           <p:nvPr>
-            <p:ph idx="4" type="body"/>
+            <p:ph type="body" idx="4"/>
           </p:nvPr>
         </p:nvSpPr>
         <p:spPr>
@@ -6533,12 +6655,12 @@
           </a:ln>
         </p:spPr>
         <p:txBody>
-          <a:bodyPr anchorCtr="0" anchor="t" bIns="0" lIns="0" spcFirstLastPara="1" rIns="0" wrap="square" tIns="0">
+          <a:bodyPr spcFirstLastPara="1" wrap="square" lIns="0" tIns="0" rIns="0" bIns="0" anchor="t" anchorCtr="0">
             <a:noAutofit/>
           </a:bodyPr>
           <a:lstStyle/>
           <a:p>
-            <a:pPr indent="0" lvl="0" marL="0" rtl="0" algn="l">
+            <a:pPr marL="0" lvl="0" indent="0" algn="l" rtl="0">
               <a:lnSpc>
                 <a:spcPct val="115000"/>
               </a:lnSpc>
@@ -6562,9 +6684,11 @@
       <p:sp>
         <p:nvSpPr>
           <p:cNvPr id="67" name="Google Shape;67;p10"/>
-          <p:cNvSpPr txBox="1"/>
+          <p:cNvSpPr txBox="1">
+            <a:spLocks noGrp="1"/>
+          </p:cNvSpPr>
           <p:nvPr>
-            <p:ph idx="5" type="body"/>
+            <p:ph type="body" idx="5"/>
           </p:nvPr>
         </p:nvSpPr>
         <p:spPr>
@@ -6581,12 +6705,12 @@
           </a:ln>
         </p:spPr>
         <p:txBody>
-          <a:bodyPr anchorCtr="0" anchor="t" bIns="0" lIns="0" spcFirstLastPara="1" rIns="0" wrap="square" tIns="0">
+          <a:bodyPr spcFirstLastPara="1" wrap="square" lIns="0" tIns="0" rIns="0" bIns="0" anchor="t" anchorCtr="0">
             <a:noAutofit/>
           </a:bodyPr>
           <a:lstStyle/>
           <a:p>
-            <a:pPr indent="0" lvl="0" marL="0" rtl="0" algn="l">
+            <a:pPr marL="0" lvl="0" indent="0" algn="l" rtl="0">
               <a:lnSpc>
                 <a:spcPct val="115000"/>
               </a:lnSpc>
@@ -6616,7 +6740,7 @@
 </file>
 
 <file path=ppt/theme/theme1.xml><?xml version="1.0" encoding="utf-8"?>
-<a:theme xmlns:a="http://schemas.openxmlformats.org/drawingml/2006/main" xmlns:r="http://schemas.openxmlformats.org/officeDocument/2006/relationships" name="Simple ars">
+<a:theme xmlns:a="http://schemas.openxmlformats.org/drawingml/2006/main" name="Simple ars">
   <a:themeElements>
     <a:clrScheme name="Custom 2">
       <a:dk1>
@@ -6891,11 +7015,13 @@
       </a:bgFillStyleLst>
     </a:fmtScheme>
   </a:themeElements>
+  <a:objectDefaults/>
+  <a:extraClrSchemeLst/>
 </a:theme>
 </file>
 
 <file path=ppt/theme/theme2.xml><?xml version="1.0" encoding="utf-8"?>
-<a:theme xmlns:a="http://schemas.openxmlformats.org/drawingml/2006/main" xmlns:r="http://schemas.openxmlformats.org/officeDocument/2006/relationships">
+<a:theme xmlns:a="http://schemas.openxmlformats.org/drawingml/2006/main">
   <a:themeElements>
     <a:clrScheme name="Default">
       <a:dk1>
@@ -7170,5 +7296,7 @@
       </a:bgFillStyleLst>
     </a:fmtScheme>
   </a:themeElements>
+  <a:objectDefaults/>
+  <a:extraClrSchemeLst/>
 </a:theme>
 </file>
--- a/presentation_arscontrol_template.pptx
+++ b/presentation_arscontrol_template.pptx
@@ -244,6 +244,11 @@
       </a:defRPr>
     </a:lvl9pPr>
   </p:defaultTextStyle>
+  <p:extLst>
+    <p:ext uri="{EFAFB233-063F-42B5-8137-9DF3F51BA10A}">
+      <p15:sldGuideLst xmlns:p15="http://schemas.microsoft.com/office/powerpoint/2012/main"/>
+    </p:ext>
+  </p:extLst>
 </p:presentation>
 </file>
 

--- a/presentation_arscontrol_template.pptx
+++ b/presentation_arscontrol_template.pptx
@@ -6210,10 +6210,10 @@
               <a:buNone/>
             </a:pPr>
             <a:r>
-              <a:rPr lang="en-US"/>
+              <a:rPr lang="en-US" dirty="0"/>
               <a:t>Lorem ipsum</a:t>
             </a:r>
-            <a:endParaRPr/>
+            <a:endParaRPr dirty="0"/>
           </a:p>
           <a:p>
             <a:pPr marL="457200" lvl="0" indent="-342900" algn="l" rtl="0">
@@ -6230,10 +6230,10 @@
               <a:buChar char="●"/>
             </a:pPr>
             <a:r>
-              <a:rPr lang="en-US"/>
+              <a:rPr lang="en-US" dirty="0"/>
               <a:t>Lorem ipsum</a:t>
             </a:r>
-            <a:endParaRPr/>
+            <a:endParaRPr dirty="0"/>
           </a:p>
         </p:txBody>
       </p:sp>
@@ -6297,10 +6297,10 @@
               <a:buNone/>
             </a:pPr>
             <a:r>
-              <a:rPr lang="en-US"/>
+              <a:rPr lang="en-US" dirty="0"/>
               <a:t>Example two slide</a:t>
             </a:r>
-            <a:endParaRPr/>
+            <a:endParaRPr dirty="0"/>
           </a:p>
         </p:txBody>
       </p:sp>
@@ -6339,10 +6339,10 @@
               <a:buNone/>
             </a:pPr>
             <a:r>
-              <a:rPr lang="en-US"/>
+              <a:rPr lang="en-US" dirty="0"/>
               <a:t>Lorem ipsum</a:t>
             </a:r>
-            <a:endParaRPr/>
+            <a:endParaRPr dirty="0"/>
           </a:p>
         </p:txBody>
       </p:sp>
@@ -6381,10 +6381,10 @@
               <a:buNone/>
             </a:pPr>
             <a:r>
-              <a:rPr lang="en-US"/>
+              <a:rPr lang="en-US" dirty="0"/>
               <a:t>Lorem ipsum</a:t>
             </a:r>
-            <a:endParaRPr/>
+            <a:endParaRPr dirty="0"/>
           </a:p>
         </p:txBody>
       </p:sp>
